--- a/M2/Cor-Paul_mtg/3_2026_5_1/slide.pptx
+++ b/M2/Cor-Paul_mtg/3_2026_5_1/slide.pptx
@@ -5,7 +5,7 @@
     <p:sldMasterId id="2147483648" r:id="rId1"/>
   </p:sldMasterIdLst>
   <p:notesMasterIdLst>
-    <p:notesMasterId r:id="rId8"/>
+    <p:notesMasterId r:id="rId11"/>
   </p:notesMasterIdLst>
   <p:sldIdLst>
     <p:sldId id="257" r:id="rId2"/>
@@ -14,6 +14,9 @@
     <p:sldId id="263" r:id="rId5"/>
     <p:sldId id="264" r:id="rId6"/>
     <p:sldId id="265" r:id="rId7"/>
+    <p:sldId id="266" r:id="rId8"/>
+    <p:sldId id="267" r:id="rId9"/>
+    <p:sldId id="268" r:id="rId10"/>
   </p:sldIdLst>
   <p:sldSz cx="12192000" cy="6858000"/>
   <p:notesSz cx="6858000" cy="9144000"/>
@@ -202,7 +205,7 @@
           <a:p>
             <a:fld id="{D69E84B2-C7FA-F64D-A93C-8A78A8AA0602}" type="datetimeFigureOut">
               <a:rPr kumimoji="1" lang="ja-JP" altLang="en-US" smtClean="0"/>
-              <a:t>2026/4/20</a:t>
+              <a:t>2026/4/27</a:t>
             </a:fld>
             <a:endParaRPr kumimoji="1" lang="ja-JP" altLang="en-US"/>
           </a:p>
@@ -547,7 +550,15 @@
           <a:p>
             <a:r>
               <a:rPr lang="en" altLang="ja-JP" dirty="0"/>
-              <a:t>"Let’s start with a review of our previous meeting</a:t>
+              <a:t>First</a:t>
+            </a:r>
+            <a:r>
+              <a:rPr lang="ja-JP" altLang="en"/>
+              <a:t>，</a:t>
+            </a:r>
+            <a:r>
+              <a:rPr lang="en" altLang="ja-JP" dirty="0"/>
+              <a:t>I'd like to review our previous meeting and the current to-do items </a:t>
             </a:r>
             <a:r>
               <a:rPr lang="ja-JP" altLang="en"/>
@@ -555,7 +566,7 @@
             </a:r>
             <a:r>
               <a:rPr lang="en" altLang="ja-JP" dirty="0"/>
-              <a:t>A key decision from last time was to establish our research focus on 'Automated Organization of Optimal Speedrun Strategy Evolution'</a:t>
+              <a:t>We conducted detection tests using GPT and Gemini on both cherry-picked single frames and 41-frame temporal sequences </a:t>
             </a:r>
             <a:r>
               <a:rPr lang="ja-JP" altLang="en"/>
@@ -563,7 +574,7 @@
             </a:r>
             <a:r>
               <a:rPr lang="en" altLang="ja-JP" dirty="0"/>
-              <a:t>Regarding our technical approach</a:t>
+              <a:t>The sequence-based approach provides 1.34 seconds of movement data</a:t>
             </a:r>
             <a:r>
               <a:rPr lang="ja-JP" altLang="en"/>
@@ -571,15 +582,15 @@
             </a:r>
             <a:r>
               <a:rPr lang="en" altLang="ja-JP" dirty="0"/>
-              <a:t>we agreed to adopt a methodology similar to Wentao et al</a:t>
+              <a:t>allowing us to verify if the models can identify glitches that require temporal context</a:t>
             </a:r>
             <a:r>
               <a:rPr lang="ja-JP" altLang="en"/>
-              <a:t>．，</a:t>
+              <a:t>，</a:t>
             </a:r>
             <a:r>
               <a:rPr lang="en" altLang="ja-JP" dirty="0"/>
-              <a:t>utilizing an LLM pre-trained with a specific glitch list for video analysis</a:t>
+              <a:t>such as speed-based anomalies or state-change defects that are unidentifiable in static images </a:t>
             </a:r>
             <a:r>
               <a:rPr lang="ja-JP" altLang="en"/>
@@ -587,23 +598,19 @@
             </a:r>
             <a:r>
               <a:rPr lang="en" altLang="ja-JP" dirty="0"/>
-              <a:t>Our primary to-do items following that meeting were to create a comprehensive SM64 glitch list and to </a:t>
-            </a:r>
-            <a:r>
-              <a:rPr lang="en" altLang="ja-JP" b="1" dirty="0"/>
-              <a:t>select a World Record video and perform a detection test</a:t>
+              <a:t>Additionally</a:t>
+            </a:r>
+            <a:r>
+              <a:rPr lang="ja-JP" altLang="en"/>
+              <a:t>，</a:t>
             </a:r>
             <a:r>
               <a:rPr lang="en" altLang="ja-JP" dirty="0"/>
-              <a:t> using VLM and LLM based on that list</a:t>
+              <a:t>we expanded our annotation data by manually annotating at least 10 world record videos to check for consistency in glitch types and durations across different runs </a:t>
             </a:r>
             <a:r>
               <a:rPr lang="ja-JP" altLang="en"/>
               <a:t>．</a:t>
-            </a:r>
-            <a:r>
-              <a:rPr lang="en" altLang="ja-JP" dirty="0"/>
-              <a:t>"</a:t>
             </a:r>
             <a:endParaRPr kumimoji="1" lang="ja-JP" altLang="en-US"/>
           </a:p>
@@ -691,7 +698,51 @@
           <a:p>
             <a:r>
               <a:rPr lang="en" altLang="ja-JP" dirty="0"/>
-              <a:t>"Moving on to our current progress. I have successfully compiled a specialized list of SM64 speedrun glitches and completed the manual frame-by-frame labeling for the selected World Record video. I’ve also performed a statistical analysis of these glitch occurrences. Currently, I am in the process of reviewing Wentao’s paper to deeply understand and correctly implement their methodology. The next step will be to conduct a performance test using this Wentao-inspired approach."</a:t>
+              <a:t>Regarding the single-frame VLM test</a:t>
+            </a:r>
+            <a:r>
+              <a:rPr lang="ja-JP" altLang="en"/>
+              <a:t>，</a:t>
+            </a:r>
+            <a:r>
+              <a:rPr lang="en" altLang="ja-JP" dirty="0"/>
+              <a:t>the results showed that correct labels were obtained in only 2 out of 8 cases </a:t>
+            </a:r>
+            <a:r>
+              <a:rPr lang="ja-JP" altLang="en"/>
+              <a:t>．</a:t>
+            </a:r>
+            <a:r>
+              <a:rPr lang="en" altLang="ja-JP" dirty="0"/>
+              <a:t>From our observations</a:t>
+            </a:r>
+            <a:r>
+              <a:rPr lang="ja-JP" altLang="en"/>
+              <a:t>，</a:t>
+            </a:r>
+            <a:r>
+              <a:rPr lang="en" altLang="ja-JP" dirty="0"/>
+              <a:t>detection appears feasible when spatial or locational cues are prominent and distinct </a:t>
+            </a:r>
+            <a:r>
+              <a:rPr lang="ja-JP" altLang="en"/>
+              <a:t>．</a:t>
+            </a:r>
+            <a:r>
+              <a:rPr lang="en" altLang="ja-JP" dirty="0"/>
+              <a:t>However</a:t>
+            </a:r>
+            <a:r>
+              <a:rPr lang="ja-JP" altLang="en"/>
+              <a:t>，</a:t>
+            </a:r>
+            <a:r>
+              <a:rPr lang="en" altLang="ja-JP" dirty="0"/>
+              <a:t>a significant limitation is that static images fail to capture the temporal context that is essential for identifying speedrun-specific glitches </a:t>
+            </a:r>
+            <a:r>
+              <a:rPr lang="ja-JP" altLang="en"/>
+              <a:t>．</a:t>
             </a:r>
             <a:endParaRPr kumimoji="1" lang="ja-JP" altLang="en-US"/>
           </a:p>
@@ -778,16 +829,84 @@
           <a:lstStyle/>
           <a:p>
             <a:r>
-              <a:rPr kumimoji="1" lang="en" altLang="ja-JP" dirty="0"/>
-              <a:t>"Regarding the creation of the SM64 glitch list , I initially used </a:t>
-            </a:r>
-            <a:r>
-              <a:rPr kumimoji="1" lang="en" altLang="ja-JP" dirty="0" err="1"/>
-              <a:t>NotebookLM</a:t>
-            </a:r>
-            <a:r>
-              <a:rPr kumimoji="1" lang="en" altLang="ja-JP" dirty="0"/>
-              <a:t> to crawl relevant websites. However, I found that many existing wikis contained significant 'noise,' such as glitches that aren't used in speedruns or intended game mechanics. To resolve this, I identified four highly reliable sources and went through an iterative refinement process using AI tools and manual feedback. This resulted in a finalized list of 19 specific glitches."</a:t>
+              <a:rPr lang="en" altLang="ja-JP" dirty="0"/>
+              <a:t>Moving on to the frame sequence VLM test</a:t>
+            </a:r>
+            <a:r>
+              <a:rPr lang="ja-JP" altLang="en"/>
+              <a:t>，</a:t>
+            </a:r>
+            <a:r>
+              <a:rPr lang="en" altLang="ja-JP" dirty="0"/>
+              <a:t>while only 3 out of 8 cases were labeled correctly</a:t>
+            </a:r>
+            <a:r>
+              <a:rPr lang="ja-JP" altLang="en"/>
+              <a:t>，</a:t>
+            </a:r>
+            <a:r>
+              <a:rPr lang="en" altLang="ja-JP" dirty="0"/>
+              <a:t>the reasoning in 6 out of 8 cases accurately captured the actual events</a:t>
+            </a:r>
+            <a:r>
+              <a:rPr lang="ja-JP" altLang="en"/>
+              <a:t>．</a:t>
+            </a:r>
+            <a:r>
+              <a:rPr lang="en" altLang="ja-JP" dirty="0"/>
+              <a:t>We believe this is because the current glitch list was not entirely appropriate</a:t>
+            </a:r>
+            <a:r>
+              <a:rPr lang="ja-JP" altLang="en"/>
+              <a:t>，</a:t>
+            </a:r>
+            <a:r>
+              <a:rPr lang="en" altLang="ja-JP" dirty="0"/>
+              <a:t>so I will propose a new approach at the end of this presentation</a:t>
+            </a:r>
+            <a:r>
+              <a:rPr lang="ja-JP" altLang="en"/>
+              <a:t>．</a:t>
+            </a:r>
+            <a:r>
+              <a:rPr lang="en" altLang="ja-JP" dirty="0"/>
+              <a:t>Our analysis of the failures revealed that the two cases that were not identified involved glitches characterized by extremely high-speed movement</a:t>
+            </a:r>
+            <a:r>
+              <a:rPr lang="ja-JP" altLang="en"/>
+              <a:t>．</a:t>
+            </a:r>
+            <a:r>
+              <a:rPr lang="en" altLang="ja-JP" dirty="0"/>
+              <a:t>We also performed hypothesis testing by explicitly stating the 1.34-second duration in the prompt to improve detection</a:t>
+            </a:r>
+            <a:r>
+              <a:rPr lang="ja-JP" altLang="en"/>
+              <a:t>．</a:t>
+            </a:r>
+            <a:r>
+              <a:rPr lang="en" altLang="ja-JP" dirty="0"/>
+              <a:t>Unfortunately</a:t>
+            </a:r>
+            <a:r>
+              <a:rPr lang="ja-JP" altLang="en"/>
+              <a:t>，</a:t>
+            </a:r>
+            <a:r>
+              <a:rPr lang="en" altLang="ja-JP" dirty="0"/>
+              <a:t>this backfired as the model became biased by the numerical data</a:t>
+            </a:r>
+            <a:r>
+              <a:rPr lang="ja-JP" altLang="en"/>
+              <a:t>，</a:t>
+            </a:r>
+            <a:r>
+              <a:rPr lang="en" altLang="ja-JP" dirty="0"/>
+              <a:t>leading to a decrease in accuracy</a:t>
+            </a:r>
+            <a:r>
+              <a:rPr lang="ja-JP" altLang="en"/>
+              <a:t>．</a:t>
             </a:r>
             <a:endParaRPr kumimoji="1" lang="ja-JP" altLang="en-US"/>
           </a:p>
@@ -875,15 +994,43 @@
           <a:p>
             <a:r>
               <a:rPr lang="en" altLang="ja-JP" dirty="0"/>
-              <a:t>"For the video labeling, I selected </a:t>
-            </a:r>
-            <a:r>
-              <a:rPr lang="en" altLang="ja-JP" dirty="0" err="1"/>
-              <a:t>Suigi’s</a:t>
+              <a:t>Next</a:t>
+            </a:r>
+            <a:r>
+              <a:rPr lang="ja-JP" altLang="en"/>
+              <a:t>，</a:t>
             </a:r>
             <a:r>
               <a:rPr lang="en" altLang="ja-JP" dirty="0"/>
-              <a:t> 0-star category world record. This record was achieved on December 30, 2025, with a final time of 6 minutes and 14 seconds. To ensure high-quality ground truth data, I performed manual annotation of all glitch occurrences at a per-frame level. This level of granularity is crucial for evaluating our detection model’s accuracy."</a:t>
+              <a:t>I'll discuss the expansion of the annotation data </a:t>
+            </a:r>
+            <a:r>
+              <a:rPr lang="ja-JP" altLang="en"/>
+              <a:t>．</a:t>
+            </a:r>
+            <a:r>
+              <a:rPr lang="en" altLang="ja-JP" dirty="0"/>
+              <a:t>Regarding our sampling methodology</a:t>
+            </a:r>
+            <a:r>
+              <a:rPr lang="ja-JP" altLang="en"/>
+              <a:t>，</a:t>
+            </a:r>
+            <a:r>
+              <a:rPr lang="en" altLang="ja-JP" dirty="0"/>
+              <a:t>I sampled and annotated 10 representative runs that marked major record improvements and were available on YouTube</a:t>
+            </a:r>
+            <a:r>
+              <a:rPr lang="ja-JP" altLang="en"/>
+              <a:t>，</a:t>
+            </a:r>
+            <a:r>
+              <a:rPr lang="en" altLang="ja-JP" dirty="0"/>
+              <a:t>ensuring balanced historical coverage </a:t>
+            </a:r>
+            <a:r>
+              <a:rPr lang="ja-JP" altLang="en"/>
+              <a:t>．</a:t>
             </a:r>
             <a:endParaRPr kumimoji="1" lang="ja-JP" altLang="en-US"/>
           </a:p>
@@ -930,7 +1077,13 @@
   <p:cSld>
     <p:spTree>
       <p:nvGrpSpPr>
-        <p:cNvPr id="1" name=""/>
+        <p:cNvPr id="1" name="">
+          <a:extLst>
+            <a:ext uri="{FF2B5EF4-FFF2-40B4-BE49-F238E27FC236}">
+              <a16:creationId xmlns:a16="http://schemas.microsoft.com/office/drawing/2014/main" id="{EFD7BF40-2B25-AE51-3844-EB4EC6534B33}"/>
+            </a:ext>
+          </a:extLst>
+        </p:cNvPr>
         <p:cNvGrpSpPr/>
         <p:nvPr/>
       </p:nvGrpSpPr>
@@ -944,7 +1097,13 @@
       </p:grpSpPr>
       <p:sp>
         <p:nvSpPr>
-          <p:cNvPr id="2" name="スライド イメージ プレースホルダー 1"/>
+          <p:cNvPr id="2" name="スライド イメージ プレースホルダー 1">
+            <a:extLst>
+              <a:ext uri="{FF2B5EF4-FFF2-40B4-BE49-F238E27FC236}">
+                <a16:creationId xmlns:a16="http://schemas.microsoft.com/office/drawing/2014/main" id="{204FED9A-1E4E-B385-123F-3A72AE384702}"/>
+              </a:ext>
+            </a:extLst>
+          </p:cNvPr>
           <p:cNvSpPr>
             <a:spLocks noGrp="1" noRot="1" noChangeAspect="1"/>
           </p:cNvSpPr>
@@ -956,7 +1115,13 @@
       </p:sp>
       <p:sp>
         <p:nvSpPr>
-          <p:cNvPr id="3" name="ノート プレースホルダー 2"/>
+          <p:cNvPr id="3" name="ノート プレースホルダー 2">
+            <a:extLst>
+              <a:ext uri="{FF2B5EF4-FFF2-40B4-BE49-F238E27FC236}">
+                <a16:creationId xmlns:a16="http://schemas.microsoft.com/office/drawing/2014/main" id="{88FB2EFA-CE09-0FE4-F4A8-328A7D91BA34}"/>
+              </a:ext>
+            </a:extLst>
+          </p:cNvPr>
           <p:cNvSpPr>
             <a:spLocks noGrp="1"/>
           </p:cNvSpPr>
@@ -970,216 +1135,90 @@
           <a:lstStyle/>
           <a:p>
             <a:r>
-              <a:rPr kumimoji="1" lang="en" altLang="ja-JP" dirty="0"/>
-              <a:t>"On this slide</a:t>
-            </a:r>
-            <a:r>
-              <a:rPr kumimoji="1" lang="ja-JP" altLang="en"/>
+              <a:rPr lang="en" altLang="ja-JP" dirty="0"/>
+              <a:t>Next</a:t>
+            </a:r>
+            <a:r>
+              <a:rPr lang="ja-JP" altLang="en"/>
               <a:t>，</a:t>
             </a:r>
             <a:r>
-              <a:rPr kumimoji="1" lang="en" altLang="ja-JP" dirty="0"/>
-              <a:t>we will look at the statistical analysis of the glitch occurrences </a:t>
-            </a:r>
-            <a:r>
-              <a:rPr kumimoji="1" lang="ja-JP" altLang="en"/>
+              <a:rPr lang="en" altLang="ja-JP" dirty="0"/>
+              <a:t>I will summarize our annotation results</a:t>
+            </a:r>
+            <a:r>
+              <a:rPr lang="ja-JP" altLang="en"/>
               <a:t>．</a:t>
             </a:r>
             <a:r>
-              <a:rPr kumimoji="1" lang="en" altLang="ja-JP" dirty="0"/>
-              <a:t>First</a:t>
-            </a:r>
-            <a:r>
-              <a:rPr kumimoji="1" lang="ja-JP" altLang="en"/>
+              <a:rPr lang="en" altLang="ja-JP" dirty="0"/>
+              <a:t>Although the raw data is omitted from this slide due to space constraints</a:t>
+            </a:r>
+            <a:r>
+              <a:rPr lang="ja-JP" altLang="en"/>
               <a:t>，</a:t>
             </a:r>
             <a:r>
-              <a:rPr kumimoji="1" lang="en" altLang="ja-JP" dirty="0"/>
-              <a:t>let me explain what we see here </a:t>
-            </a:r>
-            <a:r>
-              <a:rPr kumimoji="1" lang="ja-JP" altLang="en"/>
+              <a:rPr lang="en" altLang="ja-JP" dirty="0"/>
+              <a:t>our analysis reveals that the types of glitches utilized have remained largely consistent over the years</a:t>
+            </a:r>
+            <a:r>
+              <a:rPr lang="ja-JP" altLang="en"/>
+              <a:t>，</a:t>
+            </a:r>
+            <a:r>
+              <a:rPr lang="en" altLang="ja-JP" dirty="0"/>
+              <a:t>with only minor shifts such as the adoption of the Pole Glitch and recent BLJ usage</a:t>
+            </a:r>
+            <a:r>
+              <a:rPr lang="ja-JP" altLang="en"/>
               <a:t>．</a:t>
             </a:r>
             <a:r>
-              <a:rPr kumimoji="1" lang="en" altLang="ja-JP" dirty="0"/>
-              <a:t>The table at the top summarizes each glitch by its frequency and total duration in frames </a:t>
-            </a:r>
-            <a:r>
-              <a:rPr kumimoji="1" lang="ja-JP" altLang="en"/>
+              <a:rPr lang="en" altLang="ja-JP" dirty="0"/>
+              <a:t>Regarding the duration of these glitches</a:t>
+            </a:r>
+            <a:r>
+              <a:rPr lang="ja-JP" altLang="en"/>
+              <a:t>，</a:t>
+            </a:r>
+            <a:r>
+              <a:rPr lang="en" altLang="ja-JP" dirty="0"/>
+              <a:t>we identified two primary patterns: those that remain stable and those that are steadily decreasing</a:t>
+            </a:r>
+            <a:r>
+              <a:rPr lang="ja-JP" altLang="en"/>
               <a:t>．</a:t>
             </a:r>
             <a:r>
-              <a:rPr kumimoji="1" lang="en" altLang="ja-JP" dirty="0"/>
-              <a:t>The visualization chart below maps these glitches onto the video’s timeline</a:t>
-            </a:r>
-            <a:r>
-              <a:rPr kumimoji="1" lang="ja-JP" altLang="en"/>
+              <a:rPr lang="en" altLang="ja-JP" dirty="0"/>
+              <a:t>We interpret the reductions in frame counts as a direct result of improved player proficiency</a:t>
+            </a:r>
+            <a:r>
+              <a:rPr lang="ja-JP" altLang="en"/>
               <a:t>，</a:t>
             </a:r>
             <a:r>
-              <a:rPr kumimoji="1" lang="en" altLang="ja-JP" dirty="0"/>
-              <a:t>showing exactly when they occur during the run </a:t>
-            </a:r>
-            <a:r>
-              <a:rPr kumimoji="1" lang="ja-JP" altLang="en"/>
+              <a:rPr lang="en" altLang="ja-JP" dirty="0"/>
+              <a:t>whereas occasional increases in duration reflect the extreme execution difficulty of certain tricks that remain unstable even for elite players</a:t>
+            </a:r>
+            <a:r>
+              <a:rPr lang="ja-JP" altLang="en"/>
               <a:t>．</a:t>
             </a:r>
-            <a:r>
-              <a:rPr kumimoji="1" lang="en" altLang="ja-JP" dirty="0"/>
-              <a:t>""In this world record video</a:t>
-            </a:r>
-            <a:r>
-              <a:rPr kumimoji="1" lang="ja-JP" altLang="en"/>
-              <a:t>，</a:t>
-            </a:r>
-            <a:r>
-              <a:rPr kumimoji="1" lang="en" altLang="ja-JP" dirty="0"/>
-              <a:t>five types of glitches were utilized </a:t>
-            </a:r>
-            <a:r>
-              <a:rPr kumimoji="1" lang="ja-JP" altLang="en"/>
-              <a:t>．</a:t>
-            </a:r>
-            <a:r>
-              <a:rPr kumimoji="1" lang="en" altLang="ja-JP" dirty="0"/>
-              <a:t>I will now walk through the data for each </a:t>
-            </a:r>
-            <a:r>
-              <a:rPr kumimoji="1" lang="en" altLang="ja-JP" dirty="0" err="1"/>
-              <a:t>type:"BLJ</a:t>
-            </a:r>
-            <a:r>
-              <a:rPr kumimoji="1" lang="en" altLang="ja-JP" dirty="0"/>
-              <a:t>: This glitch involves accumulating speed via backward jumps to clip through walls </a:t>
-            </a:r>
-            <a:r>
-              <a:rPr kumimoji="1" lang="ja-JP" altLang="en"/>
-              <a:t>．</a:t>
-            </a:r>
-            <a:r>
-              <a:rPr kumimoji="1" lang="en" altLang="ja-JP" dirty="0"/>
-              <a:t>As shown in the visualization</a:t>
-            </a:r>
-            <a:r>
-              <a:rPr kumimoji="1" lang="ja-JP" altLang="en"/>
-              <a:t>，</a:t>
-            </a:r>
-            <a:r>
-              <a:rPr kumimoji="1" lang="en" altLang="ja-JP" dirty="0"/>
-              <a:t>it was used in three separate instances for a total of 339 frames </a:t>
-            </a:r>
-            <a:r>
-              <a:rPr kumimoji="1" lang="ja-JP" altLang="en"/>
-              <a:t>．</a:t>
-            </a:r>
-            <a:r>
-              <a:rPr kumimoji="1" lang="en" altLang="ja-JP" dirty="0"/>
-              <a:t>LBLJ: This is a specific BLJ performed in the lobby to bypass the 8-star door </a:t>
-            </a:r>
-            <a:r>
-              <a:rPr kumimoji="1" lang="ja-JP" altLang="en"/>
-              <a:t>．</a:t>
-            </a:r>
-            <a:r>
-              <a:rPr kumimoji="1" lang="en" altLang="ja-JP" dirty="0"/>
-              <a:t>It occurred once for a duration of 170 frames </a:t>
-            </a:r>
-            <a:r>
-              <a:rPr kumimoji="1" lang="ja-JP" altLang="en"/>
-              <a:t>．</a:t>
-            </a:r>
-            <a:r>
-              <a:rPr kumimoji="1" lang="en" altLang="ja-JP" dirty="0"/>
-              <a:t>DDD Skip: This bypasses the 30-star door and the Dire, Dire Docks entrance </a:t>
-            </a:r>
-            <a:r>
-              <a:rPr kumimoji="1" lang="ja-JP" altLang="en"/>
-              <a:t>．</a:t>
-            </a:r>
-            <a:r>
-              <a:rPr kumimoji="1" lang="en" altLang="ja-JP" dirty="0"/>
-              <a:t>It was used once and lasted 179 frames </a:t>
-            </a:r>
-            <a:r>
-              <a:rPr kumimoji="1" lang="ja-JP" altLang="en"/>
-              <a:t>．</a:t>
-            </a:r>
-            <a:r>
-              <a:rPr kumimoji="1" lang="en" altLang="ja-JP" dirty="0"/>
-              <a:t>Pole Glitch: This allows Mario to warp from the bottom of a pole to the top instantly </a:t>
-            </a:r>
-            <a:r>
-              <a:rPr kumimoji="1" lang="ja-JP" altLang="en"/>
-              <a:t>．</a:t>
-            </a:r>
-            <a:r>
-              <a:rPr kumimoji="1" lang="en" altLang="ja-JP" dirty="0"/>
-              <a:t>It appears once on the timeline for 34 frames </a:t>
-            </a:r>
-            <a:r>
-              <a:rPr kumimoji="1" lang="ja-JP" altLang="en"/>
-              <a:t>．</a:t>
-            </a:r>
-            <a:r>
-              <a:rPr kumimoji="1" lang="en" altLang="ja-JP" dirty="0"/>
-              <a:t>Ledge Clipping: This involves clipping through walls via geometry seams </a:t>
-            </a:r>
-            <a:r>
-              <a:rPr kumimoji="1" lang="ja-JP" altLang="en"/>
-              <a:t>．</a:t>
-            </a:r>
-            <a:r>
-              <a:rPr kumimoji="1" lang="en" altLang="ja-JP" dirty="0"/>
-              <a:t>It was performed twice</a:t>
-            </a:r>
-            <a:r>
-              <a:rPr kumimoji="1" lang="ja-JP" altLang="en"/>
-              <a:t>，</a:t>
-            </a:r>
-            <a:r>
-              <a:rPr kumimoji="1" lang="en" altLang="ja-JP" dirty="0"/>
-              <a:t>totaling 54 frames </a:t>
-            </a:r>
-            <a:r>
-              <a:rPr kumimoji="1" lang="ja-JP" altLang="en"/>
-              <a:t>．</a:t>
-            </a:r>
-            <a:r>
-              <a:rPr kumimoji="1" lang="en" altLang="ja-JP" dirty="0"/>
-              <a:t>"In summary</a:t>
-            </a:r>
-            <a:r>
-              <a:rPr kumimoji="1" lang="ja-JP" altLang="en"/>
-              <a:t>，</a:t>
-            </a:r>
-            <a:r>
-              <a:rPr kumimoji="1" lang="en" altLang="ja-JP" dirty="0"/>
-              <a:t>we captured 8 total glitch occurrences </a:t>
-            </a:r>
-            <a:r>
-              <a:rPr kumimoji="1" lang="ja-JP" altLang="en"/>
-              <a:t>．</a:t>
-            </a:r>
-            <a:r>
-              <a:rPr kumimoji="1" lang="en" altLang="ja-JP" dirty="0"/>
-              <a:t>These results identify the exact moments where glitches were actively used for a grand total of 776 frames throughout the run </a:t>
-            </a:r>
-            <a:r>
-              <a:rPr kumimoji="1" lang="ja-JP" altLang="en"/>
-              <a:t>．</a:t>
-            </a:r>
-            <a:r>
-              <a:rPr kumimoji="1" lang="en" altLang="ja-JP" dirty="0"/>
-              <a:t>"</a:t>
-            </a:r>
             <a:endParaRPr kumimoji="1" lang="ja-JP" altLang="en-US"/>
           </a:p>
         </p:txBody>
       </p:sp>
       <p:sp>
         <p:nvSpPr>
-          <p:cNvPr id="4" name="スライド番号プレースホルダー 3"/>
+          <p:cNvPr id="4" name="スライド番号プレースホルダー 3">
+            <a:extLst>
+              <a:ext uri="{FF2B5EF4-FFF2-40B4-BE49-F238E27FC236}">
+                <a16:creationId xmlns:a16="http://schemas.microsoft.com/office/drawing/2014/main" id="{6172B1CD-345C-9359-D9EB-85241D1B44BC}"/>
+              </a:ext>
+            </a:extLst>
+          </p:cNvPr>
           <p:cNvSpPr>
             <a:spLocks noGrp="1"/>
           </p:cNvSpPr>
@@ -1203,7 +1242,7 @@
     </p:spTree>
     <p:extLst>
       <p:ext uri="{BB962C8B-B14F-4D97-AF65-F5344CB8AC3E}">
-        <p14:creationId xmlns:p14="http://schemas.microsoft.com/office/powerpoint/2010/main" val="3374806889"/>
+        <p14:creationId xmlns:p14="http://schemas.microsoft.com/office/powerpoint/2010/main" val="1580877309"/>
       </p:ext>
     </p:extLst>
   </p:cSld>
@@ -1218,7 +1257,13 @@
   <p:cSld>
     <p:spTree>
       <p:nvGrpSpPr>
-        <p:cNvPr id="1" name=""/>
+        <p:cNvPr id="1" name="">
+          <a:extLst>
+            <a:ext uri="{FF2B5EF4-FFF2-40B4-BE49-F238E27FC236}">
+              <a16:creationId xmlns:a16="http://schemas.microsoft.com/office/drawing/2014/main" id="{163A73A6-0460-B979-2630-75CC9A4BC167}"/>
+            </a:ext>
+          </a:extLst>
+        </p:cNvPr>
         <p:cNvGrpSpPr/>
         <p:nvPr/>
       </p:nvGrpSpPr>
@@ -1232,7 +1277,13 @@
       </p:grpSpPr>
       <p:sp>
         <p:nvSpPr>
-          <p:cNvPr id="2" name="スライド イメージ プレースホルダー 1"/>
+          <p:cNvPr id="2" name="スライド イメージ プレースホルダー 1">
+            <a:extLst>
+              <a:ext uri="{FF2B5EF4-FFF2-40B4-BE49-F238E27FC236}">
+                <a16:creationId xmlns:a16="http://schemas.microsoft.com/office/drawing/2014/main" id="{D8DF955A-D5CC-27A5-3D52-A3F5C9FC9E0C}"/>
+              </a:ext>
+            </a:extLst>
+          </p:cNvPr>
           <p:cNvSpPr>
             <a:spLocks noGrp="1" noRot="1" noChangeAspect="1"/>
           </p:cNvSpPr>
@@ -1244,7 +1295,13 @@
       </p:sp>
       <p:sp>
         <p:nvSpPr>
-          <p:cNvPr id="3" name="ノート プレースホルダー 2"/>
+          <p:cNvPr id="3" name="ノート プレースホルダー 2">
+            <a:extLst>
+              <a:ext uri="{FF2B5EF4-FFF2-40B4-BE49-F238E27FC236}">
+                <a16:creationId xmlns:a16="http://schemas.microsoft.com/office/drawing/2014/main" id="{922E0113-9F24-B9B0-F784-A65635D627B9}"/>
+              </a:ext>
+            </a:extLst>
+          </p:cNvPr>
           <p:cNvSpPr>
             <a:spLocks noGrp="1"/>
           </p:cNvSpPr>
@@ -1259,7 +1316,75 @@
           <a:p>
             <a:r>
               <a:rPr lang="en" altLang="ja-JP" dirty="0"/>
-              <a:t>"Finally, for our future plans , my immediate goal is to complete the implementation and testing of the glitch identification system. I aim to finalize these results by April 15th. Our next meeting is scheduled for April 22nd at the earliest, though it may move to the 29th. To maintain our momentum, I will share the results on Slack as soon as they are ready rather than waiting for the next formal meeting."</a:t>
+              <a:t>Now</a:t>
+            </a:r>
+            <a:r>
+              <a:rPr lang="ja-JP" altLang="en"/>
+              <a:t>，</a:t>
+            </a:r>
+            <a:r>
+              <a:rPr lang="en" altLang="ja-JP" dirty="0"/>
+              <a:t>I'd like to discuss whether the current glitch list is appropriate </a:t>
+            </a:r>
+            <a:r>
+              <a:rPr lang="ja-JP" altLang="en"/>
+              <a:t>．</a:t>
+            </a:r>
+            <a:r>
+              <a:rPr lang="en" altLang="ja-JP" dirty="0"/>
+              <a:t>Some glitches are very similar and potentially confusing </a:t>
+            </a:r>
+            <a:r>
+              <a:rPr lang="ja-JP" altLang="en"/>
+              <a:t>．</a:t>
+            </a:r>
+            <a:r>
+              <a:rPr lang="en" altLang="ja-JP" dirty="0"/>
+              <a:t>For instance</a:t>
+            </a:r>
+            <a:r>
+              <a:rPr lang="ja-JP" altLang="en"/>
+              <a:t>，</a:t>
+            </a:r>
+            <a:r>
+              <a:rPr lang="en" altLang="ja-JP" dirty="0"/>
+              <a:t>a BLJ involves high-speed movement utilizing repeated long jumps</a:t>
+            </a:r>
+            <a:r>
+              <a:rPr lang="ja-JP" altLang="en"/>
+              <a:t>，</a:t>
+            </a:r>
+            <a:r>
+              <a:rPr lang="en" altLang="ja-JP" dirty="0"/>
+              <a:t>whereas an LBLJ is a specific variant of a BLJ performed in the castle lobby </a:t>
+            </a:r>
+            <a:r>
+              <a:rPr lang="ja-JP" altLang="en"/>
+              <a:t>．</a:t>
+            </a:r>
+            <a:r>
+              <a:rPr lang="en" altLang="ja-JP" dirty="0"/>
+              <a:t>Similarly</a:t>
+            </a:r>
+            <a:r>
+              <a:rPr lang="ja-JP" altLang="en"/>
+              <a:t>，</a:t>
+            </a:r>
+            <a:r>
+              <a:rPr lang="en" altLang="ja-JP" dirty="0"/>
+              <a:t>Miscellaneous Wall Clipping (MWC) is achieved without using SM64-specific mechanics like a BLJ</a:t>
+            </a:r>
+            <a:r>
+              <a:rPr lang="ja-JP" altLang="en"/>
+              <a:t>，</a:t>
+            </a:r>
+            <a:r>
+              <a:rPr lang="en" altLang="ja-JP" dirty="0"/>
+              <a:t>while Ledge Clipping is a sub-type of MWC that exploits momentary gaps in collision hitboxes during ledge-grab or pull-up animations </a:t>
+            </a:r>
+            <a:r>
+              <a:rPr lang="ja-JP" altLang="en"/>
+              <a:t>．</a:t>
             </a:r>
             <a:endParaRPr kumimoji="1" lang="ja-JP" altLang="en-US"/>
           </a:p>
@@ -1267,7 +1392,13 @@
       </p:sp>
       <p:sp>
         <p:nvSpPr>
-          <p:cNvPr id="4" name="スライド番号プレースホルダー 3"/>
+          <p:cNvPr id="4" name="スライド番号プレースホルダー 3">
+            <a:extLst>
+              <a:ext uri="{FF2B5EF4-FFF2-40B4-BE49-F238E27FC236}">
+                <a16:creationId xmlns:a16="http://schemas.microsoft.com/office/drawing/2014/main" id="{F8D8E11E-0A0C-DBC2-64FF-FF8D1A13F8D1}"/>
+              </a:ext>
+            </a:extLst>
+          </p:cNvPr>
           <p:cNvSpPr>
             <a:spLocks noGrp="1"/>
           </p:cNvSpPr>
@@ -1291,7 +1422,475 @@
     </p:spTree>
     <p:extLst>
       <p:ext uri="{BB962C8B-B14F-4D97-AF65-F5344CB8AC3E}">
-        <p14:creationId xmlns:p14="http://schemas.microsoft.com/office/powerpoint/2010/main" val="637045643"/>
+        <p14:creationId xmlns:p14="http://schemas.microsoft.com/office/powerpoint/2010/main" val="148862215"/>
+      </p:ext>
+    </p:extLst>
+  </p:cSld>
+  <p:clrMapOvr>
+    <a:masterClrMapping/>
+  </p:clrMapOvr>
+</p:notes>
+</file>
+
+<file path=ppt/notesSlides/notesSlide7.xml><?xml version="1.0" encoding="utf-8"?>
+<p:notes xmlns:a="http://schemas.openxmlformats.org/drawingml/2006/main" xmlns:r="http://schemas.openxmlformats.org/officeDocument/2006/relationships" xmlns:p="http://schemas.openxmlformats.org/presentationml/2006/main">
+  <p:cSld>
+    <p:spTree>
+      <p:nvGrpSpPr>
+        <p:cNvPr id="1" name="">
+          <a:extLst>
+            <a:ext uri="{FF2B5EF4-FFF2-40B4-BE49-F238E27FC236}">
+              <a16:creationId xmlns:a16="http://schemas.microsoft.com/office/drawing/2014/main" id="{D4F0375F-7C4A-B73E-46D6-830EAE8939ED}"/>
+            </a:ext>
+          </a:extLst>
+        </p:cNvPr>
+        <p:cNvGrpSpPr/>
+        <p:nvPr/>
+      </p:nvGrpSpPr>
+      <p:grpSpPr>
+        <a:xfrm>
+          <a:off x="0" y="0"/>
+          <a:ext cx="0" cy="0"/>
+          <a:chOff x="0" y="0"/>
+          <a:chExt cx="0" cy="0"/>
+        </a:xfrm>
+      </p:grpSpPr>
+      <p:sp>
+        <p:nvSpPr>
+          <p:cNvPr id="2" name="スライド イメージ プレースホルダー 1">
+            <a:extLst>
+              <a:ext uri="{FF2B5EF4-FFF2-40B4-BE49-F238E27FC236}">
+                <a16:creationId xmlns:a16="http://schemas.microsoft.com/office/drawing/2014/main" id="{7D7C3024-1F51-4F9E-FB2F-F9D1A4AF64A0}"/>
+              </a:ext>
+            </a:extLst>
+          </p:cNvPr>
+          <p:cNvSpPr>
+            <a:spLocks noGrp="1" noRot="1" noChangeAspect="1"/>
+          </p:cNvSpPr>
+          <p:nvPr>
+            <p:ph type="sldImg"/>
+          </p:nvPr>
+        </p:nvSpPr>
+        <p:spPr/>
+      </p:sp>
+      <p:sp>
+        <p:nvSpPr>
+          <p:cNvPr id="3" name="ノート プレースホルダー 2">
+            <a:extLst>
+              <a:ext uri="{FF2B5EF4-FFF2-40B4-BE49-F238E27FC236}">
+                <a16:creationId xmlns:a16="http://schemas.microsoft.com/office/drawing/2014/main" id="{5208E1E5-5F14-ADC1-5B81-7A10DCC98F13}"/>
+              </a:ext>
+            </a:extLst>
+          </p:cNvPr>
+          <p:cNvSpPr>
+            <a:spLocks noGrp="1"/>
+          </p:cNvSpPr>
+          <p:nvPr>
+            <p:ph type="body" idx="1"/>
+          </p:nvPr>
+        </p:nvSpPr>
+        <p:spPr/>
+        <p:txBody>
+          <a:bodyPr/>
+          <a:lstStyle/>
+          <a:p>
+            <a:r>
+              <a:rPr lang="en" altLang="ja-JP" dirty="0"/>
+              <a:t>Our proposal is to implement a hierarchical glitch list</a:t>
+            </a:r>
+            <a:r>
+              <a:rPr lang="ja-JP" altLang="en"/>
+              <a:t>．</a:t>
+            </a:r>
+            <a:r>
+              <a:rPr lang="en" altLang="ja-JP" dirty="0"/>
+              <a:t>For example</a:t>
+            </a:r>
+            <a:r>
+              <a:rPr lang="ja-JP" altLang="en"/>
+              <a:t>，</a:t>
+            </a:r>
+            <a:r>
+              <a:rPr lang="en" altLang="ja-JP" dirty="0"/>
+              <a:t>since LBLJ is a type of BLJ</a:t>
+            </a:r>
+            <a:r>
+              <a:rPr lang="ja-JP" altLang="en"/>
+              <a:t>，</a:t>
+            </a:r>
+            <a:r>
+              <a:rPr lang="en" altLang="ja-JP" dirty="0"/>
+              <a:t>we define them in a parent-child relationship</a:t>
+            </a:r>
+            <a:r>
+              <a:rPr lang="ja-JP" altLang="en"/>
+              <a:t>．</a:t>
+            </a:r>
+            <a:r>
+              <a:rPr lang="en" altLang="ja-JP" dirty="0"/>
+              <a:t>Under this model</a:t>
+            </a:r>
+            <a:r>
+              <a:rPr lang="ja-JP" altLang="en"/>
+              <a:t>，</a:t>
+            </a:r>
+            <a:r>
+              <a:rPr lang="en" altLang="ja-JP" dirty="0"/>
+              <a:t>if the model identifies an LBLJ as a general BLJ</a:t>
+            </a:r>
+            <a:r>
+              <a:rPr lang="ja-JP" altLang="en"/>
+              <a:t>，</a:t>
+            </a:r>
+            <a:r>
+              <a:rPr lang="en" altLang="ja-JP" dirty="0"/>
+              <a:t>we would consider it a successful detection because the core event was accurately captured</a:t>
+            </a:r>
+            <a:r>
+              <a:rPr lang="ja-JP" altLang="en"/>
+              <a:t>．</a:t>
+            </a:r>
+            <a:endParaRPr kumimoji="1" lang="ja-JP" altLang="en-US"/>
+          </a:p>
+        </p:txBody>
+      </p:sp>
+      <p:sp>
+        <p:nvSpPr>
+          <p:cNvPr id="4" name="スライド番号プレースホルダー 3">
+            <a:extLst>
+              <a:ext uri="{FF2B5EF4-FFF2-40B4-BE49-F238E27FC236}">
+                <a16:creationId xmlns:a16="http://schemas.microsoft.com/office/drawing/2014/main" id="{DE0760AB-CA62-6CDC-42D1-59B0AD0D8C70}"/>
+              </a:ext>
+            </a:extLst>
+          </p:cNvPr>
+          <p:cNvSpPr>
+            <a:spLocks noGrp="1"/>
+          </p:cNvSpPr>
+          <p:nvPr>
+            <p:ph type="sldNum" sz="quarter" idx="5"/>
+          </p:nvPr>
+        </p:nvSpPr>
+        <p:spPr/>
+        <p:txBody>
+          <a:bodyPr/>
+          <a:lstStyle/>
+          <a:p>
+            <a:fld id="{E8ECD7F5-C0ED-D845-8933-D4442048DDE2}" type="slidenum">
+              <a:rPr kumimoji="1" lang="ja-JP" altLang="en-US" smtClean="0"/>
+              <a:t>7</a:t>
+            </a:fld>
+            <a:endParaRPr kumimoji="1" lang="ja-JP" altLang="en-US"/>
+          </a:p>
+        </p:txBody>
+      </p:sp>
+    </p:spTree>
+    <p:extLst>
+      <p:ext uri="{BB962C8B-B14F-4D97-AF65-F5344CB8AC3E}">
+        <p14:creationId xmlns:p14="http://schemas.microsoft.com/office/powerpoint/2010/main" val="53043251"/>
+      </p:ext>
+    </p:extLst>
+  </p:cSld>
+  <p:clrMapOvr>
+    <a:masterClrMapping/>
+  </p:clrMapOvr>
+</p:notes>
+</file>
+
+<file path=ppt/notesSlides/notesSlide8.xml><?xml version="1.0" encoding="utf-8"?>
+<p:notes xmlns:a="http://schemas.openxmlformats.org/drawingml/2006/main" xmlns:r="http://schemas.openxmlformats.org/officeDocument/2006/relationships" xmlns:p="http://schemas.openxmlformats.org/presentationml/2006/main">
+  <p:cSld>
+    <p:spTree>
+      <p:nvGrpSpPr>
+        <p:cNvPr id="1" name="">
+          <a:extLst>
+            <a:ext uri="{FF2B5EF4-FFF2-40B4-BE49-F238E27FC236}">
+              <a16:creationId xmlns:a16="http://schemas.microsoft.com/office/drawing/2014/main" id="{5CBA3B32-4DE7-D830-8FF4-66FC65541F06}"/>
+            </a:ext>
+          </a:extLst>
+        </p:cNvPr>
+        <p:cNvGrpSpPr/>
+        <p:nvPr/>
+      </p:nvGrpSpPr>
+      <p:grpSpPr>
+        <a:xfrm>
+          <a:off x="0" y="0"/>
+          <a:ext cx="0" cy="0"/>
+          <a:chOff x="0" y="0"/>
+          <a:chExt cx="0" cy="0"/>
+        </a:xfrm>
+      </p:grpSpPr>
+      <p:sp>
+        <p:nvSpPr>
+          <p:cNvPr id="2" name="スライド イメージ プレースホルダー 1">
+            <a:extLst>
+              <a:ext uri="{FF2B5EF4-FFF2-40B4-BE49-F238E27FC236}">
+                <a16:creationId xmlns:a16="http://schemas.microsoft.com/office/drawing/2014/main" id="{7D197F5B-D2EA-4DC2-B1AA-7C155880F742}"/>
+              </a:ext>
+            </a:extLst>
+          </p:cNvPr>
+          <p:cNvSpPr>
+            <a:spLocks noGrp="1" noRot="1" noChangeAspect="1"/>
+          </p:cNvSpPr>
+          <p:nvPr>
+            <p:ph type="sldImg"/>
+          </p:nvPr>
+        </p:nvSpPr>
+        <p:spPr/>
+      </p:sp>
+      <p:sp>
+        <p:nvSpPr>
+          <p:cNvPr id="3" name="ノート プレースホルダー 2">
+            <a:extLst>
+              <a:ext uri="{FF2B5EF4-FFF2-40B4-BE49-F238E27FC236}">
+                <a16:creationId xmlns:a16="http://schemas.microsoft.com/office/drawing/2014/main" id="{B62EB41D-52A5-0AC6-489C-0D53FD6C4360}"/>
+              </a:ext>
+            </a:extLst>
+          </p:cNvPr>
+          <p:cNvSpPr>
+            <a:spLocks noGrp="1"/>
+          </p:cNvSpPr>
+          <p:nvPr>
+            <p:ph type="body" idx="1"/>
+          </p:nvPr>
+        </p:nvSpPr>
+        <p:spPr/>
+        <p:txBody>
+          <a:bodyPr/>
+          <a:lstStyle/>
+          <a:p>
+            <a:r>
+              <a:rPr lang="en" altLang="ja-JP" dirty="0"/>
+              <a:t>We are also considering several alternative approaches </a:t>
+            </a:r>
+            <a:r>
+              <a:rPr lang="ja-JP" altLang="en"/>
+              <a:t>．</a:t>
+            </a:r>
+            <a:r>
+              <a:rPr lang="en" altLang="ja-JP" dirty="0"/>
+              <a:t>The first is simplification</a:t>
+            </a:r>
+            <a:r>
+              <a:rPr lang="ja-JP" altLang="en"/>
+              <a:t>，</a:t>
+            </a:r>
+            <a:r>
+              <a:rPr lang="en" altLang="ja-JP" dirty="0"/>
+              <a:t>which involves removing redundant labels to ensure a streamlined and minimal list </a:t>
+            </a:r>
+            <a:r>
+              <a:rPr lang="ja-JP" altLang="en"/>
+              <a:t>．</a:t>
+            </a:r>
+            <a:r>
+              <a:rPr lang="en" altLang="ja-JP" dirty="0"/>
+              <a:t>Another is generalized classification</a:t>
+            </a:r>
+            <a:r>
+              <a:rPr lang="ja-JP" altLang="en"/>
+              <a:t>，</a:t>
+            </a:r>
+            <a:r>
+              <a:rPr lang="en" altLang="ja-JP" dirty="0"/>
+              <a:t>where we adopt high-level categories like Out of Bounds (</a:t>
+            </a:r>
+            <a:r>
+              <a:rPr lang="en" altLang="ja-JP" dirty="0" err="1"/>
+              <a:t>OoB</a:t>
+            </a:r>
+            <a:r>
+              <a:rPr lang="en" altLang="ja-JP" dirty="0"/>
+              <a:t>) and Speed Glitch (SG) to maintain consistency with our previous research </a:t>
+            </a:r>
+            <a:r>
+              <a:rPr lang="ja-JP" altLang="en"/>
+              <a:t>．</a:t>
+            </a:r>
+            <a:r>
+              <a:rPr lang="en" altLang="ja-JP" dirty="0"/>
+              <a:t>Finally</a:t>
+            </a:r>
+            <a:r>
+              <a:rPr lang="ja-JP" altLang="en"/>
+              <a:t>，</a:t>
+            </a:r>
+            <a:r>
+              <a:rPr lang="en" altLang="ja-JP" dirty="0"/>
+              <a:t>we could align our taxonomy with prior work to maintain consistency with established research </a:t>
+            </a:r>
+            <a:r>
+              <a:rPr lang="ja-JP" altLang="en"/>
+              <a:t>．</a:t>
+            </a:r>
+            <a:endParaRPr kumimoji="1" lang="ja-JP" altLang="en-US"/>
+          </a:p>
+        </p:txBody>
+      </p:sp>
+      <p:sp>
+        <p:nvSpPr>
+          <p:cNvPr id="4" name="スライド番号プレースホルダー 3">
+            <a:extLst>
+              <a:ext uri="{FF2B5EF4-FFF2-40B4-BE49-F238E27FC236}">
+                <a16:creationId xmlns:a16="http://schemas.microsoft.com/office/drawing/2014/main" id="{A7725F22-7408-53DF-AE5C-F6E10219DA1B}"/>
+              </a:ext>
+            </a:extLst>
+          </p:cNvPr>
+          <p:cNvSpPr>
+            <a:spLocks noGrp="1"/>
+          </p:cNvSpPr>
+          <p:nvPr>
+            <p:ph type="sldNum" sz="quarter" idx="5"/>
+          </p:nvPr>
+        </p:nvSpPr>
+        <p:spPr/>
+        <p:txBody>
+          <a:bodyPr/>
+          <a:lstStyle/>
+          <a:p>
+            <a:fld id="{E8ECD7F5-C0ED-D845-8933-D4442048DDE2}" type="slidenum">
+              <a:rPr kumimoji="1" lang="ja-JP" altLang="en-US" smtClean="0"/>
+              <a:t>8</a:t>
+            </a:fld>
+            <a:endParaRPr kumimoji="1" lang="ja-JP" altLang="en-US"/>
+          </a:p>
+        </p:txBody>
+      </p:sp>
+    </p:spTree>
+    <p:extLst>
+      <p:ext uri="{BB962C8B-B14F-4D97-AF65-F5344CB8AC3E}">
+        <p14:creationId xmlns:p14="http://schemas.microsoft.com/office/powerpoint/2010/main" val="2833918043"/>
+      </p:ext>
+    </p:extLst>
+  </p:cSld>
+  <p:clrMapOvr>
+    <a:masterClrMapping/>
+  </p:clrMapOvr>
+</p:notes>
+</file>
+
+<file path=ppt/notesSlides/notesSlide9.xml><?xml version="1.0" encoding="utf-8"?>
+<p:notes xmlns:a="http://schemas.openxmlformats.org/drawingml/2006/main" xmlns:r="http://schemas.openxmlformats.org/officeDocument/2006/relationships" xmlns:p="http://schemas.openxmlformats.org/presentationml/2006/main">
+  <p:cSld>
+    <p:spTree>
+      <p:nvGrpSpPr>
+        <p:cNvPr id="1" name="">
+          <a:extLst>
+            <a:ext uri="{FF2B5EF4-FFF2-40B4-BE49-F238E27FC236}">
+              <a16:creationId xmlns:a16="http://schemas.microsoft.com/office/drawing/2014/main" id="{FAC159C5-2B5C-62AA-12BB-8E5DC96025F7}"/>
+            </a:ext>
+          </a:extLst>
+        </p:cNvPr>
+        <p:cNvGrpSpPr/>
+        <p:nvPr/>
+      </p:nvGrpSpPr>
+      <p:grpSpPr>
+        <a:xfrm>
+          <a:off x="0" y="0"/>
+          <a:ext cx="0" cy="0"/>
+          <a:chOff x="0" y="0"/>
+          <a:chExt cx="0" cy="0"/>
+        </a:xfrm>
+      </p:grpSpPr>
+      <p:sp>
+        <p:nvSpPr>
+          <p:cNvPr id="2" name="スライド イメージ プレースホルダー 1">
+            <a:extLst>
+              <a:ext uri="{FF2B5EF4-FFF2-40B4-BE49-F238E27FC236}">
+                <a16:creationId xmlns:a16="http://schemas.microsoft.com/office/drawing/2014/main" id="{05A36939-4854-747B-9B72-1A0B18A3B728}"/>
+              </a:ext>
+            </a:extLst>
+          </p:cNvPr>
+          <p:cNvSpPr>
+            <a:spLocks noGrp="1" noRot="1" noChangeAspect="1"/>
+          </p:cNvSpPr>
+          <p:nvPr>
+            <p:ph type="sldImg"/>
+          </p:nvPr>
+        </p:nvSpPr>
+        <p:spPr/>
+      </p:sp>
+      <p:sp>
+        <p:nvSpPr>
+          <p:cNvPr id="3" name="ノート プレースホルダー 2">
+            <a:extLst>
+              <a:ext uri="{FF2B5EF4-FFF2-40B4-BE49-F238E27FC236}">
+                <a16:creationId xmlns:a16="http://schemas.microsoft.com/office/drawing/2014/main" id="{2E11B51E-B8E2-9137-2237-BD920E7E7902}"/>
+              </a:ext>
+            </a:extLst>
+          </p:cNvPr>
+          <p:cNvSpPr>
+            <a:spLocks noGrp="1"/>
+          </p:cNvSpPr>
+          <p:nvPr>
+            <p:ph type="body" idx="1"/>
+          </p:nvPr>
+        </p:nvSpPr>
+        <p:spPr/>
+        <p:txBody>
+          <a:bodyPr/>
+          <a:lstStyle/>
+          <a:p>
+            <a:r>
+              <a:rPr lang="en" altLang="ja-JP" dirty="0"/>
+              <a:t>This leads to our key question </a:t>
+            </a:r>
+            <a:r>
+              <a:rPr lang="ja-JP" altLang="en"/>
+              <a:t>．</a:t>
+            </a:r>
+            <a:r>
+              <a:rPr lang="en" altLang="ja-JP" dirty="0"/>
+              <a:t>Given our goal of supporting the speedrun community</a:t>
+            </a:r>
+            <a:r>
+              <a:rPr lang="ja-JP" altLang="en"/>
+              <a:t>，</a:t>
+            </a:r>
+            <a:r>
+              <a:rPr lang="en" altLang="ja-JP" dirty="0"/>
+              <a:t>which of these approaches do you think is the most appropriate </a:t>
+            </a:r>
+            <a:r>
+              <a:rPr lang="ja-JP" altLang="en"/>
+              <a:t>？</a:t>
+            </a:r>
+            <a:endParaRPr kumimoji="1" lang="ja-JP" altLang="en-US"/>
+          </a:p>
+        </p:txBody>
+      </p:sp>
+      <p:sp>
+        <p:nvSpPr>
+          <p:cNvPr id="4" name="スライド番号プレースホルダー 3">
+            <a:extLst>
+              <a:ext uri="{FF2B5EF4-FFF2-40B4-BE49-F238E27FC236}">
+                <a16:creationId xmlns:a16="http://schemas.microsoft.com/office/drawing/2014/main" id="{EFA28966-B98A-9C88-8EEB-E24FE743373F}"/>
+              </a:ext>
+            </a:extLst>
+          </p:cNvPr>
+          <p:cNvSpPr>
+            <a:spLocks noGrp="1"/>
+          </p:cNvSpPr>
+          <p:nvPr>
+            <p:ph type="sldNum" sz="quarter" idx="5"/>
+          </p:nvPr>
+        </p:nvSpPr>
+        <p:spPr/>
+        <p:txBody>
+          <a:bodyPr/>
+          <a:lstStyle/>
+          <a:p>
+            <a:fld id="{E8ECD7F5-C0ED-D845-8933-D4442048DDE2}" type="slidenum">
+              <a:rPr kumimoji="1" lang="ja-JP" altLang="en-US" smtClean="0"/>
+              <a:t>9</a:t>
+            </a:fld>
+            <a:endParaRPr kumimoji="1" lang="ja-JP" altLang="en-US"/>
+          </a:p>
+        </p:txBody>
+      </p:sp>
+    </p:spTree>
+    <p:extLst>
+      <p:ext uri="{BB962C8B-B14F-4D97-AF65-F5344CB8AC3E}">
+        <p14:creationId xmlns:p14="http://schemas.microsoft.com/office/powerpoint/2010/main" val="2478564279"/>
       </p:ext>
     </p:extLst>
   </p:cSld>
@@ -1621,7 +2220,7 @@
           <a:p>
             <a:fld id="{63883625-ED9F-1149-9526-20C7378D45EF}" type="datetimeFigureOut">
               <a:rPr kumimoji="1" lang="ja-JP" altLang="en-US" smtClean="0"/>
-              <a:t>2026/4/20</a:t>
+              <a:t>2026/4/27</a:t>
             </a:fld>
             <a:endParaRPr kumimoji="1" lang="ja-JP" altLang="en-US"/>
           </a:p>
@@ -1877,7 +2476,7 @@
           <a:p>
             <a:fld id="{63883625-ED9F-1149-9526-20C7378D45EF}" type="datetimeFigureOut">
               <a:rPr kumimoji="1" lang="ja-JP" altLang="en-US" smtClean="0"/>
-              <a:t>2026/4/20</a:t>
+              <a:t>2026/4/27</a:t>
             </a:fld>
             <a:endParaRPr kumimoji="1" lang="ja-JP" altLang="en-US"/>
           </a:p>
@@ -2108,7 +2707,7 @@
           <a:p>
             <a:fld id="{63883625-ED9F-1149-9526-20C7378D45EF}" type="datetimeFigureOut">
               <a:rPr kumimoji="1" lang="ja-JP" altLang="en-US" smtClean="0"/>
-              <a:t>2026/4/20</a:t>
+              <a:t>2026/4/27</a:t>
             </a:fld>
             <a:endParaRPr kumimoji="1" lang="ja-JP" altLang="en-US"/>
           </a:p>
@@ -2399,7 +2998,7 @@
           <a:p>
             <a:fld id="{63883625-ED9F-1149-9526-20C7378D45EF}" type="datetimeFigureOut">
               <a:rPr kumimoji="1" lang="ja-JP" altLang="en-US" smtClean="0"/>
-              <a:t>2026/4/20</a:t>
+              <a:t>2026/4/27</a:t>
             </a:fld>
             <a:endParaRPr kumimoji="1" lang="ja-JP" altLang="en-US"/>
           </a:p>
@@ -2744,7 +3343,7 @@
           <a:p>
             <a:fld id="{63883625-ED9F-1149-9526-20C7378D45EF}" type="datetimeFigureOut">
               <a:rPr kumimoji="1" lang="ja-JP" altLang="en-US" smtClean="0"/>
-              <a:t>2026/4/20</a:t>
+              <a:t>2026/4/27</a:t>
             </a:fld>
             <a:endParaRPr kumimoji="1" lang="ja-JP" altLang="en-US"/>
           </a:p>
@@ -3236,7 +3835,7 @@
           <a:p>
             <a:fld id="{63883625-ED9F-1149-9526-20C7378D45EF}" type="datetimeFigureOut">
               <a:rPr kumimoji="1" lang="ja-JP" altLang="en-US" smtClean="0"/>
-              <a:t>2026/4/20</a:t>
+              <a:t>2026/4/27</a:t>
             </a:fld>
             <a:endParaRPr kumimoji="1" lang="ja-JP" altLang="en-US"/>
           </a:p>
@@ -3393,7 +3992,7 @@
           <a:p>
             <a:fld id="{63883625-ED9F-1149-9526-20C7378D45EF}" type="datetimeFigureOut">
               <a:rPr kumimoji="1" lang="ja-JP" altLang="en-US" smtClean="0"/>
-              <a:t>2026/4/20</a:t>
+              <a:t>2026/4/27</a:t>
             </a:fld>
             <a:endParaRPr kumimoji="1" lang="ja-JP" altLang="en-US"/>
           </a:p>
@@ -3522,7 +4121,7 @@
           <a:p>
             <a:fld id="{63883625-ED9F-1149-9526-20C7378D45EF}" type="datetimeFigureOut">
               <a:rPr kumimoji="1" lang="ja-JP" altLang="en-US" smtClean="0"/>
-              <a:t>2026/4/20</a:t>
+              <a:t>2026/4/27</a:t>
             </a:fld>
             <a:endParaRPr kumimoji="1" lang="ja-JP" altLang="en-US"/>
           </a:p>
@@ -3881,7 +4480,7 @@
           <a:p>
             <a:fld id="{63883625-ED9F-1149-9526-20C7378D45EF}" type="datetimeFigureOut">
               <a:rPr kumimoji="1" lang="ja-JP" altLang="en-US" smtClean="0"/>
-              <a:t>2026/4/20</a:t>
+              <a:t>2026/4/27</a:t>
             </a:fld>
             <a:endParaRPr kumimoji="1" lang="ja-JP" altLang="en-US"/>
           </a:p>
@@ -4188,7 +4787,7 @@
           <a:p>
             <a:fld id="{63883625-ED9F-1149-9526-20C7378D45EF}" type="datetimeFigureOut">
               <a:rPr kumimoji="1" lang="ja-JP" altLang="en-US" smtClean="0"/>
-              <a:t>2026/4/20</a:t>
+              <a:t>2026/4/27</a:t>
             </a:fld>
             <a:endParaRPr kumimoji="1" lang="ja-JP" altLang="en-US"/>
           </a:p>
@@ -4837,41 +5436,63 @@
         </p:nvSpPr>
         <p:spPr>
           <a:xfrm>
-            <a:off x="838200" y="1513655"/>
-            <a:ext cx="10515600" cy="5209875"/>
+            <a:off x="838200" y="1696535"/>
+            <a:ext cx="10515600" cy="4838377"/>
           </a:xfrm>
         </p:spPr>
         <p:txBody>
           <a:bodyPr/>
           <a:lstStyle/>
           <a:p>
-            <a:r>
-              <a:rPr lang="en" altLang="ja-JP" sz="3200" b="1">
-                <a:latin typeface="Hiragino Kaku Gothic Pro W6" panose="020B0300000000000000" pitchFamily="34" charset="-128"/>
-                <a:ea typeface="Hiragino Kaku Gothic Pro W6" panose="020B0300000000000000" pitchFamily="34" charset="-128"/>
-              </a:rPr>
-              <a:t>To-Do </a:t>
-            </a:r>
             <a:r>
               <a:rPr lang="en" altLang="ja-JP" sz="3200" b="1" dirty="0">
                 <a:latin typeface="Hiragino Kaku Gothic Pro W6" panose="020B0300000000000000" pitchFamily="34" charset="-128"/>
                 <a:ea typeface="Hiragino Kaku Gothic Pro W6" panose="020B0300000000000000" pitchFamily="34" charset="-128"/>
               </a:rPr>
-              <a:t>Items</a:t>
+              <a:t>To-Do Items</a:t>
             </a:r>
           </a:p>
           <a:p>
             <a:pPr lvl="1"/>
             <a:r>
+              <a:rPr lang="en" altLang="ja-JP" b="1" dirty="0"/>
+              <a:t>Single-frame &amp; Sequence VLM Test: </a:t>
+            </a:r>
+            <a:r>
               <a:rPr lang="en" altLang="ja-JP" dirty="0"/>
-              <a:t>Create a comprehensive list of Super Mario 64 (SM64) speedrun glitches.</a:t>
-            </a:r>
+              <a:t>Conduct detection tests using GPT/Gemini on both cherry-picked single frames and 41-frame temporal sequences</a:t>
+            </a:r>
+            <a:r>
+              <a:rPr lang="ja-JP" altLang="en"/>
+              <a:t>．</a:t>
+            </a:r>
+            <a:r>
+              <a:rPr lang="en" altLang="ja-JP" dirty="0"/>
+              <a:t>The sequence-based approach provides 1.34 seconds of movement data to verify if the models can identify glitches that require temporal context</a:t>
+            </a:r>
+            <a:r>
+              <a:rPr lang="ja-JP" altLang="en"/>
+              <a:t>，</a:t>
+            </a:r>
+            <a:r>
+              <a:rPr lang="en" altLang="ja-JP" dirty="0"/>
+              <a:t>such as speed-based anomalies or state-change defects that are unidentifiable in static images</a:t>
+            </a:r>
+            <a:r>
+              <a:rPr lang="ja-JP" altLang="en"/>
+              <a:t>．</a:t>
+            </a:r>
+            <a:endParaRPr lang="en-US" altLang="ja-JP" dirty="0"/>
           </a:p>
           <a:p>
             <a:pPr lvl="1"/>
             <a:r>
+              <a:rPr lang="en" altLang="ja-JP" b="1" dirty="0"/>
+              <a:t>Expand Annotation Data:</a:t>
+            </a:r>
+            <a:r>
               <a:rPr lang="en" altLang="ja-JP" dirty="0"/>
-              <a:t>Select a World Record (WR) video and perform a detection test using VLM/LLM based on the prepared list. </a:t>
+              <a:t> Manually annotate at least 10 more WR videos to check if the glitch types and their durations are consistent across different runs.</a:t>
             </a:r>
             <a:endParaRPr lang="en" altLang="ja-JP" b="1" dirty="0">
               <a:latin typeface="Hiragino Kaku Gothic Pro W6" panose="020B0300000000000000" pitchFamily="34" charset="-128"/>
@@ -4933,7 +5554,7 @@
           <a:p>
             <a:r>
               <a:rPr lang="en" altLang="ja-JP" dirty="0"/>
-              <a:t>Current Progress</a:t>
+              <a:t>Single-frame VLM Test</a:t>
             </a:r>
             <a:endParaRPr kumimoji="1" lang="ja-JP" altLang="en-US"/>
           </a:p>
@@ -4957,8 +5578,8 @@
         </p:nvSpPr>
         <p:spPr>
           <a:xfrm>
-            <a:off x="838200" y="1470791"/>
-            <a:ext cx="10515600" cy="5387209"/>
+            <a:off x="419100" y="2204876"/>
+            <a:ext cx="11353800" cy="3865297"/>
           </a:xfrm>
         </p:spPr>
         <p:txBody>
@@ -4966,64 +5587,41 @@
           <a:lstStyle/>
           <a:p>
             <a:r>
-              <a:rPr kumimoji="1" lang="en-US" altLang="ja-JP" sz="3200" b="1" dirty="0">
-                <a:latin typeface="Hiragino Kaku Gothic Pro W6" panose="020B0300000000000000" pitchFamily="34" charset="-128"/>
-                <a:ea typeface="Hiragino Kaku Gothic Pro W6" panose="020B0300000000000000" pitchFamily="34" charset="-128"/>
-              </a:rPr>
-              <a:t>Completed</a:t>
-            </a:r>
-          </a:p>
-          <a:p>
-            <a:pPr lvl="1"/>
-            <a:r>
-              <a:rPr lang="en" altLang="ja-JP" dirty="0"/>
-              <a:t>Compiled a specialized list of SM64 speedrun glitches.</a:t>
-            </a:r>
-          </a:p>
-          <a:p>
-            <a:pPr lvl="1"/>
-            <a:r>
-              <a:rPr lang="en" altLang="ja-JP" dirty="0"/>
-              <a:t>Selected a WR video and completed manual frame-by-frame labeling.</a:t>
-            </a:r>
-          </a:p>
-          <a:p>
-            <a:pPr lvl="1"/>
-            <a:r>
-              <a:rPr lang="en" altLang="ja-JP" dirty="0"/>
-              <a:t>Performed a statistical analysis of glitch occurrences in the selected video.</a:t>
-            </a:r>
-          </a:p>
-          <a:p>
-            <a:r>
-              <a:rPr lang="en-US" altLang="ja-JP" sz="3200" b="1" dirty="0">
-                <a:latin typeface="Hiragino Kaku Gothic Pro W6" panose="020B0300000000000000" pitchFamily="34" charset="-128"/>
-                <a:ea typeface="Hiragino Kaku Gothic Pro W6" panose="020B0300000000000000" pitchFamily="34" charset="-128"/>
-              </a:rPr>
-              <a:t>Ongoing</a:t>
-            </a:r>
-          </a:p>
-          <a:p>
-            <a:pPr lvl="1"/>
-            <a:r>
-              <a:rPr lang="en" altLang="ja-JP" dirty="0"/>
-              <a:t>Reviewing Wentao’s paper to deeply understand and implement the proposed methodology.</a:t>
-            </a:r>
-          </a:p>
-          <a:p>
-            <a:r>
-              <a:rPr lang="en" altLang="ja-JP" sz="3200" b="1" dirty="0">
-                <a:latin typeface="Hiragino Kaku Gothic Pro W6" panose="020B0300000000000000" pitchFamily="34" charset="-128"/>
-                <a:ea typeface="Hiragino Kaku Gothic Pro W6" panose="020B0300000000000000" pitchFamily="34" charset="-128"/>
-              </a:rPr>
-              <a:t>Next Steps</a:t>
-            </a:r>
-          </a:p>
-          <a:p>
-            <a:pPr lvl="1"/>
-            <a:r>
-              <a:rPr lang="en" altLang="ja-JP" dirty="0"/>
-              <a:t>Conduct a performance test to identify glitches in the selected video using the Wentao-inspired approach.</a:t>
+              <a:rPr lang="en" altLang="ja-JP" sz="3200" b="1" dirty="0"/>
+              <a:t>Results: Correct labels obtained in only 2 out of 8 cases</a:t>
+            </a:r>
+            <a:r>
+              <a:rPr lang="ja-JP" altLang="en" sz="3200" b="1"/>
+              <a:t>．</a:t>
+            </a:r>
+            <a:endParaRPr lang="en" altLang="ja-JP" sz="3200" dirty="0"/>
+          </a:p>
+          <a:p>
+            <a:r>
+              <a:rPr lang="en" altLang="ja-JP" sz="3200" b="1" dirty="0"/>
+              <a:t>Observations:</a:t>
+            </a:r>
+            <a:r>
+              <a:rPr lang="en" altLang="ja-JP" sz="3200" dirty="0"/>
+              <a:t> Detection appears feasible when spatial or locational cues are prominent and distinct</a:t>
+            </a:r>
+            <a:r>
+              <a:rPr lang="ja-JP" altLang="en" sz="3200"/>
+              <a:t>．</a:t>
+            </a:r>
+          </a:p>
+          <a:p>
+            <a:r>
+              <a:rPr lang="en" altLang="ja-JP" sz="3200" b="1" dirty="0"/>
+              <a:t>Limitation:</a:t>
+            </a:r>
+            <a:r>
+              <a:rPr lang="en" altLang="ja-JP" sz="3200" dirty="0"/>
+              <a:t> Static images fail to capture the temporal context essential for identifying speedrun-specific glitches</a:t>
+            </a:r>
+            <a:r>
+              <a:rPr lang="ja-JP" altLang="en" sz="3200"/>
+              <a:t>．</a:t>
             </a:r>
           </a:p>
         </p:txBody>
@@ -5081,9 +5679,8 @@
           <a:p>
             <a:r>
               <a:rPr lang="en" altLang="ja-JP" dirty="0"/>
-              <a:t>Creation of SM64 Glitch List</a:t>
-            </a:r>
-            <a:endParaRPr kumimoji="1" lang="ja-JP" altLang="en-US"/>
+              <a:t>Frame Sequence VLM Test</a:t>
+            </a:r>
           </a:p>
         </p:txBody>
       </p:sp>
@@ -5105,8 +5702,8 @@
         </p:nvSpPr>
         <p:spPr>
           <a:xfrm>
-            <a:off x="838200" y="1793352"/>
-            <a:ext cx="10515600" cy="4693510"/>
+            <a:off x="355600" y="1742552"/>
+            <a:ext cx="11480800" cy="4693510"/>
           </a:xfrm>
         </p:spPr>
         <p:txBody>
@@ -5114,60 +5711,78 @@
           <a:lstStyle/>
           <a:p>
             <a:r>
-              <a:rPr kumimoji="1" lang="en" altLang="ja-JP" sz="2800" b="1" dirty="0"/>
-              <a:t>Initial Search</a:t>
-            </a:r>
-            <a:r>
-              <a:rPr kumimoji="1" lang="en" altLang="ja-JP" sz="2800" dirty="0"/>
-              <a:t>: Used </a:t>
-            </a:r>
-            <a:r>
-              <a:rPr kumimoji="1" lang="en" altLang="ja-JP" sz="2800" dirty="0" err="1"/>
-              <a:t>NotebookLM</a:t>
-            </a:r>
-            <a:r>
-              <a:rPr kumimoji="1" lang="en" altLang="ja-JP" sz="2800" dirty="0"/>
-              <a:t> to crawl relevant websites.</a:t>
-            </a:r>
-          </a:p>
-          <a:p>
-            <a:r>
-              <a:rPr lang="en" altLang="ja-JP" sz="2800" b="1" dirty="0"/>
-              <a:t>Data Cleaning</a:t>
-            </a:r>
-            <a:r>
-              <a:rPr lang="en" altLang="ja-JP" sz="2800" dirty="0"/>
-              <a:t>: Existing wikis often contained "noise," such as glitches irrelevant to speedrunning or intended game mechanics.</a:t>
-            </a:r>
-          </a:p>
-          <a:p>
-            <a:r>
-              <a:rPr lang="en" altLang="ja-JP" sz="2800" b="1" dirty="0"/>
-              <a:t>Source Selection</a:t>
-            </a:r>
-            <a:r>
-              <a:rPr lang="en" altLang="ja-JP" sz="2800" dirty="0"/>
-              <a:t>: Identified four reliable sources.</a:t>
-            </a:r>
-          </a:p>
-          <a:p>
-            <a:r>
-              <a:rPr lang="en" altLang="ja-JP" sz="2800" b="1" dirty="0"/>
-              <a:t>Iterative Refinement</a:t>
-            </a:r>
-            <a:r>
-              <a:rPr lang="en" altLang="ja-JP" sz="2800" dirty="0"/>
-              <a:t>: Collaborated with </a:t>
-            </a:r>
-            <a:r>
-              <a:rPr lang="en" altLang="ja-JP" sz="2800" dirty="0" err="1"/>
-              <a:t>NotebookLM</a:t>
-            </a:r>
-            <a:r>
-              <a:rPr lang="en" altLang="ja-JP" sz="2800" dirty="0"/>
-              <a:t> through a cycle of automated generation and manual feedback, resulting in a finalized list of 19 specific glitches.</a:t>
-            </a:r>
-            <a:endParaRPr kumimoji="1" lang="ja-JP" altLang="en-US" sz="2800"/>
+              <a:rPr kumimoji="1" lang="en" altLang="ja-JP" sz="3200" b="1" dirty="0"/>
+              <a:t>Results</a:t>
+            </a:r>
+            <a:r>
+              <a:rPr kumimoji="1" lang="en" altLang="ja-JP" sz="3200" dirty="0"/>
+              <a:t>: While only 3 out of 8 were labeled correctly</a:t>
+            </a:r>
+            <a:r>
+              <a:rPr kumimoji="1" lang="ja-JP" altLang="en" sz="3200"/>
+              <a:t>，</a:t>
+            </a:r>
+            <a:r>
+              <a:rPr kumimoji="1" lang="en" altLang="ja-JP" sz="3200" dirty="0"/>
+              <a:t>the reasoning for 6 out of 8 cases accurately captured the actual events</a:t>
+            </a:r>
+            <a:r>
+              <a:rPr kumimoji="1" lang="ja-JP" altLang="en" sz="3200"/>
+              <a:t>．</a:t>
+            </a:r>
+          </a:p>
+          <a:p>
+            <a:r>
+              <a:rPr kumimoji="1" lang="en" altLang="ja-JP" sz="3200" b="1" dirty="0"/>
+              <a:t>Analysis of Failures</a:t>
+            </a:r>
+            <a:r>
+              <a:rPr kumimoji="1" lang="en" altLang="ja-JP" sz="3200" dirty="0"/>
+              <a:t>: The two cases that failed to be identified involved glitches characterized by extremely high-speed movement</a:t>
+            </a:r>
+            <a:r>
+              <a:rPr kumimoji="1" lang="ja-JP" altLang="en" sz="3200"/>
+              <a:t>．</a:t>
+            </a:r>
+          </a:p>
+          <a:p>
+            <a:r>
+              <a:rPr kumimoji="1" lang="en" altLang="ja-JP" sz="3200" b="1" dirty="0"/>
+              <a:t>Hypothesis Testing</a:t>
+            </a:r>
+            <a:r>
+              <a:rPr kumimoji="1" lang="en" altLang="ja-JP" sz="3200" dirty="0"/>
+              <a:t>: I explicitly stated the 1.34-second duration in the prompt to improve detection</a:t>
+            </a:r>
+            <a:r>
+              <a:rPr kumimoji="1" lang="ja-JP" altLang="en" sz="3200"/>
+              <a:t>；</a:t>
+            </a:r>
+            <a:r>
+              <a:rPr kumimoji="1" lang="en" altLang="ja-JP" sz="3200" dirty="0"/>
+              <a:t>however</a:t>
+            </a:r>
+            <a:r>
+              <a:rPr kumimoji="1" lang="ja-JP" altLang="en" sz="3200"/>
+              <a:t>，</a:t>
+            </a:r>
+            <a:r>
+              <a:rPr kumimoji="1" lang="en" altLang="ja-JP" sz="3200" dirty="0"/>
+              <a:t>this backfired as the model became biased by the numerical data</a:t>
+            </a:r>
+            <a:r>
+              <a:rPr kumimoji="1" lang="ja-JP" altLang="en" sz="3200"/>
+              <a:t>，</a:t>
+            </a:r>
+            <a:r>
+              <a:rPr kumimoji="1" lang="en" altLang="ja-JP" sz="3200" dirty="0"/>
+              <a:t>leading to a decrease in accuracy</a:t>
+            </a:r>
+            <a:r>
+              <a:rPr kumimoji="1" lang="ja-JP" altLang="en" sz="3200"/>
+              <a:t>．</a:t>
+            </a:r>
+            <a:endParaRPr kumimoji="1" lang="ja-JP" altLang="en-US" sz="3200"/>
           </a:p>
         </p:txBody>
       </p:sp>
@@ -5230,7 +5845,7 @@
           <a:p>
             <a:r>
               <a:rPr lang="en" altLang="ja-JP" dirty="0"/>
-              <a:t>Labeling of World Record Video</a:t>
+              <a:t>Expand Annotation Data</a:t>
             </a:r>
             <a:endParaRPr kumimoji="1" lang="ja-JP" altLang="en-US"/>
           </a:p>
@@ -5254,8 +5869,8 @@
         </p:nvSpPr>
         <p:spPr>
           <a:xfrm>
-            <a:off x="451597" y="2535629"/>
-            <a:ext cx="11288806" cy="3230470"/>
+            <a:off x="451597" y="5710237"/>
+            <a:ext cx="11288806" cy="1046163"/>
           </a:xfrm>
         </p:spPr>
         <p:txBody>
@@ -5263,74 +5878,493 @@
           <a:lstStyle/>
           <a:p>
             <a:r>
-              <a:rPr lang="en" altLang="ja-JP" sz="3200" b="1" dirty="0">
-                <a:latin typeface="Hiragino Kaku Gothic Pro W6" panose="020B0300000000000000" pitchFamily="34" charset="-128"/>
-                <a:ea typeface="Hiragino Kaku Gothic Pro W6" panose="020B0300000000000000" pitchFamily="34" charset="-128"/>
-              </a:rPr>
-              <a:t>Selected Video</a:t>
-            </a:r>
-          </a:p>
-          <a:p>
-            <a:pPr lvl="1"/>
-            <a:r>
-              <a:rPr lang="en" altLang="ja-JP" b="1" dirty="0"/>
-              <a:t>Category</a:t>
-            </a:r>
-            <a:r>
-              <a:rPr lang="en" altLang="ja-JP" dirty="0"/>
-              <a:t>: 0 Star</a:t>
-            </a:r>
-          </a:p>
-          <a:p>
-            <a:pPr lvl="1"/>
-            <a:r>
-              <a:rPr kumimoji="1" lang="en" altLang="ja-JP" b="1" dirty="0"/>
-              <a:t>Runner</a:t>
-            </a:r>
-            <a:r>
-              <a:rPr kumimoji="1" lang="en" altLang="ja-JP" dirty="0"/>
-              <a:t>: </a:t>
-            </a:r>
-            <a:r>
-              <a:rPr kumimoji="1" lang="en" altLang="ja-JP" dirty="0" err="1"/>
-              <a:t>Suigi</a:t>
-            </a:r>
-            <a:endParaRPr kumimoji="1" lang="en" altLang="ja-JP" dirty="0"/>
-          </a:p>
-          <a:p>
-            <a:pPr lvl="1"/>
-            <a:r>
-              <a:rPr lang="en" altLang="ja-JP" b="1" dirty="0"/>
-              <a:t>Record</a:t>
-            </a:r>
-            <a:r>
-              <a:rPr lang="en" altLang="ja-JP" dirty="0"/>
-              <a:t>: 6m 14s 190ms (Achieved on December 30, 2025)</a:t>
-            </a:r>
-          </a:p>
-          <a:p>
-            <a:r>
-              <a:rPr lang="en" altLang="ja-JP" sz="3200" b="1" dirty="0">
-                <a:latin typeface="Hiragino Kaku Gothic Pro W6" panose="020B0300000000000000" pitchFamily="34" charset="-128"/>
-                <a:ea typeface="Hiragino Kaku Gothic Pro W6" panose="020B0300000000000000" pitchFamily="34" charset="-128"/>
-              </a:rPr>
-              <a:t>Labeling Methodology</a:t>
-            </a:r>
-          </a:p>
-          <a:p>
-            <a:pPr lvl="1"/>
-            <a:r>
-              <a:rPr lang="en" altLang="ja-JP" b="1" dirty="0"/>
-              <a:t>Granularity</a:t>
-            </a:r>
-            <a:r>
-              <a:rPr lang="en" altLang="ja-JP" dirty="0"/>
-              <a:t>: Performed manual annotation of glitch occurrences at a per-frame level.</a:t>
-            </a:r>
-            <a:endParaRPr kumimoji="1" lang="en" altLang="ja-JP" dirty="0"/>
-          </a:p>
-        </p:txBody>
-      </p:sp>
+              <a:rPr lang="en" altLang="ja-JP" sz="2400" b="1" dirty="0"/>
+              <a:t>Sampling Methodology</a:t>
+            </a:r>
+            <a:r>
+              <a:rPr lang="en" altLang="ja-JP" sz="2400" dirty="0"/>
+              <a:t>: I sampled and annotated 10 representative runs that marked major record improvements and were available on YouTube</a:t>
+            </a:r>
+            <a:r>
+              <a:rPr lang="ja-JP" altLang="en" sz="2400"/>
+              <a:t>，</a:t>
+            </a:r>
+            <a:r>
+              <a:rPr lang="en" altLang="ja-JP" sz="2400" dirty="0"/>
+              <a:t>ensuring a balanced historical coverage</a:t>
+            </a:r>
+            <a:r>
+              <a:rPr lang="ja-JP" altLang="en" sz="2400"/>
+              <a:t>．</a:t>
+            </a:r>
+            <a:endParaRPr kumimoji="1" lang="en" altLang="ja-JP" sz="2400" dirty="0"/>
+          </a:p>
+        </p:txBody>
+      </p:sp>
+      <p:pic>
+        <p:nvPicPr>
+          <p:cNvPr id="8" name="図 7">
+            <a:extLst>
+              <a:ext uri="{FF2B5EF4-FFF2-40B4-BE49-F238E27FC236}">
+                <a16:creationId xmlns:a16="http://schemas.microsoft.com/office/drawing/2014/main" id="{B2532D17-CC64-1059-6EC0-7CB445C1DD21}"/>
+              </a:ext>
+            </a:extLst>
+          </p:cNvPr>
+          <p:cNvPicPr>
+            <a:picLocks noChangeAspect="1"/>
+          </p:cNvPicPr>
+          <p:nvPr/>
+        </p:nvPicPr>
+        <p:blipFill>
+          <a:blip r:embed="rId3"/>
+          <a:stretch>
+            <a:fillRect/>
+          </a:stretch>
+        </p:blipFill>
+        <p:spPr>
+          <a:xfrm>
+            <a:off x="3339503" y="1420227"/>
+            <a:ext cx="5512994" cy="4195345"/>
+          </a:xfrm>
+          <a:prstGeom prst="rect">
+            <a:avLst/>
+          </a:prstGeom>
+        </p:spPr>
+      </p:pic>
+      <p:cxnSp>
+        <p:nvCxnSpPr>
+          <p:cNvPr id="12" name="直線矢印コネクタ 11">
+            <a:extLst>
+              <a:ext uri="{FF2B5EF4-FFF2-40B4-BE49-F238E27FC236}">
+                <a16:creationId xmlns:a16="http://schemas.microsoft.com/office/drawing/2014/main" id="{2C47AED8-D646-63EF-D22B-142076B2BA0D}"/>
+              </a:ext>
+            </a:extLst>
+          </p:cNvPr>
+          <p:cNvCxnSpPr/>
+          <p:nvPr/>
+        </p:nvCxnSpPr>
+        <p:spPr>
+          <a:xfrm flipH="1">
+            <a:off x="4274974" y="3321050"/>
+            <a:ext cx="355600" cy="215900"/>
+          </a:xfrm>
+          <a:prstGeom prst="straightConnector1">
+            <a:avLst/>
+          </a:prstGeom>
+          <a:ln>
+            <a:solidFill>
+              <a:srgbClr val="FF0000"/>
+            </a:solidFill>
+            <a:tailEnd type="triangle"/>
+          </a:ln>
+        </p:spPr>
+        <p:style>
+          <a:lnRef idx="2">
+            <a:schemeClr val="accent1"/>
+          </a:lnRef>
+          <a:fillRef idx="0">
+            <a:schemeClr val="accent1"/>
+          </a:fillRef>
+          <a:effectRef idx="1">
+            <a:schemeClr val="accent1"/>
+          </a:effectRef>
+          <a:fontRef idx="minor">
+            <a:schemeClr val="tx1"/>
+          </a:fontRef>
+        </p:style>
+      </p:cxnSp>
+      <p:cxnSp>
+        <p:nvCxnSpPr>
+          <p:cNvPr id="13" name="直線矢印コネクタ 12">
+            <a:extLst>
+              <a:ext uri="{FF2B5EF4-FFF2-40B4-BE49-F238E27FC236}">
+                <a16:creationId xmlns:a16="http://schemas.microsoft.com/office/drawing/2014/main" id="{C0E09F8E-184F-ECE3-F060-2330900B102E}"/>
+              </a:ext>
+            </a:extLst>
+          </p:cNvPr>
+          <p:cNvCxnSpPr/>
+          <p:nvPr/>
+        </p:nvCxnSpPr>
+        <p:spPr>
+          <a:xfrm flipH="1">
+            <a:off x="8748002" y="4538578"/>
+            <a:ext cx="355600" cy="215900"/>
+          </a:xfrm>
+          <a:prstGeom prst="straightConnector1">
+            <a:avLst/>
+          </a:prstGeom>
+          <a:ln>
+            <a:solidFill>
+              <a:srgbClr val="FF0000"/>
+            </a:solidFill>
+            <a:tailEnd type="triangle"/>
+          </a:ln>
+        </p:spPr>
+        <p:style>
+          <a:lnRef idx="2">
+            <a:schemeClr val="accent1"/>
+          </a:lnRef>
+          <a:fillRef idx="0">
+            <a:schemeClr val="accent1"/>
+          </a:fillRef>
+          <a:effectRef idx="1">
+            <a:schemeClr val="accent1"/>
+          </a:effectRef>
+          <a:fontRef idx="minor">
+            <a:schemeClr val="tx1"/>
+          </a:fontRef>
+        </p:style>
+      </p:cxnSp>
+      <p:cxnSp>
+        <p:nvCxnSpPr>
+          <p:cNvPr id="14" name="直線矢印コネクタ 13">
+            <a:extLst>
+              <a:ext uri="{FF2B5EF4-FFF2-40B4-BE49-F238E27FC236}">
+                <a16:creationId xmlns:a16="http://schemas.microsoft.com/office/drawing/2014/main" id="{4FC8E363-575B-9E57-337E-80D568BC8A76}"/>
+              </a:ext>
+            </a:extLst>
+          </p:cNvPr>
+          <p:cNvCxnSpPr/>
+          <p:nvPr/>
+        </p:nvCxnSpPr>
+        <p:spPr>
+          <a:xfrm flipH="1">
+            <a:off x="4274974" y="3746011"/>
+            <a:ext cx="355600" cy="215900"/>
+          </a:xfrm>
+          <a:prstGeom prst="straightConnector1">
+            <a:avLst/>
+          </a:prstGeom>
+          <a:ln>
+            <a:solidFill>
+              <a:srgbClr val="FF0000"/>
+            </a:solidFill>
+            <a:tailEnd type="triangle"/>
+          </a:ln>
+        </p:spPr>
+        <p:style>
+          <a:lnRef idx="2">
+            <a:schemeClr val="accent1"/>
+          </a:lnRef>
+          <a:fillRef idx="0">
+            <a:schemeClr val="accent1"/>
+          </a:fillRef>
+          <a:effectRef idx="1">
+            <a:schemeClr val="accent1"/>
+          </a:effectRef>
+          <a:fontRef idx="minor">
+            <a:schemeClr val="tx1"/>
+          </a:fontRef>
+        </p:style>
+      </p:cxnSp>
+      <p:cxnSp>
+        <p:nvCxnSpPr>
+          <p:cNvPr id="15" name="直線矢印コネクタ 14">
+            <a:extLst>
+              <a:ext uri="{FF2B5EF4-FFF2-40B4-BE49-F238E27FC236}">
+                <a16:creationId xmlns:a16="http://schemas.microsoft.com/office/drawing/2014/main" id="{443BC787-E793-A466-D9D7-3D78E09369B9}"/>
+              </a:ext>
+            </a:extLst>
+          </p:cNvPr>
+          <p:cNvCxnSpPr>
+            <a:cxnSpLocks/>
+          </p:cNvCxnSpPr>
+          <p:nvPr/>
+        </p:nvCxnSpPr>
+        <p:spPr>
+          <a:xfrm flipH="1">
+            <a:off x="4970875" y="3961911"/>
+            <a:ext cx="97236" cy="376177"/>
+          </a:xfrm>
+          <a:prstGeom prst="straightConnector1">
+            <a:avLst/>
+          </a:prstGeom>
+          <a:ln>
+            <a:solidFill>
+              <a:srgbClr val="FF0000"/>
+            </a:solidFill>
+            <a:tailEnd type="triangle"/>
+          </a:ln>
+        </p:spPr>
+        <p:style>
+          <a:lnRef idx="2">
+            <a:schemeClr val="accent1"/>
+          </a:lnRef>
+          <a:fillRef idx="0">
+            <a:schemeClr val="accent1"/>
+          </a:fillRef>
+          <a:effectRef idx="1">
+            <a:schemeClr val="accent1"/>
+          </a:effectRef>
+          <a:fontRef idx="minor">
+            <a:schemeClr val="tx1"/>
+          </a:fontRef>
+        </p:style>
+      </p:cxnSp>
+      <p:cxnSp>
+        <p:nvCxnSpPr>
+          <p:cNvPr id="18" name="直線矢印コネクタ 17">
+            <a:extLst>
+              <a:ext uri="{FF2B5EF4-FFF2-40B4-BE49-F238E27FC236}">
+                <a16:creationId xmlns:a16="http://schemas.microsoft.com/office/drawing/2014/main" id="{7E6DCA85-537E-BF34-6E33-B71FFADB33AA}"/>
+              </a:ext>
+            </a:extLst>
+          </p:cNvPr>
+          <p:cNvCxnSpPr>
+            <a:cxnSpLocks/>
+          </p:cNvCxnSpPr>
+          <p:nvPr/>
+        </p:nvCxnSpPr>
+        <p:spPr>
+          <a:xfrm flipH="1">
+            <a:off x="5411495" y="4149999"/>
+            <a:ext cx="211092" cy="296039"/>
+          </a:xfrm>
+          <a:prstGeom prst="straightConnector1">
+            <a:avLst/>
+          </a:prstGeom>
+          <a:ln>
+            <a:solidFill>
+              <a:srgbClr val="FF0000"/>
+            </a:solidFill>
+            <a:tailEnd type="triangle"/>
+          </a:ln>
+        </p:spPr>
+        <p:style>
+          <a:lnRef idx="2">
+            <a:schemeClr val="accent1"/>
+          </a:lnRef>
+          <a:fillRef idx="0">
+            <a:schemeClr val="accent1"/>
+          </a:fillRef>
+          <a:effectRef idx="1">
+            <a:schemeClr val="accent1"/>
+          </a:effectRef>
+          <a:fontRef idx="minor">
+            <a:schemeClr val="tx1"/>
+          </a:fontRef>
+        </p:style>
+      </p:cxnSp>
+      <p:cxnSp>
+        <p:nvCxnSpPr>
+          <p:cNvPr id="20" name="直線矢印コネクタ 19">
+            <a:extLst>
+              <a:ext uri="{FF2B5EF4-FFF2-40B4-BE49-F238E27FC236}">
+                <a16:creationId xmlns:a16="http://schemas.microsoft.com/office/drawing/2014/main" id="{8560EBED-FFDE-5B80-D849-24B81FCE13A1}"/>
+              </a:ext>
+            </a:extLst>
+          </p:cNvPr>
+          <p:cNvCxnSpPr>
+            <a:cxnSpLocks/>
+          </p:cNvCxnSpPr>
+          <p:nvPr/>
+        </p:nvCxnSpPr>
+        <p:spPr>
+          <a:xfrm flipH="1">
+            <a:off x="6343883" y="4149999"/>
+            <a:ext cx="86100" cy="345358"/>
+          </a:xfrm>
+          <a:prstGeom prst="straightConnector1">
+            <a:avLst/>
+          </a:prstGeom>
+          <a:ln>
+            <a:solidFill>
+              <a:srgbClr val="FF0000"/>
+            </a:solidFill>
+            <a:tailEnd type="triangle"/>
+          </a:ln>
+        </p:spPr>
+        <p:style>
+          <a:lnRef idx="2">
+            <a:schemeClr val="accent1"/>
+          </a:lnRef>
+          <a:fillRef idx="0">
+            <a:schemeClr val="accent1"/>
+          </a:fillRef>
+          <a:effectRef idx="1">
+            <a:schemeClr val="accent1"/>
+          </a:effectRef>
+          <a:fontRef idx="minor">
+            <a:schemeClr val="tx1"/>
+          </a:fontRef>
+        </p:style>
+      </p:cxnSp>
+      <p:cxnSp>
+        <p:nvCxnSpPr>
+          <p:cNvPr id="22" name="直線矢印コネクタ 21">
+            <a:extLst>
+              <a:ext uri="{FF2B5EF4-FFF2-40B4-BE49-F238E27FC236}">
+                <a16:creationId xmlns:a16="http://schemas.microsoft.com/office/drawing/2014/main" id="{85EEA28F-49B2-04C2-5311-E85EF9B308D5}"/>
+              </a:ext>
+            </a:extLst>
+          </p:cNvPr>
+          <p:cNvCxnSpPr>
+            <a:cxnSpLocks/>
+          </p:cNvCxnSpPr>
+          <p:nvPr/>
+        </p:nvCxnSpPr>
+        <p:spPr>
+          <a:xfrm flipH="1">
+            <a:off x="6747796" y="4149999"/>
+            <a:ext cx="158842" cy="388579"/>
+          </a:xfrm>
+          <a:prstGeom prst="straightConnector1">
+            <a:avLst/>
+          </a:prstGeom>
+          <a:ln>
+            <a:solidFill>
+              <a:srgbClr val="FF0000"/>
+            </a:solidFill>
+            <a:tailEnd type="triangle"/>
+          </a:ln>
+        </p:spPr>
+        <p:style>
+          <a:lnRef idx="2">
+            <a:schemeClr val="accent1"/>
+          </a:lnRef>
+          <a:fillRef idx="0">
+            <a:schemeClr val="accent1"/>
+          </a:fillRef>
+          <a:effectRef idx="1">
+            <a:schemeClr val="accent1"/>
+          </a:effectRef>
+          <a:fontRef idx="minor">
+            <a:schemeClr val="tx1"/>
+          </a:fontRef>
+        </p:style>
+      </p:cxnSp>
+      <p:cxnSp>
+        <p:nvCxnSpPr>
+          <p:cNvPr id="24" name="直線矢印コネクタ 23">
+            <a:extLst>
+              <a:ext uri="{FF2B5EF4-FFF2-40B4-BE49-F238E27FC236}">
+                <a16:creationId xmlns:a16="http://schemas.microsoft.com/office/drawing/2014/main" id="{0CE431D1-01BE-DE7D-2BB0-7A61174A0634}"/>
+              </a:ext>
+            </a:extLst>
+          </p:cNvPr>
+          <p:cNvCxnSpPr>
+            <a:cxnSpLocks/>
+          </p:cNvCxnSpPr>
+          <p:nvPr/>
+        </p:nvCxnSpPr>
+        <p:spPr>
+          <a:xfrm flipH="1">
+            <a:off x="7869717" y="4322678"/>
+            <a:ext cx="97236" cy="310971"/>
+          </a:xfrm>
+          <a:prstGeom prst="straightConnector1">
+            <a:avLst/>
+          </a:prstGeom>
+          <a:ln>
+            <a:solidFill>
+              <a:srgbClr val="FF0000"/>
+            </a:solidFill>
+            <a:tailEnd type="triangle"/>
+          </a:ln>
+        </p:spPr>
+        <p:style>
+          <a:lnRef idx="2">
+            <a:schemeClr val="accent1"/>
+          </a:lnRef>
+          <a:fillRef idx="0">
+            <a:schemeClr val="accent1"/>
+          </a:fillRef>
+          <a:effectRef idx="1">
+            <a:schemeClr val="accent1"/>
+          </a:effectRef>
+          <a:fontRef idx="minor">
+            <a:schemeClr val="tx1"/>
+          </a:fontRef>
+        </p:style>
+      </p:cxnSp>
+      <p:cxnSp>
+        <p:nvCxnSpPr>
+          <p:cNvPr id="26" name="直線矢印コネクタ 25">
+            <a:extLst>
+              <a:ext uri="{FF2B5EF4-FFF2-40B4-BE49-F238E27FC236}">
+                <a16:creationId xmlns:a16="http://schemas.microsoft.com/office/drawing/2014/main" id="{3CB7BF33-8E92-FB0D-2519-BB31AB29B39E}"/>
+              </a:ext>
+            </a:extLst>
+          </p:cNvPr>
+          <p:cNvCxnSpPr>
+            <a:cxnSpLocks/>
+          </p:cNvCxnSpPr>
+          <p:nvPr/>
+        </p:nvCxnSpPr>
+        <p:spPr>
+          <a:xfrm flipH="1">
+            <a:off x="7876325" y="4538578"/>
+            <a:ext cx="255998" cy="172679"/>
+          </a:xfrm>
+          <a:prstGeom prst="straightConnector1">
+            <a:avLst/>
+          </a:prstGeom>
+          <a:ln>
+            <a:solidFill>
+              <a:srgbClr val="FF0000"/>
+            </a:solidFill>
+            <a:tailEnd type="triangle"/>
+          </a:ln>
+        </p:spPr>
+        <p:style>
+          <a:lnRef idx="2">
+            <a:schemeClr val="accent1"/>
+          </a:lnRef>
+          <a:fillRef idx="0">
+            <a:schemeClr val="accent1"/>
+          </a:fillRef>
+          <a:effectRef idx="1">
+            <a:schemeClr val="accent1"/>
+          </a:effectRef>
+          <a:fontRef idx="minor">
+            <a:schemeClr val="tx1"/>
+          </a:fontRef>
+        </p:style>
+      </p:cxnSp>
+      <p:cxnSp>
+        <p:nvCxnSpPr>
+          <p:cNvPr id="28" name="直線矢印コネクタ 27">
+            <a:extLst>
+              <a:ext uri="{FF2B5EF4-FFF2-40B4-BE49-F238E27FC236}">
+                <a16:creationId xmlns:a16="http://schemas.microsoft.com/office/drawing/2014/main" id="{A29C887E-62F4-965B-C421-5181CB87D067}"/>
+              </a:ext>
+            </a:extLst>
+          </p:cNvPr>
+          <p:cNvCxnSpPr>
+            <a:cxnSpLocks/>
+          </p:cNvCxnSpPr>
+          <p:nvPr/>
+        </p:nvCxnSpPr>
+        <p:spPr>
+          <a:xfrm flipH="1">
+            <a:off x="8054125" y="4538578"/>
+            <a:ext cx="296162" cy="203021"/>
+          </a:xfrm>
+          <a:prstGeom prst="straightConnector1">
+            <a:avLst/>
+          </a:prstGeom>
+          <a:ln>
+            <a:solidFill>
+              <a:srgbClr val="FF0000"/>
+            </a:solidFill>
+            <a:tailEnd type="triangle"/>
+          </a:ln>
+        </p:spPr>
+        <p:style>
+          <a:lnRef idx="2">
+            <a:schemeClr val="accent1"/>
+          </a:lnRef>
+          <a:fillRef idx="0">
+            <a:schemeClr val="accent1"/>
+          </a:fillRef>
+          <a:effectRef idx="1">
+            <a:schemeClr val="accent1"/>
+          </a:effectRef>
+          <a:fontRef idx="minor">
+            <a:schemeClr val="tx1"/>
+          </a:fontRef>
+        </p:style>
+      </p:cxnSp>
     </p:spTree>
     <p:extLst>
       <p:ext uri="{BB962C8B-B14F-4D97-AF65-F5344CB8AC3E}">
@@ -5349,7 +6383,13 @@
   <p:cSld>
     <p:spTree>
       <p:nvGrpSpPr>
-        <p:cNvPr id="1" name=""/>
+        <p:cNvPr id="1" name="">
+          <a:extLst>
+            <a:ext uri="{FF2B5EF4-FFF2-40B4-BE49-F238E27FC236}">
+              <a16:creationId xmlns:a16="http://schemas.microsoft.com/office/drawing/2014/main" id="{FBBBBF35-5749-5099-1A10-5DE8EB03893E}"/>
+            </a:ext>
+          </a:extLst>
+        </p:cNvPr>
         <p:cNvGrpSpPr/>
         <p:nvPr/>
       </p:nvGrpSpPr>
@@ -5366,7 +6406,7 @@
           <p:cNvPr id="2" name="タイトル 1">
             <a:extLst>
               <a:ext uri="{FF2B5EF4-FFF2-40B4-BE49-F238E27FC236}">
-                <a16:creationId xmlns:a16="http://schemas.microsoft.com/office/drawing/2014/main" id="{76D0ABDE-37B0-1531-2ADB-754B610FDA22}"/>
+                <a16:creationId xmlns:a16="http://schemas.microsoft.com/office/drawing/2014/main" id="{65334E50-21BF-1831-7AF3-55033131BC9C}"/>
               </a:ext>
             </a:extLst>
           </p:cNvPr>
@@ -5377,10 +6417,39 @@
             <p:ph type="title"/>
           </p:nvPr>
         </p:nvSpPr>
+        <p:spPr/>
+        <p:txBody>
+          <a:bodyPr/>
+          <a:lstStyle/>
+          <a:p>
+            <a:r>
+              <a:rPr lang="en" altLang="ja-JP" dirty="0"/>
+              <a:t>Annotation Results</a:t>
+            </a:r>
+            <a:endParaRPr kumimoji="1" lang="ja-JP" altLang="en-US"/>
+          </a:p>
+        </p:txBody>
+      </p:sp>
+      <p:sp>
+        <p:nvSpPr>
+          <p:cNvPr id="3" name="コンテンツ プレースホルダー 2">
+            <a:extLst>
+              <a:ext uri="{FF2B5EF4-FFF2-40B4-BE49-F238E27FC236}">
+                <a16:creationId xmlns:a16="http://schemas.microsoft.com/office/drawing/2014/main" id="{2A332BBD-49C3-11A7-DF74-D1C751C4F26B}"/>
+              </a:ext>
+            </a:extLst>
+          </p:cNvPr>
+          <p:cNvSpPr>
+            <a:spLocks noGrp="1"/>
+          </p:cNvSpPr>
+          <p:nvPr>
+            <p:ph idx="1"/>
+          </p:nvPr>
+        </p:nvSpPr>
         <p:spPr>
           <a:xfrm>
-            <a:off x="0" y="0"/>
-            <a:ext cx="12192000" cy="1430767"/>
+            <a:off x="451597" y="1515203"/>
+            <a:ext cx="11288806" cy="5148644"/>
           </a:xfrm>
         </p:spPr>
         <p:txBody>
@@ -5388,1147 +6457,49 @@
           <a:lstStyle/>
           <a:p>
             <a:r>
-              <a:rPr lang="en" altLang="ja-JP" dirty="0"/>
-              <a:t>Statistical Analysis of Glitch Occurrences</a:t>
-            </a:r>
-            <a:endParaRPr kumimoji="1" lang="ja-JP" altLang="en-US"/>
-          </a:p>
-        </p:txBody>
-      </p:sp>
-      <p:sp>
-        <p:nvSpPr>
-          <p:cNvPr id="5" name="コンテンツ プレースホルダー 2">
-            <a:extLst>
-              <a:ext uri="{FF2B5EF4-FFF2-40B4-BE49-F238E27FC236}">
-                <a16:creationId xmlns:a16="http://schemas.microsoft.com/office/drawing/2014/main" id="{0DC250DC-AFB6-1BB8-5EC4-9D2C05F505E2}"/>
-              </a:ext>
-            </a:extLst>
-          </p:cNvPr>
-          <p:cNvSpPr txBox="1">
-            <a:spLocks/>
-          </p:cNvSpPr>
-          <p:nvPr/>
-        </p:nvSpPr>
-        <p:spPr>
-          <a:xfrm>
-            <a:off x="451597" y="1795090"/>
-            <a:ext cx="11288806" cy="507326"/>
-          </a:xfrm>
-          <a:prstGeom prst="rect">
-            <a:avLst/>
-          </a:prstGeom>
-        </p:spPr>
-        <p:txBody>
-          <a:bodyPr vert="horz" lIns="90000" tIns="45720" rIns="91440" bIns="45720" rtlCol="0">
-            <a:noAutofit/>
-          </a:bodyPr>
-          <a:lstStyle>
-            <a:lvl1pPr marL="228600" indent="-228600" algn="l" defTabSz="914400" rtl="0" eaLnBrk="1" latinLnBrk="0" hangingPunct="1">
-              <a:lnSpc>
-                <a:spcPct val="90000"/>
-              </a:lnSpc>
-              <a:spcBef>
-                <a:spcPts val="1000"/>
-              </a:spcBef>
-              <a:buFont typeface="Arial" panose="020B0604020202020204" pitchFamily="34" charset="0"/>
-              <a:buChar char="•"/>
-              <a:defRPr kumimoji="1" sz="4000" b="0" i="0" kern="1200">
-                <a:solidFill>
-                  <a:schemeClr val="tx1"/>
-                </a:solidFill>
-                <a:latin typeface="Hiragino Kaku Gothic Pro W3" panose="020B0300000000000000" pitchFamily="34" charset="-128"/>
-                <a:ea typeface="Hiragino Kaku Gothic Pro W3" panose="020B0300000000000000" pitchFamily="34" charset="-128"/>
-                <a:cs typeface="+mn-cs"/>
-              </a:defRPr>
-            </a:lvl1pPr>
-            <a:lvl2pPr marL="685800" indent="-228600" algn="l" defTabSz="914400" rtl="0" eaLnBrk="1" latinLnBrk="0" hangingPunct="1">
-              <a:lnSpc>
-                <a:spcPct val="90000"/>
-              </a:lnSpc>
-              <a:spcBef>
-                <a:spcPts val="500"/>
-              </a:spcBef>
-              <a:buFont typeface="Arial" panose="020B0604020202020204" pitchFamily="34" charset="0"/>
-              <a:buChar char="•"/>
-              <a:defRPr kumimoji="1" sz="2800" b="0" i="0" kern="1200">
-                <a:solidFill>
-                  <a:schemeClr val="tx1"/>
-                </a:solidFill>
-                <a:latin typeface="Hiragino Kaku Gothic Pro W3" panose="020B0300000000000000" pitchFamily="34" charset="-128"/>
-                <a:ea typeface="Hiragino Kaku Gothic Pro W3" panose="020B0300000000000000" pitchFamily="34" charset="-128"/>
-                <a:cs typeface="+mn-cs"/>
-              </a:defRPr>
-            </a:lvl2pPr>
-            <a:lvl3pPr marL="1143000" indent="-228600" algn="l" defTabSz="914400" rtl="0" eaLnBrk="1" latinLnBrk="0" hangingPunct="1">
-              <a:lnSpc>
-                <a:spcPct val="90000"/>
-              </a:lnSpc>
-              <a:spcBef>
-                <a:spcPts val="500"/>
-              </a:spcBef>
-              <a:buFont typeface="Arial" panose="020B0604020202020204" pitchFamily="34" charset="0"/>
-              <a:buChar char="•"/>
-              <a:defRPr kumimoji="1" sz="2400" b="0" i="0" kern="1200">
-                <a:solidFill>
-                  <a:schemeClr val="tx1"/>
-                </a:solidFill>
-                <a:latin typeface="Hiragino Kaku Gothic Pro W3" panose="020B0300000000000000" pitchFamily="34" charset="-128"/>
-                <a:ea typeface="Hiragino Kaku Gothic Pro W3" panose="020B0300000000000000" pitchFamily="34" charset="-128"/>
-                <a:cs typeface="+mn-cs"/>
-              </a:defRPr>
-            </a:lvl3pPr>
-            <a:lvl4pPr marL="1600200" indent="-228600" algn="l" defTabSz="914400" rtl="0" eaLnBrk="1" latinLnBrk="0" hangingPunct="1">
-              <a:lnSpc>
-                <a:spcPct val="90000"/>
-              </a:lnSpc>
-              <a:spcBef>
-                <a:spcPts val="500"/>
-              </a:spcBef>
-              <a:buFont typeface="Arial" panose="020B0604020202020204" pitchFamily="34" charset="0"/>
-              <a:buChar char="•"/>
-              <a:defRPr kumimoji="1" sz="1200" b="0" i="0" kern="1200">
-                <a:solidFill>
-                  <a:schemeClr val="tx1"/>
-                </a:solidFill>
-                <a:latin typeface="Hiragino Kaku Gothic Pro W3" panose="020B0300000000000000" pitchFamily="34" charset="-128"/>
-                <a:ea typeface="Hiragino Kaku Gothic Pro W3" panose="020B0300000000000000" pitchFamily="34" charset="-128"/>
-                <a:cs typeface="+mn-cs"/>
-              </a:defRPr>
-            </a:lvl4pPr>
-            <a:lvl5pPr marL="2057400" indent="-228600" algn="l" defTabSz="914400" rtl="0" eaLnBrk="1" latinLnBrk="0" hangingPunct="1">
-              <a:lnSpc>
-                <a:spcPct val="90000"/>
-              </a:lnSpc>
-              <a:spcBef>
-                <a:spcPts val="500"/>
-              </a:spcBef>
-              <a:buFont typeface="Arial" panose="020B0604020202020204" pitchFamily="34" charset="0"/>
-              <a:buChar char="•"/>
-              <a:defRPr kumimoji="1" sz="1800" b="0" i="0" kern="1200">
-                <a:solidFill>
-                  <a:schemeClr val="tx1"/>
-                </a:solidFill>
-                <a:latin typeface="Hiragino Kaku Gothic Pro W3" panose="020B0300000000000000" pitchFamily="34" charset="-128"/>
-                <a:ea typeface="Hiragino Kaku Gothic Pro W3" panose="020B0300000000000000" pitchFamily="34" charset="-128"/>
-                <a:cs typeface="+mn-cs"/>
-              </a:defRPr>
-            </a:lvl5pPr>
-            <a:lvl6pPr marL="2514600" indent="-228600" algn="l" defTabSz="914400" rtl="0" eaLnBrk="1" latinLnBrk="0" hangingPunct="1">
-              <a:lnSpc>
-                <a:spcPct val="90000"/>
-              </a:lnSpc>
-              <a:spcBef>
-                <a:spcPts val="500"/>
-              </a:spcBef>
-              <a:buFont typeface="Arial" panose="020B0604020202020204" pitchFamily="34" charset="0"/>
-              <a:buChar char="•"/>
-              <a:defRPr kumimoji="1" sz="1800" kern="1200">
-                <a:solidFill>
-                  <a:schemeClr val="tx1"/>
-                </a:solidFill>
-                <a:latin typeface="+mn-lt"/>
-                <a:ea typeface="+mn-ea"/>
-                <a:cs typeface="+mn-cs"/>
-              </a:defRPr>
-            </a:lvl6pPr>
-            <a:lvl7pPr marL="2971800" indent="-228600" algn="l" defTabSz="914400" rtl="0" eaLnBrk="1" latinLnBrk="0" hangingPunct="1">
-              <a:lnSpc>
-                <a:spcPct val="90000"/>
-              </a:lnSpc>
-              <a:spcBef>
-                <a:spcPts val="500"/>
-              </a:spcBef>
-              <a:buFont typeface="Arial" panose="020B0604020202020204" pitchFamily="34" charset="0"/>
-              <a:buChar char="•"/>
-              <a:defRPr kumimoji="1" sz="1800" kern="1200">
-                <a:solidFill>
-                  <a:schemeClr val="tx1"/>
-                </a:solidFill>
-                <a:latin typeface="+mn-lt"/>
-                <a:ea typeface="+mn-ea"/>
-                <a:cs typeface="+mn-cs"/>
-              </a:defRPr>
-            </a:lvl7pPr>
-            <a:lvl8pPr marL="3429000" indent="-228600" algn="l" defTabSz="914400" rtl="0" eaLnBrk="1" latinLnBrk="0" hangingPunct="1">
-              <a:lnSpc>
-                <a:spcPct val="90000"/>
-              </a:lnSpc>
-              <a:spcBef>
-                <a:spcPts val="500"/>
-              </a:spcBef>
-              <a:buFont typeface="Arial" panose="020B0604020202020204" pitchFamily="34" charset="0"/>
-              <a:buChar char="•"/>
-              <a:defRPr kumimoji="1" sz="1800" kern="1200">
-                <a:solidFill>
-                  <a:schemeClr val="tx1"/>
-                </a:solidFill>
-                <a:latin typeface="+mn-lt"/>
-                <a:ea typeface="+mn-ea"/>
-                <a:cs typeface="+mn-cs"/>
-              </a:defRPr>
-            </a:lvl8pPr>
-            <a:lvl9pPr marL="3886200" indent="-228600" algn="l" defTabSz="914400" rtl="0" eaLnBrk="1" latinLnBrk="0" hangingPunct="1">
-              <a:lnSpc>
-                <a:spcPct val="90000"/>
-              </a:lnSpc>
-              <a:spcBef>
-                <a:spcPts val="500"/>
-              </a:spcBef>
-              <a:buFont typeface="Arial" panose="020B0604020202020204" pitchFamily="34" charset="0"/>
-              <a:buChar char="•"/>
-              <a:defRPr kumimoji="1" sz="1800" kern="1200">
-                <a:solidFill>
-                  <a:schemeClr val="tx1"/>
-                </a:solidFill>
-                <a:latin typeface="+mn-lt"/>
-                <a:ea typeface="+mn-ea"/>
-                <a:cs typeface="+mn-cs"/>
-              </a:defRPr>
-            </a:lvl9pPr>
-          </a:lstStyle>
-          <a:p>
-            <a:r>
-              <a:rPr lang="en" altLang="ja-JP" sz="3200" b="1" dirty="0">
-                <a:latin typeface="Hiragino Kaku Gothic Pro W6" panose="020B0300000000000000" pitchFamily="34" charset="-128"/>
-                <a:ea typeface="Hiragino Kaku Gothic Pro W6" panose="020B0300000000000000" pitchFamily="34" charset="-128"/>
-              </a:rPr>
-              <a:t>Glitch Statistics</a:t>
-            </a:r>
-          </a:p>
-        </p:txBody>
-      </p:sp>
-      <p:pic>
-        <p:nvPicPr>
-          <p:cNvPr id="7" name="図 6">
-            <a:extLst>
-              <a:ext uri="{FF2B5EF4-FFF2-40B4-BE49-F238E27FC236}">
-                <a16:creationId xmlns:a16="http://schemas.microsoft.com/office/drawing/2014/main" id="{AFCD13D7-6155-1375-D715-49359DF053D1}"/>
-              </a:ext>
-            </a:extLst>
-          </p:cNvPr>
-          <p:cNvPicPr>
-            <a:picLocks noChangeAspect="1"/>
-          </p:cNvPicPr>
-          <p:nvPr/>
-        </p:nvPicPr>
-        <p:blipFill>
-          <a:blip r:embed="rId3"/>
-          <a:srcRect l="1494" t="11106" r="1301" b="13838"/>
-          <a:stretch>
-            <a:fillRect/>
-          </a:stretch>
-        </p:blipFill>
-        <p:spPr>
-          <a:xfrm>
-            <a:off x="46160" y="5550087"/>
-            <a:ext cx="12145840" cy="1054250"/>
-          </a:xfrm>
-          <a:prstGeom prst="rect">
-            <a:avLst/>
-          </a:prstGeom>
-        </p:spPr>
-      </p:pic>
-      <p:graphicFrame>
-        <p:nvGraphicFramePr>
-          <p:cNvPr id="8" name="表 7">
-            <a:extLst>
-              <a:ext uri="{FF2B5EF4-FFF2-40B4-BE49-F238E27FC236}">
-                <a16:creationId xmlns:a16="http://schemas.microsoft.com/office/drawing/2014/main" id="{7DE02A6A-4CC2-CBE2-FEEE-4F379CF0C2A3}"/>
-              </a:ext>
-            </a:extLst>
-          </p:cNvPr>
-          <p:cNvGraphicFramePr>
-            <a:graphicFrameLocks noGrp="1"/>
-          </p:cNvGraphicFramePr>
-          <p:nvPr>
-            <p:extLst>
-              <p:ext uri="{D42A27DB-BD31-4B8C-83A1-F6EECF244321}">
-                <p14:modId xmlns:p14="http://schemas.microsoft.com/office/powerpoint/2010/main" val="1829991134"/>
-              </p:ext>
-            </p:extLst>
-          </p:nvPr>
-        </p:nvGraphicFramePr>
-        <p:xfrm>
-          <a:off x="276113" y="2302416"/>
-          <a:ext cx="11639774" cy="2595880"/>
-        </p:xfrm>
-        <a:graphic>
-          <a:graphicData uri="http://schemas.openxmlformats.org/drawingml/2006/table">
-            <a:tbl>
-              <a:tblPr firstRow="1" bandRow="1">
-                <a:tableStyleId>{5C22544A-7EE6-4342-B048-85BDC9FD1C3A}</a:tableStyleId>
-              </a:tblPr>
-              <a:tblGrid>
-                <a:gridCol w="1896932">
-                  <a:extLst>
-                    <a:ext uri="{9D8B030D-6E8A-4147-A177-3AD203B41FA5}">
-                      <a16:colId xmlns:a16="http://schemas.microsoft.com/office/drawing/2014/main" val="3140246248"/>
-                    </a:ext>
-                  </a:extLst>
-                </a:gridCol>
-                <a:gridCol w="6691256">
-                  <a:extLst>
-                    <a:ext uri="{9D8B030D-6E8A-4147-A177-3AD203B41FA5}">
-                      <a16:colId xmlns:a16="http://schemas.microsoft.com/office/drawing/2014/main" val="1939670685"/>
-                    </a:ext>
-                  </a:extLst>
-                </a:gridCol>
-                <a:gridCol w="731520">
-                  <a:extLst>
-                    <a:ext uri="{9D8B030D-6E8A-4147-A177-3AD203B41FA5}">
-                      <a16:colId xmlns:a16="http://schemas.microsoft.com/office/drawing/2014/main" val="1235602003"/>
-                    </a:ext>
-                  </a:extLst>
-                </a:gridCol>
-                <a:gridCol w="2320066">
-                  <a:extLst>
-                    <a:ext uri="{9D8B030D-6E8A-4147-A177-3AD203B41FA5}">
-                      <a16:colId xmlns:a16="http://schemas.microsoft.com/office/drawing/2014/main" val="4141290738"/>
-                    </a:ext>
-                  </a:extLst>
-                </a:gridCol>
-              </a:tblGrid>
-              <a:tr h="370840">
-                <a:tc>
-                  <a:txBody>
-                    <a:bodyPr/>
-                    <a:lstStyle/>
-                    <a:p>
-                      <a:pPr algn="ctr"/>
-                      <a:r>
-                        <a:rPr kumimoji="1" lang="en-US" altLang="ja-JP" dirty="0"/>
-                        <a:t>Glitch Type</a:t>
-                      </a:r>
-                      <a:endParaRPr kumimoji="1" lang="ja-JP" altLang="en-US"/>
-                    </a:p>
-                  </a:txBody>
-                  <a:tcPr>
-                    <a:solidFill>
-                      <a:schemeClr val="tx2">
-                        <a:lumMod val="75000"/>
-                        <a:lumOff val="25000"/>
-                      </a:schemeClr>
-                    </a:solidFill>
-                  </a:tcPr>
-                </a:tc>
-                <a:tc>
-                  <a:txBody>
-                    <a:bodyPr/>
-                    <a:lstStyle/>
-                    <a:p>
-                      <a:pPr algn="ctr"/>
-                      <a:r>
-                        <a:rPr kumimoji="1" lang="en-US" altLang="ja-JP" dirty="0"/>
-                        <a:t>Simple Explanation</a:t>
-                      </a:r>
-                      <a:endParaRPr kumimoji="1" lang="ja-JP" altLang="en-US"/>
-                    </a:p>
-                  </a:txBody>
-                  <a:tcPr>
-                    <a:solidFill>
-                      <a:schemeClr val="tx2">
-                        <a:lumMod val="75000"/>
-                        <a:lumOff val="25000"/>
-                      </a:schemeClr>
-                    </a:solidFill>
-                  </a:tcPr>
-                </a:tc>
-                <a:tc>
-                  <a:txBody>
-                    <a:bodyPr/>
-                    <a:lstStyle/>
-                    <a:p>
-                      <a:pPr algn="ctr"/>
-                      <a:r>
-                        <a:rPr kumimoji="1" lang="en-US" altLang="ja-JP" dirty="0"/>
-                        <a:t>Freq</a:t>
-                      </a:r>
-                      <a:endParaRPr kumimoji="1" lang="ja-JP" altLang="en-US"/>
-                    </a:p>
-                  </a:txBody>
-                  <a:tcPr>
-                    <a:solidFill>
-                      <a:schemeClr val="tx2">
-                        <a:lumMod val="75000"/>
-                        <a:lumOff val="25000"/>
-                      </a:schemeClr>
-                    </a:solidFill>
-                  </a:tcPr>
-                </a:tc>
-                <a:tc>
-                  <a:txBody>
-                    <a:bodyPr/>
-                    <a:lstStyle/>
-                    <a:p>
-                      <a:pPr algn="ctr"/>
-                      <a:r>
-                        <a:rPr kumimoji="1" lang="en-US" altLang="ja-JP" dirty="0"/>
-                        <a:t>Duration (Frames)</a:t>
-                      </a:r>
-                      <a:endParaRPr kumimoji="1" lang="ja-JP" altLang="en-US"/>
-                    </a:p>
-                  </a:txBody>
-                  <a:tcPr>
-                    <a:solidFill>
-                      <a:schemeClr val="tx2">
-                        <a:lumMod val="75000"/>
-                        <a:lumOff val="25000"/>
-                      </a:schemeClr>
-                    </a:solidFill>
-                  </a:tcPr>
-                </a:tc>
-                <a:extLst>
-                  <a:ext uri="{0D108BD9-81ED-4DB2-BD59-A6C34878D82A}">
-                    <a16:rowId xmlns:a16="http://schemas.microsoft.com/office/drawing/2014/main" val="3701093978"/>
-                  </a:ext>
-                </a:extLst>
-              </a:tr>
-              <a:tr h="370840">
-                <a:tc>
-                  <a:txBody>
-                    <a:bodyPr/>
-                    <a:lstStyle/>
-                    <a:p>
-                      <a:r>
-                        <a:rPr kumimoji="1" lang="en-US" altLang="ja-JP" b="0" i="0" dirty="0">
-                          <a:latin typeface="Hiragino Kaku Gothic Pro W3" panose="020B0300000000000000" pitchFamily="34" charset="-128"/>
-                          <a:ea typeface="Hiragino Kaku Gothic Pro W3" panose="020B0300000000000000" pitchFamily="34" charset="-128"/>
-                        </a:rPr>
-                        <a:t>BLJ</a:t>
-                      </a:r>
-                      <a:endParaRPr kumimoji="1" lang="ja-JP" altLang="en-US" b="0" i="0">
-                        <a:latin typeface="Hiragino Kaku Gothic Pro W3" panose="020B0300000000000000" pitchFamily="34" charset="-128"/>
-                        <a:ea typeface="Hiragino Kaku Gothic Pro W3" panose="020B0300000000000000" pitchFamily="34" charset="-128"/>
-                      </a:endParaRPr>
-                    </a:p>
-                  </a:txBody>
-                  <a:tcPr/>
-                </a:tc>
-                <a:tc>
-                  <a:txBody>
-                    <a:bodyPr/>
-                    <a:lstStyle/>
-                    <a:p>
-                      <a:pPr algn="l"/>
-                      <a:r>
-                        <a:rPr kumimoji="1" lang="en" altLang="ja-JP" sz="1600" b="0" i="0" dirty="0">
-                          <a:latin typeface="Hiragino Kaku Gothic Pro W3" panose="020B0300000000000000" pitchFamily="34" charset="-128"/>
-                          <a:ea typeface="Hiragino Kaku Gothic Pro W3" panose="020B0300000000000000" pitchFamily="34" charset="-128"/>
-                        </a:rPr>
-                        <a:t>Accumulate speed via backward jumps to clip through walls.</a:t>
-                      </a:r>
-                      <a:endParaRPr kumimoji="1" lang="ja-JP" altLang="en-US" sz="1600" b="0" i="0">
-                        <a:latin typeface="Hiragino Kaku Gothic Pro W3" panose="020B0300000000000000" pitchFamily="34" charset="-128"/>
-                        <a:ea typeface="Hiragino Kaku Gothic Pro W3" panose="020B0300000000000000" pitchFamily="34" charset="-128"/>
-                      </a:endParaRPr>
-                    </a:p>
-                  </a:txBody>
-                  <a:tcPr/>
-                </a:tc>
-                <a:tc>
-                  <a:txBody>
-                    <a:bodyPr/>
-                    <a:lstStyle/>
-                    <a:p>
-                      <a:pPr algn="r"/>
-                      <a:r>
-                        <a:rPr kumimoji="1" lang="en-US" altLang="ja-JP" b="0" i="0" dirty="0">
-                          <a:latin typeface="Hiragino Kaku Gothic Pro W3" panose="020B0300000000000000" pitchFamily="34" charset="-128"/>
-                          <a:ea typeface="Hiragino Kaku Gothic Pro W3" panose="020B0300000000000000" pitchFamily="34" charset="-128"/>
-                        </a:rPr>
-                        <a:t>3</a:t>
-                      </a:r>
-                      <a:endParaRPr kumimoji="1" lang="ja-JP" altLang="en-US" b="0" i="0">
-                        <a:latin typeface="Hiragino Kaku Gothic Pro W3" panose="020B0300000000000000" pitchFamily="34" charset="-128"/>
-                        <a:ea typeface="Hiragino Kaku Gothic Pro W3" panose="020B0300000000000000" pitchFamily="34" charset="-128"/>
-                      </a:endParaRPr>
-                    </a:p>
-                  </a:txBody>
-                  <a:tcPr/>
-                </a:tc>
-                <a:tc>
-                  <a:txBody>
-                    <a:bodyPr/>
-                    <a:lstStyle/>
-                    <a:p>
-                      <a:pPr algn="r"/>
-                      <a:r>
-                        <a:rPr kumimoji="1" lang="en-US" altLang="ja-JP" b="0" i="0" dirty="0">
-                          <a:latin typeface="Hiragino Kaku Gothic Pro W3" panose="020B0300000000000000" pitchFamily="34" charset="-128"/>
-                          <a:ea typeface="Hiragino Kaku Gothic Pro W3" panose="020B0300000000000000" pitchFamily="34" charset="-128"/>
-                        </a:rPr>
-                        <a:t>96+138+105=339</a:t>
-                      </a:r>
-                      <a:endParaRPr kumimoji="1" lang="ja-JP" altLang="en-US" b="0" i="0">
-                        <a:latin typeface="Hiragino Kaku Gothic Pro W3" panose="020B0300000000000000" pitchFamily="34" charset="-128"/>
-                        <a:ea typeface="Hiragino Kaku Gothic Pro W3" panose="020B0300000000000000" pitchFamily="34" charset="-128"/>
-                      </a:endParaRPr>
-                    </a:p>
-                  </a:txBody>
-                  <a:tcPr/>
-                </a:tc>
-                <a:extLst>
-                  <a:ext uri="{0D108BD9-81ED-4DB2-BD59-A6C34878D82A}">
-                    <a16:rowId xmlns:a16="http://schemas.microsoft.com/office/drawing/2014/main" val="2056778166"/>
-                  </a:ext>
-                </a:extLst>
-              </a:tr>
-              <a:tr h="370840">
-                <a:tc>
-                  <a:txBody>
-                    <a:bodyPr/>
-                    <a:lstStyle/>
-                    <a:p>
-                      <a:r>
-                        <a:rPr kumimoji="1" lang="en-US" altLang="ja-JP" b="0" i="0" dirty="0">
-                          <a:latin typeface="Hiragino Kaku Gothic Pro W3" panose="020B0300000000000000" pitchFamily="34" charset="-128"/>
-                          <a:ea typeface="Hiragino Kaku Gothic Pro W3" panose="020B0300000000000000" pitchFamily="34" charset="-128"/>
-                        </a:rPr>
-                        <a:t>LBLJ</a:t>
-                      </a:r>
-                      <a:endParaRPr kumimoji="1" lang="ja-JP" altLang="en-US" b="0" i="0">
-                        <a:latin typeface="Hiragino Kaku Gothic Pro W3" panose="020B0300000000000000" pitchFamily="34" charset="-128"/>
-                        <a:ea typeface="Hiragino Kaku Gothic Pro W3" panose="020B0300000000000000" pitchFamily="34" charset="-128"/>
-                      </a:endParaRPr>
-                    </a:p>
-                  </a:txBody>
-                  <a:tcPr/>
-                </a:tc>
-                <a:tc>
-                  <a:txBody>
-                    <a:bodyPr/>
-                    <a:lstStyle/>
-                    <a:p>
-                      <a:pPr algn="l"/>
-                      <a:r>
-                        <a:rPr kumimoji="1" lang="en" altLang="ja-JP" sz="1600" b="0" i="0" dirty="0">
-                          <a:latin typeface="Hiragino Kaku Gothic Pro W3" panose="020B0300000000000000" pitchFamily="34" charset="-128"/>
-                          <a:ea typeface="Hiragino Kaku Gothic Pro W3" panose="020B0300000000000000" pitchFamily="34" charset="-128"/>
-                        </a:rPr>
-                        <a:t>Perform BLJ in the lobby to clip through the 8-star door.</a:t>
-                      </a:r>
-                      <a:endParaRPr kumimoji="1" lang="ja-JP" altLang="en-US" sz="1600" b="0" i="0">
-                        <a:latin typeface="Hiragino Kaku Gothic Pro W3" panose="020B0300000000000000" pitchFamily="34" charset="-128"/>
-                        <a:ea typeface="Hiragino Kaku Gothic Pro W3" panose="020B0300000000000000" pitchFamily="34" charset="-128"/>
-                      </a:endParaRPr>
-                    </a:p>
-                  </a:txBody>
-                  <a:tcPr/>
-                </a:tc>
-                <a:tc>
-                  <a:txBody>
-                    <a:bodyPr/>
-                    <a:lstStyle/>
-                    <a:p>
-                      <a:pPr algn="r"/>
-                      <a:r>
-                        <a:rPr kumimoji="1" lang="en-US" altLang="ja-JP" b="0" i="0" dirty="0">
-                          <a:latin typeface="Hiragino Kaku Gothic Pro W3" panose="020B0300000000000000" pitchFamily="34" charset="-128"/>
-                          <a:ea typeface="Hiragino Kaku Gothic Pro W3" panose="020B0300000000000000" pitchFamily="34" charset="-128"/>
-                        </a:rPr>
-                        <a:t>1</a:t>
-                      </a:r>
-                      <a:endParaRPr kumimoji="1" lang="ja-JP" altLang="en-US" b="0" i="0">
-                        <a:latin typeface="Hiragino Kaku Gothic Pro W3" panose="020B0300000000000000" pitchFamily="34" charset="-128"/>
-                        <a:ea typeface="Hiragino Kaku Gothic Pro W3" panose="020B0300000000000000" pitchFamily="34" charset="-128"/>
-                      </a:endParaRPr>
-                    </a:p>
-                  </a:txBody>
-                  <a:tcPr/>
-                </a:tc>
-                <a:tc>
-                  <a:txBody>
-                    <a:bodyPr/>
-                    <a:lstStyle/>
-                    <a:p>
-                      <a:pPr algn="r"/>
-                      <a:r>
-                        <a:rPr kumimoji="1" lang="en-US" altLang="ja-JP" b="0" i="0" dirty="0">
-                          <a:latin typeface="Hiragino Kaku Gothic Pro W3" panose="020B0300000000000000" pitchFamily="34" charset="-128"/>
-                          <a:ea typeface="Hiragino Kaku Gothic Pro W3" panose="020B0300000000000000" pitchFamily="34" charset="-128"/>
-                        </a:rPr>
-                        <a:t>170</a:t>
-                      </a:r>
-                      <a:endParaRPr kumimoji="1" lang="ja-JP" altLang="en-US" b="0" i="0">
-                        <a:latin typeface="Hiragino Kaku Gothic Pro W3" panose="020B0300000000000000" pitchFamily="34" charset="-128"/>
-                        <a:ea typeface="Hiragino Kaku Gothic Pro W3" panose="020B0300000000000000" pitchFamily="34" charset="-128"/>
-                      </a:endParaRPr>
-                    </a:p>
-                  </a:txBody>
-                  <a:tcPr/>
-                </a:tc>
-                <a:extLst>
-                  <a:ext uri="{0D108BD9-81ED-4DB2-BD59-A6C34878D82A}">
-                    <a16:rowId xmlns:a16="http://schemas.microsoft.com/office/drawing/2014/main" val="1518675534"/>
-                  </a:ext>
-                </a:extLst>
-              </a:tr>
-              <a:tr h="370840">
-                <a:tc>
-                  <a:txBody>
-                    <a:bodyPr/>
-                    <a:lstStyle/>
-                    <a:p>
-                      <a:r>
-                        <a:rPr kumimoji="1" lang="en-US" altLang="ja-JP" b="0" i="0" dirty="0">
-                          <a:latin typeface="Hiragino Kaku Gothic Pro W3" panose="020B0300000000000000" pitchFamily="34" charset="-128"/>
-                          <a:ea typeface="Hiragino Kaku Gothic Pro W3" panose="020B0300000000000000" pitchFamily="34" charset="-128"/>
-                        </a:rPr>
-                        <a:t>DDD Skip</a:t>
-                      </a:r>
-                      <a:endParaRPr kumimoji="1" lang="ja-JP" altLang="en-US" b="0" i="0">
-                        <a:latin typeface="Hiragino Kaku Gothic Pro W3" panose="020B0300000000000000" pitchFamily="34" charset="-128"/>
-                        <a:ea typeface="Hiragino Kaku Gothic Pro W3" panose="020B0300000000000000" pitchFamily="34" charset="-128"/>
-                      </a:endParaRPr>
-                    </a:p>
-                  </a:txBody>
-                  <a:tcPr/>
-                </a:tc>
-                <a:tc>
-                  <a:txBody>
-                    <a:bodyPr/>
-                    <a:lstStyle/>
-                    <a:p>
-                      <a:pPr algn="l"/>
-                      <a:r>
-                        <a:rPr kumimoji="1" lang="en" altLang="ja-JP" sz="1600" b="0" i="0" dirty="0">
-                          <a:latin typeface="Hiragino Kaku Gothic Pro W3" panose="020B0300000000000000" pitchFamily="34" charset="-128"/>
-                          <a:ea typeface="Hiragino Kaku Gothic Pro W3" panose="020B0300000000000000" pitchFamily="34" charset="-128"/>
-                        </a:rPr>
-                        <a:t>Bypass the 30-star door and the Dire, Dire Docks entrance.</a:t>
-                      </a:r>
-                      <a:endParaRPr kumimoji="1" lang="ja-JP" altLang="en-US" sz="1600" b="0" i="0">
-                        <a:latin typeface="Hiragino Kaku Gothic Pro W3" panose="020B0300000000000000" pitchFamily="34" charset="-128"/>
-                        <a:ea typeface="Hiragino Kaku Gothic Pro W3" panose="020B0300000000000000" pitchFamily="34" charset="-128"/>
-                      </a:endParaRPr>
-                    </a:p>
-                  </a:txBody>
-                  <a:tcPr/>
-                </a:tc>
-                <a:tc>
-                  <a:txBody>
-                    <a:bodyPr/>
-                    <a:lstStyle/>
-                    <a:p>
-                      <a:pPr algn="r"/>
-                      <a:r>
-                        <a:rPr kumimoji="1" lang="en-US" altLang="ja-JP" b="0" i="0" dirty="0">
-                          <a:latin typeface="Hiragino Kaku Gothic Pro W3" panose="020B0300000000000000" pitchFamily="34" charset="-128"/>
-                          <a:ea typeface="Hiragino Kaku Gothic Pro W3" panose="020B0300000000000000" pitchFamily="34" charset="-128"/>
-                        </a:rPr>
-                        <a:t>1</a:t>
-                      </a:r>
-                      <a:endParaRPr kumimoji="1" lang="ja-JP" altLang="en-US" b="0" i="0">
-                        <a:latin typeface="Hiragino Kaku Gothic Pro W3" panose="020B0300000000000000" pitchFamily="34" charset="-128"/>
-                        <a:ea typeface="Hiragino Kaku Gothic Pro W3" panose="020B0300000000000000" pitchFamily="34" charset="-128"/>
-                      </a:endParaRPr>
-                    </a:p>
-                  </a:txBody>
-                  <a:tcPr/>
-                </a:tc>
-                <a:tc>
-                  <a:txBody>
-                    <a:bodyPr/>
-                    <a:lstStyle/>
-                    <a:p>
-                      <a:pPr algn="r"/>
-                      <a:r>
-                        <a:rPr kumimoji="1" lang="en-US" altLang="ja-JP" b="0" i="0" dirty="0">
-                          <a:latin typeface="Hiragino Kaku Gothic Pro W3" panose="020B0300000000000000" pitchFamily="34" charset="-128"/>
-                          <a:ea typeface="Hiragino Kaku Gothic Pro W3" panose="020B0300000000000000" pitchFamily="34" charset="-128"/>
-                        </a:rPr>
-                        <a:t>179</a:t>
-                      </a:r>
-                      <a:endParaRPr kumimoji="1" lang="ja-JP" altLang="en-US" b="0" i="0">
-                        <a:latin typeface="Hiragino Kaku Gothic Pro W3" panose="020B0300000000000000" pitchFamily="34" charset="-128"/>
-                        <a:ea typeface="Hiragino Kaku Gothic Pro W3" panose="020B0300000000000000" pitchFamily="34" charset="-128"/>
-                      </a:endParaRPr>
-                    </a:p>
-                  </a:txBody>
-                  <a:tcPr/>
-                </a:tc>
-                <a:extLst>
-                  <a:ext uri="{0D108BD9-81ED-4DB2-BD59-A6C34878D82A}">
-                    <a16:rowId xmlns:a16="http://schemas.microsoft.com/office/drawing/2014/main" val="3757783232"/>
-                  </a:ext>
-                </a:extLst>
-              </a:tr>
-              <a:tr h="370840">
-                <a:tc>
-                  <a:txBody>
-                    <a:bodyPr/>
-                    <a:lstStyle/>
-                    <a:p>
-                      <a:r>
-                        <a:rPr kumimoji="1" lang="en-US" altLang="ja-JP" b="0" i="0" dirty="0">
-                          <a:latin typeface="Hiragino Kaku Gothic Pro W3" panose="020B0300000000000000" pitchFamily="34" charset="-128"/>
-                          <a:ea typeface="Hiragino Kaku Gothic Pro W3" panose="020B0300000000000000" pitchFamily="34" charset="-128"/>
-                        </a:rPr>
-                        <a:t>Pole Glitch</a:t>
-                      </a:r>
-                      <a:endParaRPr kumimoji="1" lang="ja-JP" altLang="en-US" b="0" i="0">
-                        <a:latin typeface="Hiragino Kaku Gothic Pro W3" panose="020B0300000000000000" pitchFamily="34" charset="-128"/>
-                        <a:ea typeface="Hiragino Kaku Gothic Pro W3" panose="020B0300000000000000" pitchFamily="34" charset="-128"/>
-                      </a:endParaRPr>
-                    </a:p>
-                  </a:txBody>
-                  <a:tcPr/>
-                </a:tc>
-                <a:tc>
-                  <a:txBody>
-                    <a:bodyPr/>
-                    <a:lstStyle/>
-                    <a:p>
-                      <a:pPr algn="l"/>
-                      <a:r>
-                        <a:rPr kumimoji="1" lang="en" altLang="ja-JP" sz="1600" b="0" i="0" dirty="0">
-                          <a:latin typeface="Hiragino Kaku Gothic Pro W3" panose="020B0300000000000000" pitchFamily="34" charset="-128"/>
-                          <a:ea typeface="Hiragino Kaku Gothic Pro W3" panose="020B0300000000000000" pitchFamily="34" charset="-128"/>
-                        </a:rPr>
-                        <a:t>Warp from the bottom of a pole to the top instantly.</a:t>
-                      </a:r>
-                      <a:endParaRPr kumimoji="1" lang="ja-JP" altLang="en-US" sz="1600" b="0" i="0">
-                        <a:latin typeface="Hiragino Kaku Gothic Pro W3" panose="020B0300000000000000" pitchFamily="34" charset="-128"/>
-                        <a:ea typeface="Hiragino Kaku Gothic Pro W3" panose="020B0300000000000000" pitchFamily="34" charset="-128"/>
-                      </a:endParaRPr>
-                    </a:p>
-                  </a:txBody>
-                  <a:tcPr/>
-                </a:tc>
-                <a:tc>
-                  <a:txBody>
-                    <a:bodyPr/>
-                    <a:lstStyle/>
-                    <a:p>
-                      <a:pPr algn="r"/>
-                      <a:r>
-                        <a:rPr kumimoji="1" lang="en-US" altLang="ja-JP" b="0" i="0" dirty="0">
-                          <a:latin typeface="Hiragino Kaku Gothic Pro W3" panose="020B0300000000000000" pitchFamily="34" charset="-128"/>
-                          <a:ea typeface="Hiragino Kaku Gothic Pro W3" panose="020B0300000000000000" pitchFamily="34" charset="-128"/>
-                        </a:rPr>
-                        <a:t>1</a:t>
-                      </a:r>
-                      <a:endParaRPr kumimoji="1" lang="ja-JP" altLang="en-US" b="0" i="0">
-                        <a:latin typeface="Hiragino Kaku Gothic Pro W3" panose="020B0300000000000000" pitchFamily="34" charset="-128"/>
-                        <a:ea typeface="Hiragino Kaku Gothic Pro W3" panose="020B0300000000000000" pitchFamily="34" charset="-128"/>
-                      </a:endParaRPr>
-                    </a:p>
-                  </a:txBody>
-                  <a:tcPr/>
-                </a:tc>
-                <a:tc>
-                  <a:txBody>
-                    <a:bodyPr/>
-                    <a:lstStyle/>
-                    <a:p>
-                      <a:pPr algn="r"/>
-                      <a:r>
-                        <a:rPr kumimoji="1" lang="en-US" altLang="ja-JP" b="0" i="0" dirty="0">
-                          <a:latin typeface="Hiragino Kaku Gothic Pro W3" panose="020B0300000000000000" pitchFamily="34" charset="-128"/>
-                          <a:ea typeface="Hiragino Kaku Gothic Pro W3" panose="020B0300000000000000" pitchFamily="34" charset="-128"/>
-                        </a:rPr>
-                        <a:t>34</a:t>
-                      </a:r>
-                      <a:endParaRPr kumimoji="1" lang="ja-JP" altLang="en-US" b="0" i="0">
-                        <a:latin typeface="Hiragino Kaku Gothic Pro W3" panose="020B0300000000000000" pitchFamily="34" charset="-128"/>
-                        <a:ea typeface="Hiragino Kaku Gothic Pro W3" panose="020B0300000000000000" pitchFamily="34" charset="-128"/>
-                      </a:endParaRPr>
-                    </a:p>
-                  </a:txBody>
-                  <a:tcPr/>
-                </a:tc>
-                <a:extLst>
-                  <a:ext uri="{0D108BD9-81ED-4DB2-BD59-A6C34878D82A}">
-                    <a16:rowId xmlns:a16="http://schemas.microsoft.com/office/drawing/2014/main" val="713433677"/>
-                  </a:ext>
-                </a:extLst>
-              </a:tr>
-              <a:tr h="370840">
-                <a:tc>
-                  <a:txBody>
-                    <a:bodyPr/>
-                    <a:lstStyle/>
-                    <a:p>
-                      <a:r>
-                        <a:rPr kumimoji="1" lang="en-US" altLang="ja-JP" b="0" i="0" dirty="0">
-                          <a:latin typeface="Hiragino Kaku Gothic Pro W3" panose="020B0300000000000000" pitchFamily="34" charset="-128"/>
-                          <a:ea typeface="Hiragino Kaku Gothic Pro W3" panose="020B0300000000000000" pitchFamily="34" charset="-128"/>
-                        </a:rPr>
-                        <a:t>Ledge Clipping</a:t>
-                      </a:r>
-                      <a:endParaRPr kumimoji="1" lang="ja-JP" altLang="en-US" b="0" i="0">
-                        <a:latin typeface="Hiragino Kaku Gothic Pro W3" panose="020B0300000000000000" pitchFamily="34" charset="-128"/>
-                        <a:ea typeface="Hiragino Kaku Gothic Pro W3" panose="020B0300000000000000" pitchFamily="34" charset="-128"/>
-                      </a:endParaRPr>
-                    </a:p>
-                  </a:txBody>
-                  <a:tcPr/>
-                </a:tc>
-                <a:tc>
-                  <a:txBody>
-                    <a:bodyPr/>
-                    <a:lstStyle/>
-                    <a:p>
-                      <a:pPr algn="l"/>
-                      <a:r>
-                        <a:rPr kumimoji="1" lang="en" altLang="ja-JP" sz="1600" b="0" i="0" dirty="0">
-                          <a:latin typeface="Hiragino Kaku Gothic Pro W3" panose="020B0300000000000000" pitchFamily="34" charset="-128"/>
-                          <a:ea typeface="Hiragino Kaku Gothic Pro W3" panose="020B0300000000000000" pitchFamily="34" charset="-128"/>
-                        </a:rPr>
-                        <a:t>Clip through walls via geometry seams or collision gaps.</a:t>
-                      </a:r>
-                      <a:endParaRPr kumimoji="1" lang="ja-JP" altLang="en-US" sz="1600" b="0" i="0">
-                        <a:latin typeface="Hiragino Kaku Gothic Pro W3" panose="020B0300000000000000" pitchFamily="34" charset="-128"/>
-                        <a:ea typeface="Hiragino Kaku Gothic Pro W3" panose="020B0300000000000000" pitchFamily="34" charset="-128"/>
-                      </a:endParaRPr>
-                    </a:p>
-                  </a:txBody>
-                  <a:tcPr/>
-                </a:tc>
-                <a:tc>
-                  <a:txBody>
-                    <a:bodyPr/>
-                    <a:lstStyle/>
-                    <a:p>
-                      <a:pPr algn="r"/>
-                      <a:r>
-                        <a:rPr kumimoji="1" lang="en-US" altLang="ja-JP" b="0" i="0" dirty="0">
-                          <a:latin typeface="Hiragino Kaku Gothic Pro W3" panose="020B0300000000000000" pitchFamily="34" charset="-128"/>
-                          <a:ea typeface="Hiragino Kaku Gothic Pro W3" panose="020B0300000000000000" pitchFamily="34" charset="-128"/>
-                        </a:rPr>
-                        <a:t>2</a:t>
-                      </a:r>
-                      <a:endParaRPr kumimoji="1" lang="ja-JP" altLang="en-US" b="0" i="0">
-                        <a:latin typeface="Hiragino Kaku Gothic Pro W3" panose="020B0300000000000000" pitchFamily="34" charset="-128"/>
-                        <a:ea typeface="Hiragino Kaku Gothic Pro W3" panose="020B0300000000000000" pitchFamily="34" charset="-128"/>
-                      </a:endParaRPr>
-                    </a:p>
-                  </a:txBody>
-                  <a:tcPr/>
-                </a:tc>
-                <a:tc>
-                  <a:txBody>
-                    <a:bodyPr/>
-                    <a:lstStyle/>
-                    <a:p>
-                      <a:pPr algn="r"/>
-                      <a:r>
-                        <a:rPr kumimoji="1" lang="en-US" altLang="ja-JP" b="0" i="0" dirty="0">
-                          <a:latin typeface="Hiragino Kaku Gothic Pro W3" panose="020B0300000000000000" pitchFamily="34" charset="-128"/>
-                          <a:ea typeface="Hiragino Kaku Gothic Pro W3" panose="020B0300000000000000" pitchFamily="34" charset="-128"/>
-                        </a:rPr>
-                        <a:t>21+33=54</a:t>
-                      </a:r>
-                      <a:endParaRPr kumimoji="1" lang="ja-JP" altLang="en-US" b="0" i="0">
-                        <a:latin typeface="Hiragino Kaku Gothic Pro W3" panose="020B0300000000000000" pitchFamily="34" charset="-128"/>
-                        <a:ea typeface="Hiragino Kaku Gothic Pro W3" panose="020B0300000000000000" pitchFamily="34" charset="-128"/>
-                      </a:endParaRPr>
-                    </a:p>
-                  </a:txBody>
-                  <a:tcPr/>
-                </a:tc>
-                <a:extLst>
-                  <a:ext uri="{0D108BD9-81ED-4DB2-BD59-A6C34878D82A}">
-                    <a16:rowId xmlns:a16="http://schemas.microsoft.com/office/drawing/2014/main" val="4228148207"/>
-                  </a:ext>
-                </a:extLst>
-              </a:tr>
-              <a:tr h="370840">
-                <a:tc>
-                  <a:txBody>
-                    <a:bodyPr/>
-                    <a:lstStyle/>
-                    <a:p>
-                      <a:r>
-                        <a:rPr kumimoji="1" lang="en-US" altLang="ja-JP" b="0" i="0" dirty="0">
-                          <a:latin typeface="Hiragino Kaku Gothic Pro W3" panose="020B0300000000000000" pitchFamily="34" charset="-128"/>
-                          <a:ea typeface="Hiragino Kaku Gothic Pro W3" panose="020B0300000000000000" pitchFamily="34" charset="-128"/>
-                        </a:rPr>
-                        <a:t>Total</a:t>
-                      </a:r>
-                      <a:endParaRPr kumimoji="1" lang="ja-JP" altLang="en-US" b="0" i="0">
-                        <a:latin typeface="Hiragino Kaku Gothic Pro W3" panose="020B0300000000000000" pitchFamily="34" charset="-128"/>
-                        <a:ea typeface="Hiragino Kaku Gothic Pro W3" panose="020B0300000000000000" pitchFamily="34" charset="-128"/>
-                      </a:endParaRPr>
-                    </a:p>
-                  </a:txBody>
-                  <a:tcPr/>
-                </a:tc>
-                <a:tc>
-                  <a:txBody>
-                    <a:bodyPr/>
-                    <a:lstStyle/>
-                    <a:p>
-                      <a:pPr algn="l"/>
-                      <a:r>
-                        <a:rPr kumimoji="1" lang="en-US" altLang="ja-JP" b="0" i="0" dirty="0">
-                          <a:latin typeface="Hiragino Kaku Gothic Pro W3" panose="020B0300000000000000" pitchFamily="34" charset="-128"/>
-                          <a:ea typeface="Hiragino Kaku Gothic Pro W3" panose="020B0300000000000000" pitchFamily="34" charset="-128"/>
-                        </a:rPr>
-                        <a:t>-</a:t>
-                      </a:r>
-                    </a:p>
-                  </a:txBody>
-                  <a:tcPr/>
-                </a:tc>
-                <a:tc>
-                  <a:txBody>
-                    <a:bodyPr/>
-                    <a:lstStyle/>
-                    <a:p>
-                      <a:pPr algn="r"/>
-                      <a:r>
-                        <a:rPr kumimoji="1" lang="en-US" altLang="ja-JP" b="0" i="0" dirty="0">
-                          <a:latin typeface="Hiragino Kaku Gothic Pro W3" panose="020B0300000000000000" pitchFamily="34" charset="-128"/>
-                          <a:ea typeface="Hiragino Kaku Gothic Pro W3" panose="020B0300000000000000" pitchFamily="34" charset="-128"/>
-                        </a:rPr>
-                        <a:t>8</a:t>
-                      </a:r>
-                      <a:endParaRPr kumimoji="1" lang="ja-JP" altLang="en-US" b="0" i="0">
-                        <a:latin typeface="Hiragino Kaku Gothic Pro W3" panose="020B0300000000000000" pitchFamily="34" charset="-128"/>
-                        <a:ea typeface="Hiragino Kaku Gothic Pro W3" panose="020B0300000000000000" pitchFamily="34" charset="-128"/>
-                      </a:endParaRPr>
-                    </a:p>
-                  </a:txBody>
-                  <a:tcPr/>
-                </a:tc>
-                <a:tc>
-                  <a:txBody>
-                    <a:bodyPr/>
-                    <a:lstStyle/>
-                    <a:p>
-                      <a:pPr algn="r"/>
-                      <a:r>
-                        <a:rPr kumimoji="1" lang="en-US" altLang="ja-JP" b="0" i="0" dirty="0">
-                          <a:latin typeface="Hiragino Kaku Gothic Pro W3" panose="020B0300000000000000" pitchFamily="34" charset="-128"/>
-                          <a:ea typeface="Hiragino Kaku Gothic Pro W3" panose="020B0300000000000000" pitchFamily="34" charset="-128"/>
-                        </a:rPr>
-                        <a:t>776</a:t>
-                      </a:r>
-                      <a:endParaRPr kumimoji="1" lang="ja-JP" altLang="en-US" b="0" i="0">
-                        <a:latin typeface="Hiragino Kaku Gothic Pro W3" panose="020B0300000000000000" pitchFamily="34" charset="-128"/>
-                        <a:ea typeface="Hiragino Kaku Gothic Pro W3" panose="020B0300000000000000" pitchFamily="34" charset="-128"/>
-                      </a:endParaRPr>
-                    </a:p>
-                  </a:txBody>
-                  <a:tcPr/>
-                </a:tc>
-                <a:extLst>
-                  <a:ext uri="{0D108BD9-81ED-4DB2-BD59-A6C34878D82A}">
-                    <a16:rowId xmlns:a16="http://schemas.microsoft.com/office/drawing/2014/main" val="3398638210"/>
-                  </a:ext>
-                </a:extLst>
-              </a:tr>
-            </a:tbl>
-          </a:graphicData>
-        </a:graphic>
-      </p:graphicFrame>
-      <p:sp>
-        <p:nvSpPr>
-          <p:cNvPr id="9" name="コンテンツ プレースホルダー 2">
-            <a:extLst>
-              <a:ext uri="{FF2B5EF4-FFF2-40B4-BE49-F238E27FC236}">
-                <a16:creationId xmlns:a16="http://schemas.microsoft.com/office/drawing/2014/main" id="{5CF60600-DF1D-6349-BE50-D36FF9A38FCC}"/>
-              </a:ext>
-            </a:extLst>
-          </p:cNvPr>
-          <p:cNvSpPr txBox="1">
-            <a:spLocks/>
-          </p:cNvSpPr>
-          <p:nvPr/>
-        </p:nvSpPr>
-        <p:spPr>
-          <a:xfrm>
-            <a:off x="451597" y="5296424"/>
-            <a:ext cx="11288806" cy="507326"/>
-          </a:xfrm>
-          <a:prstGeom prst="rect">
-            <a:avLst/>
-          </a:prstGeom>
-        </p:spPr>
-        <p:txBody>
-          <a:bodyPr vert="horz" lIns="90000" tIns="45720" rIns="91440" bIns="45720" rtlCol="0">
-            <a:noAutofit/>
-          </a:bodyPr>
-          <a:lstStyle>
-            <a:lvl1pPr marL="228600" indent="-228600" algn="l" defTabSz="914400" rtl="0" eaLnBrk="1" latinLnBrk="0" hangingPunct="1">
-              <a:lnSpc>
-                <a:spcPct val="90000"/>
-              </a:lnSpc>
-              <a:spcBef>
-                <a:spcPts val="1000"/>
-              </a:spcBef>
-              <a:buFont typeface="Arial" panose="020B0604020202020204" pitchFamily="34" charset="0"/>
-              <a:buChar char="•"/>
-              <a:defRPr kumimoji="1" sz="4000" b="0" i="0" kern="1200">
-                <a:solidFill>
-                  <a:schemeClr val="tx1"/>
-                </a:solidFill>
-                <a:latin typeface="Hiragino Kaku Gothic Pro W3" panose="020B0300000000000000" pitchFamily="34" charset="-128"/>
-                <a:ea typeface="Hiragino Kaku Gothic Pro W3" panose="020B0300000000000000" pitchFamily="34" charset="-128"/>
-                <a:cs typeface="+mn-cs"/>
-              </a:defRPr>
-            </a:lvl1pPr>
-            <a:lvl2pPr marL="685800" indent="-228600" algn="l" defTabSz="914400" rtl="0" eaLnBrk="1" latinLnBrk="0" hangingPunct="1">
-              <a:lnSpc>
-                <a:spcPct val="90000"/>
-              </a:lnSpc>
-              <a:spcBef>
-                <a:spcPts val="500"/>
-              </a:spcBef>
-              <a:buFont typeface="Arial" panose="020B0604020202020204" pitchFamily="34" charset="0"/>
-              <a:buChar char="•"/>
-              <a:defRPr kumimoji="1" sz="2800" b="0" i="0" kern="1200">
-                <a:solidFill>
-                  <a:schemeClr val="tx1"/>
-                </a:solidFill>
-                <a:latin typeface="Hiragino Kaku Gothic Pro W3" panose="020B0300000000000000" pitchFamily="34" charset="-128"/>
-                <a:ea typeface="Hiragino Kaku Gothic Pro W3" panose="020B0300000000000000" pitchFamily="34" charset="-128"/>
-                <a:cs typeface="+mn-cs"/>
-              </a:defRPr>
-            </a:lvl2pPr>
-            <a:lvl3pPr marL="1143000" indent="-228600" algn="l" defTabSz="914400" rtl="0" eaLnBrk="1" latinLnBrk="0" hangingPunct="1">
-              <a:lnSpc>
-                <a:spcPct val="90000"/>
-              </a:lnSpc>
-              <a:spcBef>
-                <a:spcPts val="500"/>
-              </a:spcBef>
-              <a:buFont typeface="Arial" panose="020B0604020202020204" pitchFamily="34" charset="0"/>
-              <a:buChar char="•"/>
-              <a:defRPr kumimoji="1" sz="2400" b="0" i="0" kern="1200">
-                <a:solidFill>
-                  <a:schemeClr val="tx1"/>
-                </a:solidFill>
-                <a:latin typeface="Hiragino Kaku Gothic Pro W3" panose="020B0300000000000000" pitchFamily="34" charset="-128"/>
-                <a:ea typeface="Hiragino Kaku Gothic Pro W3" panose="020B0300000000000000" pitchFamily="34" charset="-128"/>
-                <a:cs typeface="+mn-cs"/>
-              </a:defRPr>
-            </a:lvl3pPr>
-            <a:lvl4pPr marL="1600200" indent="-228600" algn="l" defTabSz="914400" rtl="0" eaLnBrk="1" latinLnBrk="0" hangingPunct="1">
-              <a:lnSpc>
-                <a:spcPct val="90000"/>
-              </a:lnSpc>
-              <a:spcBef>
-                <a:spcPts val="500"/>
-              </a:spcBef>
-              <a:buFont typeface="Arial" panose="020B0604020202020204" pitchFamily="34" charset="0"/>
-              <a:buChar char="•"/>
-              <a:defRPr kumimoji="1" sz="1200" b="0" i="0" kern="1200">
-                <a:solidFill>
-                  <a:schemeClr val="tx1"/>
-                </a:solidFill>
-                <a:latin typeface="Hiragino Kaku Gothic Pro W3" panose="020B0300000000000000" pitchFamily="34" charset="-128"/>
-                <a:ea typeface="Hiragino Kaku Gothic Pro W3" panose="020B0300000000000000" pitchFamily="34" charset="-128"/>
-                <a:cs typeface="+mn-cs"/>
-              </a:defRPr>
-            </a:lvl4pPr>
-            <a:lvl5pPr marL="2057400" indent="-228600" algn="l" defTabSz="914400" rtl="0" eaLnBrk="1" latinLnBrk="0" hangingPunct="1">
-              <a:lnSpc>
-                <a:spcPct val="90000"/>
-              </a:lnSpc>
-              <a:spcBef>
-                <a:spcPts val="500"/>
-              </a:spcBef>
-              <a:buFont typeface="Arial" panose="020B0604020202020204" pitchFamily="34" charset="0"/>
-              <a:buChar char="•"/>
-              <a:defRPr kumimoji="1" sz="1800" b="0" i="0" kern="1200">
-                <a:solidFill>
-                  <a:schemeClr val="tx1"/>
-                </a:solidFill>
-                <a:latin typeface="Hiragino Kaku Gothic Pro W3" panose="020B0300000000000000" pitchFamily="34" charset="-128"/>
-                <a:ea typeface="Hiragino Kaku Gothic Pro W3" panose="020B0300000000000000" pitchFamily="34" charset="-128"/>
-                <a:cs typeface="+mn-cs"/>
-              </a:defRPr>
-            </a:lvl5pPr>
-            <a:lvl6pPr marL="2514600" indent="-228600" algn="l" defTabSz="914400" rtl="0" eaLnBrk="1" latinLnBrk="0" hangingPunct="1">
-              <a:lnSpc>
-                <a:spcPct val="90000"/>
-              </a:lnSpc>
-              <a:spcBef>
-                <a:spcPts val="500"/>
-              </a:spcBef>
-              <a:buFont typeface="Arial" panose="020B0604020202020204" pitchFamily="34" charset="0"/>
-              <a:buChar char="•"/>
-              <a:defRPr kumimoji="1" sz="1800" kern="1200">
-                <a:solidFill>
-                  <a:schemeClr val="tx1"/>
-                </a:solidFill>
-                <a:latin typeface="+mn-lt"/>
-                <a:ea typeface="+mn-ea"/>
-                <a:cs typeface="+mn-cs"/>
-              </a:defRPr>
-            </a:lvl6pPr>
-            <a:lvl7pPr marL="2971800" indent="-228600" algn="l" defTabSz="914400" rtl="0" eaLnBrk="1" latinLnBrk="0" hangingPunct="1">
-              <a:lnSpc>
-                <a:spcPct val="90000"/>
-              </a:lnSpc>
-              <a:spcBef>
-                <a:spcPts val="500"/>
-              </a:spcBef>
-              <a:buFont typeface="Arial" panose="020B0604020202020204" pitchFamily="34" charset="0"/>
-              <a:buChar char="•"/>
-              <a:defRPr kumimoji="1" sz="1800" kern="1200">
-                <a:solidFill>
-                  <a:schemeClr val="tx1"/>
-                </a:solidFill>
-                <a:latin typeface="+mn-lt"/>
-                <a:ea typeface="+mn-ea"/>
-                <a:cs typeface="+mn-cs"/>
-              </a:defRPr>
-            </a:lvl7pPr>
-            <a:lvl8pPr marL="3429000" indent="-228600" algn="l" defTabSz="914400" rtl="0" eaLnBrk="1" latinLnBrk="0" hangingPunct="1">
-              <a:lnSpc>
-                <a:spcPct val="90000"/>
-              </a:lnSpc>
-              <a:spcBef>
-                <a:spcPts val="500"/>
-              </a:spcBef>
-              <a:buFont typeface="Arial" panose="020B0604020202020204" pitchFamily="34" charset="0"/>
-              <a:buChar char="•"/>
-              <a:defRPr kumimoji="1" sz="1800" kern="1200">
-                <a:solidFill>
-                  <a:schemeClr val="tx1"/>
-                </a:solidFill>
-                <a:latin typeface="+mn-lt"/>
-                <a:ea typeface="+mn-ea"/>
-                <a:cs typeface="+mn-cs"/>
-              </a:defRPr>
-            </a:lvl8pPr>
-            <a:lvl9pPr marL="3886200" indent="-228600" algn="l" defTabSz="914400" rtl="0" eaLnBrk="1" latinLnBrk="0" hangingPunct="1">
-              <a:lnSpc>
-                <a:spcPct val="90000"/>
-              </a:lnSpc>
-              <a:spcBef>
-                <a:spcPts val="500"/>
-              </a:spcBef>
-              <a:buFont typeface="Arial" panose="020B0604020202020204" pitchFamily="34" charset="0"/>
-              <a:buChar char="•"/>
-              <a:defRPr kumimoji="1" sz="1800" kern="1200">
-                <a:solidFill>
-                  <a:schemeClr val="tx1"/>
-                </a:solidFill>
-                <a:latin typeface="+mn-lt"/>
-                <a:ea typeface="+mn-ea"/>
-                <a:cs typeface="+mn-cs"/>
-              </a:defRPr>
-            </a:lvl9pPr>
-          </a:lstStyle>
-          <a:p>
-            <a:r>
-              <a:rPr lang="en" altLang="ja-JP" sz="3200" b="1" dirty="0">
-                <a:latin typeface="Hiragino Kaku Gothic Pro W6" panose="020B0300000000000000" pitchFamily="34" charset="-128"/>
-                <a:ea typeface="Hiragino Kaku Gothic Pro W6" panose="020B0300000000000000" pitchFamily="34" charset="-128"/>
-              </a:rPr>
-              <a:t>Visualization of Glitch Usage</a:t>
-            </a:r>
+              <a:rPr lang="en" altLang="ja-JP" sz="3200" dirty="0"/>
+              <a:t>Consistency in Glitch Types: The types of glitches utilized have remained largely consistent over time (with minor shifts such as the adoption of the Pole Glitch and recent BLJ usage)</a:t>
+            </a:r>
+            <a:r>
+              <a:rPr lang="ja-JP" altLang="en" sz="3200"/>
+              <a:t>．</a:t>
+            </a:r>
+          </a:p>
+          <a:p>
+            <a:r>
+              <a:rPr lang="en" altLang="ja-JP" sz="3200" dirty="0"/>
+              <a:t>Duration Patterns: Two primary patterns were observed regarding glitch durations: those that remain stable and those that are steadily decreasing</a:t>
+            </a:r>
+            <a:r>
+              <a:rPr lang="ja-JP" altLang="en" sz="3200"/>
+              <a:t>．</a:t>
+            </a:r>
+          </a:p>
+          <a:p>
+            <a:r>
+              <a:rPr lang="en" altLang="ja-JP" sz="3200" dirty="0"/>
+              <a:t>Interpretations: Reductions in frame counts are attributed to improved player proficiency</a:t>
+            </a:r>
+            <a:r>
+              <a:rPr lang="ja-JP" altLang="en" sz="3200"/>
+              <a:t>，</a:t>
+            </a:r>
+            <a:r>
+              <a:rPr lang="en" altLang="ja-JP" sz="3200" dirty="0"/>
+              <a:t>while occasional increases reflect the extreme execution difficulty that remains unstable even for elite players</a:t>
+            </a:r>
+            <a:r>
+              <a:rPr lang="ja-JP" altLang="en" sz="3200"/>
+              <a:t>．</a:t>
+            </a:r>
+            <a:endParaRPr kumimoji="1" lang="en" altLang="ja-JP" sz="3200" dirty="0"/>
           </a:p>
         </p:txBody>
       </p:sp>
     </p:spTree>
     <p:extLst>
       <p:ext uri="{BB962C8B-B14F-4D97-AF65-F5344CB8AC3E}">
-        <p14:creationId xmlns:p14="http://schemas.microsoft.com/office/powerpoint/2010/main" val="3498709319"/>
+        <p14:creationId xmlns:p14="http://schemas.microsoft.com/office/powerpoint/2010/main" val="1935885941"/>
       </p:ext>
     </p:extLst>
   </p:cSld>
@@ -6546,7 +6517,7 @@
         <p:cNvPr id="1" name="">
           <a:extLst>
             <a:ext uri="{FF2B5EF4-FFF2-40B4-BE49-F238E27FC236}">
-              <a16:creationId xmlns:a16="http://schemas.microsoft.com/office/drawing/2014/main" id="{0675AEB0-DB24-FD04-B403-C8529BC1CC54}"/>
+              <a16:creationId xmlns:a16="http://schemas.microsoft.com/office/drawing/2014/main" id="{BC96B1F6-9851-F468-268D-E07635049FF3}"/>
             </a:ext>
           </a:extLst>
         </p:cNvPr>
@@ -6566,7 +6537,7 @@
           <p:cNvPr id="2" name="タイトル 1">
             <a:extLst>
               <a:ext uri="{FF2B5EF4-FFF2-40B4-BE49-F238E27FC236}">
-                <a16:creationId xmlns:a16="http://schemas.microsoft.com/office/drawing/2014/main" id="{4C9D793B-2881-5477-FDE4-493BEF91A850}"/>
+                <a16:creationId xmlns:a16="http://schemas.microsoft.com/office/drawing/2014/main" id="{6A3616AD-D6F0-834A-D474-1A83389FE3FF}"/>
               </a:ext>
             </a:extLst>
           </p:cNvPr>
@@ -6584,7 +6555,7 @@
           <a:p>
             <a:r>
               <a:rPr lang="en" altLang="ja-JP" dirty="0"/>
-              <a:t>Future Plans</a:t>
+              <a:t>Is the current glitch list appropriate?</a:t>
             </a:r>
             <a:endParaRPr kumimoji="1" lang="ja-JP" altLang="en-US"/>
           </a:p>
@@ -6595,7 +6566,7 @@
           <p:cNvPr id="3" name="コンテンツ プレースホルダー 2">
             <a:extLst>
               <a:ext uri="{FF2B5EF4-FFF2-40B4-BE49-F238E27FC236}">
-                <a16:creationId xmlns:a16="http://schemas.microsoft.com/office/drawing/2014/main" id="{F0B14055-F650-12EB-9EC5-6E6E896A7BB8}"/>
+                <a16:creationId xmlns:a16="http://schemas.microsoft.com/office/drawing/2014/main" id="{3877AD15-B888-0EBC-76E9-E737E3FDBEA5}"/>
               </a:ext>
             </a:extLst>
           </p:cNvPr>
@@ -6608,86 +6579,1326 @@
         </p:nvSpPr>
         <p:spPr>
           <a:xfrm>
-            <a:off x="451597" y="1900928"/>
-            <a:ext cx="11288806" cy="4403054"/>
+            <a:off x="334357" y="1996312"/>
+            <a:ext cx="11523285" cy="4252088"/>
           </a:xfrm>
         </p:spPr>
         <p:txBody>
           <a:bodyPr/>
           <a:lstStyle/>
           <a:p>
-            <a:r>
-              <a:rPr lang="en" altLang="ja-JP" sz="3200" b="1" dirty="0">
-                <a:latin typeface="Hiragino Kaku Gothic Pro W6" panose="020B0300000000000000" pitchFamily="34" charset="-128"/>
-                <a:ea typeface="Hiragino Kaku Gothic Pro W6" panose="020B0300000000000000" pitchFamily="34" charset="-128"/>
-              </a:rPr>
-              <a:t>Short-term Goals</a:t>
-            </a:r>
-          </a:p>
-          <a:p>
-            <a:pPr lvl="1"/>
-            <a:r>
-              <a:rPr lang="en" altLang="ja-JP" dirty="0"/>
-              <a:t>Complete the implementation and testing of the glitch identification system using Wentao’s methodology.</a:t>
-            </a:r>
-          </a:p>
-          <a:p>
-            <a:pPr lvl="1"/>
-            <a:r>
-              <a:rPr lang="en" altLang="ja-JP" b="1" dirty="0"/>
-              <a:t>Target Deadline</a:t>
-            </a:r>
-            <a:r>
-              <a:rPr lang="en" altLang="ja-JP" dirty="0"/>
-              <a:t>: Results to be finalized by </a:t>
-            </a:r>
-            <a:r>
-              <a:rPr lang="en" altLang="ja-JP" b="1" dirty="0"/>
-              <a:t>April 15th</a:t>
-            </a:r>
-            <a:r>
-              <a:rPr lang="en" altLang="ja-JP" dirty="0"/>
-              <a:t>.</a:t>
-            </a:r>
-          </a:p>
-          <a:p>
-            <a:r>
-              <a:rPr lang="en" altLang="ja-JP" sz="3200" b="1" dirty="0">
-                <a:latin typeface="Hiragino Kaku Gothic Pro W6" panose="020B0300000000000000" pitchFamily="34" charset="-128"/>
-                <a:ea typeface="Hiragino Kaku Gothic Pro W6" panose="020B0300000000000000" pitchFamily="34" charset="-128"/>
-              </a:rPr>
-              <a:t>Reporting Plan</a:t>
-            </a:r>
-          </a:p>
-          <a:p>
-            <a:pPr lvl="1"/>
-            <a:r>
-              <a:rPr lang="en" altLang="ja-JP" dirty="0"/>
-              <a:t>The next meeting is scheduled for April 22nd at the earliest (potentially moving to the 29th).</a:t>
-            </a:r>
-          </a:p>
-          <a:p>
-            <a:pPr lvl="1"/>
-            <a:r>
-              <a:rPr lang="en" altLang="ja-JP" dirty="0"/>
-              <a:t>To maintain momentum, I will report the results via </a:t>
-            </a:r>
-            <a:r>
-              <a:rPr lang="en" altLang="ja-JP" b="1" dirty="0"/>
-              <a:t>Slack</a:t>
-            </a:r>
-            <a:r>
-              <a:rPr lang="en" altLang="ja-JP" dirty="0"/>
-              <a:t> as soon as they are available, rather than waiting for the next formal meeting.</a:t>
-            </a:r>
-            <a:endParaRPr kumimoji="1" lang="en" altLang="ja-JP" dirty="0"/>
+            <a:pPr marL="0" indent="0">
+              <a:buNone/>
+            </a:pPr>
+            <a:r>
+              <a:rPr kumimoji="1" lang="en" altLang="ja-JP" sz="3200" dirty="0"/>
+              <a:t>Some glitches are very similar and potentially confusing:</a:t>
+            </a:r>
+          </a:p>
+          <a:p>
+            <a:r>
+              <a:rPr kumimoji="1" lang="en" altLang="ja-JP" sz="2800" dirty="0"/>
+              <a:t>BLJ: High-speed movement utilizing repeated long jumps</a:t>
+            </a:r>
+            <a:r>
+              <a:rPr kumimoji="1" lang="ja-JP" altLang="en" sz="2800"/>
+              <a:t>．</a:t>
+            </a:r>
+          </a:p>
+          <a:p>
+            <a:r>
+              <a:rPr kumimoji="1" lang="en" altLang="ja-JP" sz="2800" dirty="0"/>
+              <a:t>LBLJ: A specific variant of BLJ performed in the castle lobby</a:t>
+            </a:r>
+            <a:r>
+              <a:rPr kumimoji="1" lang="ja-JP" altLang="en" sz="2800"/>
+              <a:t>．</a:t>
+            </a:r>
+          </a:p>
+          <a:p>
+            <a:endParaRPr kumimoji="1" lang="ja-JP" altLang="en" sz="2800"/>
+          </a:p>
+          <a:p>
+            <a:r>
+              <a:rPr kumimoji="1" lang="en" altLang="ja-JP" sz="2800" dirty="0"/>
+              <a:t>Miscellaneous Wall Clipping (MWC): Wall clipping achieved without using SM64-specific mechanics like BLJ</a:t>
+            </a:r>
+            <a:r>
+              <a:rPr kumimoji="1" lang="ja-JP" altLang="en" sz="2800"/>
+              <a:t>．</a:t>
+            </a:r>
+          </a:p>
+          <a:p>
+            <a:r>
+              <a:rPr kumimoji="1" lang="en" altLang="ja-JP" sz="2800" dirty="0"/>
+              <a:t>Ledge Clipping: A sub-type of MWC that exploits momentary gaps in collision hitboxes during ledge-grab or pull-up animations</a:t>
+            </a:r>
+            <a:r>
+              <a:rPr kumimoji="1" lang="ja-JP" altLang="en" sz="2800"/>
+              <a:t>．</a:t>
+            </a:r>
+            <a:endParaRPr kumimoji="1" lang="en" altLang="ja-JP" sz="2800" dirty="0"/>
           </a:p>
         </p:txBody>
       </p:sp>
     </p:spTree>
     <p:extLst>
       <p:ext uri="{BB962C8B-B14F-4D97-AF65-F5344CB8AC3E}">
-        <p14:creationId xmlns:p14="http://schemas.microsoft.com/office/powerpoint/2010/main" val="4075356980"/>
+        <p14:creationId xmlns:p14="http://schemas.microsoft.com/office/powerpoint/2010/main" val="2339096232"/>
+      </p:ext>
+    </p:extLst>
+  </p:cSld>
+  <p:clrMapOvr>
+    <a:masterClrMapping/>
+  </p:clrMapOvr>
+</p:sld>
+</file>
+
+<file path=ppt/slides/slide7.xml><?xml version="1.0" encoding="utf-8"?>
+<p:sld xmlns:a="http://schemas.openxmlformats.org/drawingml/2006/main" xmlns:r="http://schemas.openxmlformats.org/officeDocument/2006/relationships" xmlns:p="http://schemas.openxmlformats.org/presentationml/2006/main">
+  <p:cSld>
+    <p:spTree>
+      <p:nvGrpSpPr>
+        <p:cNvPr id="1" name="">
+          <a:extLst>
+            <a:ext uri="{FF2B5EF4-FFF2-40B4-BE49-F238E27FC236}">
+              <a16:creationId xmlns:a16="http://schemas.microsoft.com/office/drawing/2014/main" id="{28B50D20-F3F1-CACC-FA5F-0CBE0C1C632E}"/>
+            </a:ext>
+          </a:extLst>
+        </p:cNvPr>
+        <p:cNvGrpSpPr/>
+        <p:nvPr/>
+      </p:nvGrpSpPr>
+      <p:grpSpPr>
+        <a:xfrm>
+          <a:off x="0" y="0"/>
+          <a:ext cx="0" cy="0"/>
+          <a:chOff x="0" y="0"/>
+          <a:chExt cx="0" cy="0"/>
+        </a:xfrm>
+      </p:grpSpPr>
+      <p:sp>
+        <p:nvSpPr>
+          <p:cNvPr id="2" name="タイトル 1">
+            <a:extLst>
+              <a:ext uri="{FF2B5EF4-FFF2-40B4-BE49-F238E27FC236}">
+                <a16:creationId xmlns:a16="http://schemas.microsoft.com/office/drawing/2014/main" id="{7FA906F0-F0C6-B639-ED03-C7B1460A718F}"/>
+              </a:ext>
+            </a:extLst>
+          </p:cNvPr>
+          <p:cNvSpPr>
+            <a:spLocks noGrp="1"/>
+          </p:cNvSpPr>
+          <p:nvPr>
+            <p:ph type="title"/>
+          </p:nvPr>
+        </p:nvSpPr>
+        <p:spPr/>
+        <p:txBody>
+          <a:bodyPr/>
+          <a:lstStyle/>
+          <a:p>
+            <a:r>
+              <a:rPr lang="en" altLang="ja-JP" dirty="0"/>
+              <a:t>Our Proposal: Hierarchical Glitch List</a:t>
+            </a:r>
+            <a:endParaRPr kumimoji="1" lang="ja-JP" altLang="en-US"/>
+          </a:p>
+        </p:txBody>
+      </p:sp>
+      <p:sp>
+        <p:nvSpPr>
+          <p:cNvPr id="3" name="コンテンツ プレースホルダー 2">
+            <a:extLst>
+              <a:ext uri="{FF2B5EF4-FFF2-40B4-BE49-F238E27FC236}">
+                <a16:creationId xmlns:a16="http://schemas.microsoft.com/office/drawing/2014/main" id="{6852DDC0-FCB9-9CFA-66B1-10D6A47CD675}"/>
+              </a:ext>
+            </a:extLst>
+          </p:cNvPr>
+          <p:cNvSpPr>
+            <a:spLocks noGrp="1"/>
+          </p:cNvSpPr>
+          <p:nvPr>
+            <p:ph idx="1"/>
+          </p:nvPr>
+        </p:nvSpPr>
+        <p:spPr>
+          <a:xfrm>
+            <a:off x="305852" y="5174514"/>
+            <a:ext cx="11577895" cy="1325564"/>
+          </a:xfrm>
+        </p:spPr>
+        <p:txBody>
+          <a:bodyPr/>
+          <a:lstStyle/>
+          <a:p>
+            <a:r>
+              <a:rPr kumimoji="1" lang="en" altLang="ja-JP" sz="3200" dirty="0"/>
+              <a:t>If the model identifies an LBLJ as a general BLJ, we would consider it a successful detection (OK) because the core event was accurately captured</a:t>
+            </a:r>
+            <a:r>
+              <a:rPr kumimoji="1" lang="ja-JP" altLang="en" sz="3200"/>
+              <a:t>．</a:t>
+            </a:r>
+            <a:endParaRPr kumimoji="1" lang="en" altLang="ja-JP" sz="2800" dirty="0"/>
+          </a:p>
+        </p:txBody>
+      </p:sp>
+      <p:sp>
+        <p:nvSpPr>
+          <p:cNvPr id="5" name="正方形/長方形 4">
+            <a:extLst>
+              <a:ext uri="{FF2B5EF4-FFF2-40B4-BE49-F238E27FC236}">
+                <a16:creationId xmlns:a16="http://schemas.microsoft.com/office/drawing/2014/main" id="{29ED7E41-D2BB-1932-3C31-0F7C48552EDC}"/>
+              </a:ext>
+            </a:extLst>
+          </p:cNvPr>
+          <p:cNvSpPr/>
+          <p:nvPr/>
+        </p:nvSpPr>
+        <p:spPr>
+          <a:xfrm>
+            <a:off x="4807906" y="1628384"/>
+            <a:ext cx="2576186" cy="588723"/>
+          </a:xfrm>
+          <a:prstGeom prst="rect">
+            <a:avLst/>
+          </a:prstGeom>
+          <a:solidFill>
+            <a:schemeClr val="tx2">
+              <a:lumMod val="75000"/>
+              <a:lumOff val="25000"/>
+            </a:schemeClr>
+          </a:solidFill>
+        </p:spPr>
+        <p:style>
+          <a:lnRef idx="2">
+            <a:schemeClr val="accent1">
+              <a:shade val="15000"/>
+            </a:schemeClr>
+          </a:lnRef>
+          <a:fillRef idx="1">
+            <a:schemeClr val="accent1"/>
+          </a:fillRef>
+          <a:effectRef idx="0">
+            <a:schemeClr val="accent1"/>
+          </a:effectRef>
+          <a:fontRef idx="minor">
+            <a:schemeClr val="lt1"/>
+          </a:fontRef>
+        </p:style>
+        <p:txBody>
+          <a:bodyPr rtlCol="0" anchor="ctr"/>
+          <a:lstStyle/>
+          <a:p>
+            <a:pPr algn="ctr"/>
+            <a:r>
+              <a:rPr kumimoji="1" lang="en-US" altLang="ja-JP" sz="3200" b="1" dirty="0"/>
+              <a:t>Glitch</a:t>
+            </a:r>
+            <a:endParaRPr kumimoji="1" lang="ja-JP" altLang="en-US" sz="3200" b="1"/>
+          </a:p>
+        </p:txBody>
+      </p:sp>
+      <p:sp>
+        <p:nvSpPr>
+          <p:cNvPr id="7" name="正方形/長方形 6">
+            <a:extLst>
+              <a:ext uri="{FF2B5EF4-FFF2-40B4-BE49-F238E27FC236}">
+                <a16:creationId xmlns:a16="http://schemas.microsoft.com/office/drawing/2014/main" id="{3CA07427-E4E6-0C1F-D33D-993A22C89D00}"/>
+              </a:ext>
+            </a:extLst>
+          </p:cNvPr>
+          <p:cNvSpPr/>
+          <p:nvPr/>
+        </p:nvSpPr>
+        <p:spPr>
+          <a:xfrm>
+            <a:off x="401814" y="3395260"/>
+            <a:ext cx="2576186" cy="588723"/>
+          </a:xfrm>
+          <a:prstGeom prst="rect">
+            <a:avLst/>
+          </a:prstGeom>
+          <a:solidFill>
+            <a:schemeClr val="tx2">
+              <a:lumMod val="75000"/>
+              <a:lumOff val="25000"/>
+            </a:schemeClr>
+          </a:solidFill>
+        </p:spPr>
+        <p:style>
+          <a:lnRef idx="2">
+            <a:schemeClr val="accent1">
+              <a:shade val="15000"/>
+            </a:schemeClr>
+          </a:lnRef>
+          <a:fillRef idx="1">
+            <a:schemeClr val="accent1"/>
+          </a:fillRef>
+          <a:effectRef idx="0">
+            <a:schemeClr val="accent1"/>
+          </a:effectRef>
+          <a:fontRef idx="minor">
+            <a:schemeClr val="lt1"/>
+          </a:fontRef>
+        </p:style>
+        <p:txBody>
+          <a:bodyPr rtlCol="0" anchor="ctr"/>
+          <a:lstStyle/>
+          <a:p>
+            <a:pPr algn="ctr"/>
+            <a:r>
+              <a:rPr kumimoji="1" lang="en-US" altLang="ja-JP" sz="3200" dirty="0"/>
+              <a:t>LBLJ</a:t>
+            </a:r>
+            <a:endParaRPr kumimoji="1" lang="ja-JP" altLang="en-US" sz="3200"/>
+          </a:p>
+        </p:txBody>
+      </p:sp>
+      <p:sp>
+        <p:nvSpPr>
+          <p:cNvPr id="8" name="正方形/長方形 7">
+            <a:extLst>
+              <a:ext uri="{FF2B5EF4-FFF2-40B4-BE49-F238E27FC236}">
+                <a16:creationId xmlns:a16="http://schemas.microsoft.com/office/drawing/2014/main" id="{D5359AC6-C16F-71A6-2279-ABC671E4908A}"/>
+              </a:ext>
+            </a:extLst>
+          </p:cNvPr>
+          <p:cNvSpPr/>
+          <p:nvPr/>
+        </p:nvSpPr>
+        <p:spPr>
+          <a:xfrm>
+            <a:off x="401814" y="2577030"/>
+            <a:ext cx="2576186" cy="588723"/>
+          </a:xfrm>
+          <a:prstGeom prst="rect">
+            <a:avLst/>
+          </a:prstGeom>
+          <a:solidFill>
+            <a:schemeClr val="tx2">
+              <a:lumMod val="75000"/>
+              <a:lumOff val="25000"/>
+            </a:schemeClr>
+          </a:solidFill>
+        </p:spPr>
+        <p:style>
+          <a:lnRef idx="2">
+            <a:schemeClr val="accent1">
+              <a:shade val="15000"/>
+            </a:schemeClr>
+          </a:lnRef>
+          <a:fillRef idx="1">
+            <a:schemeClr val="accent1"/>
+          </a:fillRef>
+          <a:effectRef idx="0">
+            <a:schemeClr val="accent1"/>
+          </a:effectRef>
+          <a:fontRef idx="minor">
+            <a:schemeClr val="lt1"/>
+          </a:fontRef>
+        </p:style>
+        <p:txBody>
+          <a:bodyPr rtlCol="0" anchor="ctr"/>
+          <a:lstStyle/>
+          <a:p>
+            <a:pPr algn="ctr"/>
+            <a:r>
+              <a:rPr kumimoji="1" lang="en-US" altLang="ja-JP" sz="3200" dirty="0"/>
+              <a:t>BLJ</a:t>
+            </a:r>
+            <a:endParaRPr kumimoji="1" lang="ja-JP" altLang="en-US" sz="3200"/>
+          </a:p>
+        </p:txBody>
+      </p:sp>
+      <p:sp>
+        <p:nvSpPr>
+          <p:cNvPr id="9" name="正方形/長方形 8">
+            <a:extLst>
+              <a:ext uri="{FF2B5EF4-FFF2-40B4-BE49-F238E27FC236}">
+                <a16:creationId xmlns:a16="http://schemas.microsoft.com/office/drawing/2014/main" id="{91B96C68-87CD-42A4-9B79-4CFD8DCBAEE4}"/>
+              </a:ext>
+            </a:extLst>
+          </p:cNvPr>
+          <p:cNvSpPr/>
+          <p:nvPr/>
+        </p:nvSpPr>
+        <p:spPr>
+          <a:xfrm>
+            <a:off x="3748186" y="3395260"/>
+            <a:ext cx="2576186" cy="588723"/>
+          </a:xfrm>
+          <a:prstGeom prst="rect">
+            <a:avLst/>
+          </a:prstGeom>
+          <a:solidFill>
+            <a:schemeClr val="tx2">
+              <a:lumMod val="75000"/>
+              <a:lumOff val="25000"/>
+            </a:schemeClr>
+          </a:solidFill>
+        </p:spPr>
+        <p:style>
+          <a:lnRef idx="2">
+            <a:schemeClr val="accent1">
+              <a:shade val="15000"/>
+            </a:schemeClr>
+          </a:lnRef>
+          <a:fillRef idx="1">
+            <a:schemeClr val="accent1"/>
+          </a:fillRef>
+          <a:effectRef idx="0">
+            <a:schemeClr val="accent1"/>
+          </a:effectRef>
+          <a:fontRef idx="minor">
+            <a:schemeClr val="lt1"/>
+          </a:fontRef>
+        </p:style>
+        <p:txBody>
+          <a:bodyPr rtlCol="0" anchor="ctr"/>
+          <a:lstStyle/>
+          <a:p>
+            <a:pPr algn="ctr"/>
+            <a:r>
+              <a:rPr lang="en-US" altLang="ja-JP" sz="3200" dirty="0"/>
+              <a:t>S</a:t>
+            </a:r>
+            <a:r>
+              <a:rPr kumimoji="1" lang="en-US" altLang="ja-JP" sz="3200" dirty="0"/>
+              <a:t>BLJ</a:t>
+            </a:r>
+            <a:endParaRPr kumimoji="1" lang="ja-JP" altLang="en-US" sz="3200"/>
+          </a:p>
+        </p:txBody>
+      </p:sp>
+      <p:sp>
+        <p:nvSpPr>
+          <p:cNvPr id="10" name="正方形/長方形 9">
+            <a:extLst>
+              <a:ext uri="{FF2B5EF4-FFF2-40B4-BE49-F238E27FC236}">
+                <a16:creationId xmlns:a16="http://schemas.microsoft.com/office/drawing/2014/main" id="{654BBFF9-E4A8-34AD-F1BC-7882D597233D}"/>
+              </a:ext>
+            </a:extLst>
+          </p:cNvPr>
+          <p:cNvSpPr/>
+          <p:nvPr/>
+        </p:nvSpPr>
+        <p:spPr>
+          <a:xfrm>
+            <a:off x="3748186" y="4212460"/>
+            <a:ext cx="2576186" cy="588723"/>
+          </a:xfrm>
+          <a:prstGeom prst="rect">
+            <a:avLst/>
+          </a:prstGeom>
+          <a:solidFill>
+            <a:schemeClr val="tx2">
+              <a:lumMod val="75000"/>
+              <a:lumOff val="25000"/>
+            </a:schemeClr>
+          </a:solidFill>
+        </p:spPr>
+        <p:style>
+          <a:lnRef idx="2">
+            <a:schemeClr val="accent1">
+              <a:shade val="15000"/>
+            </a:schemeClr>
+          </a:lnRef>
+          <a:fillRef idx="1">
+            <a:schemeClr val="accent1"/>
+          </a:fillRef>
+          <a:effectRef idx="0">
+            <a:schemeClr val="accent1"/>
+          </a:effectRef>
+          <a:fontRef idx="minor">
+            <a:schemeClr val="lt1"/>
+          </a:fontRef>
+        </p:style>
+        <p:txBody>
+          <a:bodyPr rtlCol="0" anchor="ctr"/>
+          <a:lstStyle/>
+          <a:p>
+            <a:pPr algn="ctr"/>
+            <a:r>
+              <a:rPr lang="en-US" altLang="ja-JP" sz="3200" dirty="0"/>
+              <a:t>DDD Skip</a:t>
+            </a:r>
+            <a:endParaRPr kumimoji="1" lang="ja-JP" altLang="en-US" sz="3200"/>
+          </a:p>
+        </p:txBody>
+      </p:sp>
+      <p:cxnSp>
+        <p:nvCxnSpPr>
+          <p:cNvPr id="14" name="直線コネクタ 13">
+            <a:extLst>
+              <a:ext uri="{FF2B5EF4-FFF2-40B4-BE49-F238E27FC236}">
+                <a16:creationId xmlns:a16="http://schemas.microsoft.com/office/drawing/2014/main" id="{116A0371-9DDC-7E7F-64D7-EE4FEFDE23E9}"/>
+              </a:ext>
+            </a:extLst>
+          </p:cNvPr>
+          <p:cNvCxnSpPr>
+            <a:cxnSpLocks/>
+          </p:cNvCxnSpPr>
+          <p:nvPr/>
+        </p:nvCxnSpPr>
+        <p:spPr>
+          <a:xfrm>
+            <a:off x="6094800" y="2217107"/>
+            <a:ext cx="0" cy="111600"/>
+          </a:xfrm>
+          <a:prstGeom prst="line">
+            <a:avLst/>
+          </a:prstGeom>
+          <a:ln>
+            <a:solidFill>
+              <a:schemeClr val="tx1"/>
+            </a:solidFill>
+          </a:ln>
+        </p:spPr>
+        <p:style>
+          <a:lnRef idx="2">
+            <a:schemeClr val="accent1"/>
+          </a:lnRef>
+          <a:fillRef idx="0">
+            <a:schemeClr val="accent1"/>
+          </a:fillRef>
+          <a:effectRef idx="1">
+            <a:schemeClr val="accent1"/>
+          </a:effectRef>
+          <a:fontRef idx="minor">
+            <a:schemeClr val="tx1"/>
+          </a:fontRef>
+        </p:style>
+      </p:cxnSp>
+      <p:cxnSp>
+        <p:nvCxnSpPr>
+          <p:cNvPr id="20" name="直線コネクタ 19">
+            <a:extLst>
+              <a:ext uri="{FF2B5EF4-FFF2-40B4-BE49-F238E27FC236}">
+                <a16:creationId xmlns:a16="http://schemas.microsoft.com/office/drawing/2014/main" id="{3571B4D5-7436-638F-C7AB-90CCF36DB3E1}"/>
+              </a:ext>
+            </a:extLst>
+          </p:cNvPr>
+          <p:cNvCxnSpPr>
+            <a:cxnSpLocks/>
+          </p:cNvCxnSpPr>
+          <p:nvPr/>
+        </p:nvCxnSpPr>
+        <p:spPr>
+          <a:xfrm>
+            <a:off x="1680051" y="3165753"/>
+            <a:ext cx="0" cy="111600"/>
+          </a:xfrm>
+          <a:prstGeom prst="line">
+            <a:avLst/>
+          </a:prstGeom>
+          <a:ln>
+            <a:solidFill>
+              <a:schemeClr val="tx1"/>
+            </a:solidFill>
+          </a:ln>
+        </p:spPr>
+        <p:style>
+          <a:lnRef idx="2">
+            <a:schemeClr val="accent1"/>
+          </a:lnRef>
+          <a:fillRef idx="0">
+            <a:schemeClr val="accent1"/>
+          </a:fillRef>
+          <a:effectRef idx="1">
+            <a:schemeClr val="accent1"/>
+          </a:effectRef>
+          <a:fontRef idx="minor">
+            <a:schemeClr val="tx1"/>
+          </a:fontRef>
+        </p:style>
+      </p:cxnSp>
+      <p:cxnSp>
+        <p:nvCxnSpPr>
+          <p:cNvPr id="23" name="直線コネクタ 22">
+            <a:extLst>
+              <a:ext uri="{FF2B5EF4-FFF2-40B4-BE49-F238E27FC236}">
+                <a16:creationId xmlns:a16="http://schemas.microsoft.com/office/drawing/2014/main" id="{01B1A502-55DF-0120-FA8F-D55D77D2C409}"/>
+              </a:ext>
+            </a:extLst>
+          </p:cNvPr>
+          <p:cNvCxnSpPr>
+            <a:cxnSpLocks/>
+          </p:cNvCxnSpPr>
+          <p:nvPr/>
+        </p:nvCxnSpPr>
+        <p:spPr>
+          <a:xfrm>
+            <a:off x="1687590" y="3279805"/>
+            <a:ext cx="0" cy="111600"/>
+          </a:xfrm>
+          <a:prstGeom prst="line">
+            <a:avLst/>
+          </a:prstGeom>
+          <a:ln>
+            <a:solidFill>
+              <a:schemeClr val="tx1"/>
+            </a:solidFill>
+          </a:ln>
+        </p:spPr>
+        <p:style>
+          <a:lnRef idx="2">
+            <a:schemeClr val="accent1"/>
+          </a:lnRef>
+          <a:fillRef idx="0">
+            <a:schemeClr val="accent1"/>
+          </a:fillRef>
+          <a:effectRef idx="1">
+            <a:schemeClr val="accent1"/>
+          </a:effectRef>
+          <a:fontRef idx="minor">
+            <a:schemeClr val="tx1"/>
+          </a:fontRef>
+        </p:style>
+      </p:cxnSp>
+      <p:cxnSp>
+        <p:nvCxnSpPr>
+          <p:cNvPr id="25" name="直線コネクタ 24">
+            <a:extLst>
+              <a:ext uri="{FF2B5EF4-FFF2-40B4-BE49-F238E27FC236}">
+                <a16:creationId xmlns:a16="http://schemas.microsoft.com/office/drawing/2014/main" id="{1AF20836-68BA-E2BA-F8D7-4731BFC2A616}"/>
+              </a:ext>
+            </a:extLst>
+          </p:cNvPr>
+          <p:cNvCxnSpPr>
+            <a:cxnSpLocks/>
+          </p:cNvCxnSpPr>
+          <p:nvPr/>
+        </p:nvCxnSpPr>
+        <p:spPr>
+          <a:xfrm>
+            <a:off x="5031990" y="3279805"/>
+            <a:ext cx="0" cy="111600"/>
+          </a:xfrm>
+          <a:prstGeom prst="line">
+            <a:avLst/>
+          </a:prstGeom>
+          <a:ln>
+            <a:solidFill>
+              <a:schemeClr val="tx1"/>
+            </a:solidFill>
+          </a:ln>
+        </p:spPr>
+        <p:style>
+          <a:lnRef idx="2">
+            <a:schemeClr val="accent1"/>
+          </a:lnRef>
+          <a:fillRef idx="0">
+            <a:schemeClr val="accent1"/>
+          </a:fillRef>
+          <a:effectRef idx="1">
+            <a:schemeClr val="accent1"/>
+          </a:effectRef>
+          <a:fontRef idx="minor">
+            <a:schemeClr val="tx1"/>
+          </a:fontRef>
+        </p:style>
+      </p:cxnSp>
+      <p:cxnSp>
+        <p:nvCxnSpPr>
+          <p:cNvPr id="26" name="直線コネクタ 25">
+            <a:extLst>
+              <a:ext uri="{FF2B5EF4-FFF2-40B4-BE49-F238E27FC236}">
+                <a16:creationId xmlns:a16="http://schemas.microsoft.com/office/drawing/2014/main" id="{30589CED-231B-829B-114D-843B8501A288}"/>
+              </a:ext>
+            </a:extLst>
+          </p:cNvPr>
+          <p:cNvCxnSpPr>
+            <a:cxnSpLocks/>
+            <a:endCxn id="10" idx="0"/>
+          </p:cNvCxnSpPr>
+          <p:nvPr/>
+        </p:nvCxnSpPr>
+        <p:spPr>
+          <a:xfrm>
+            <a:off x="5031990" y="3983983"/>
+            <a:ext cx="3600" cy="228477"/>
+          </a:xfrm>
+          <a:prstGeom prst="line">
+            <a:avLst/>
+          </a:prstGeom>
+          <a:ln>
+            <a:solidFill>
+              <a:schemeClr val="tx1"/>
+            </a:solidFill>
+          </a:ln>
+        </p:spPr>
+        <p:style>
+          <a:lnRef idx="2">
+            <a:schemeClr val="accent1"/>
+          </a:lnRef>
+          <a:fillRef idx="0">
+            <a:schemeClr val="accent1"/>
+          </a:fillRef>
+          <a:effectRef idx="1">
+            <a:schemeClr val="accent1"/>
+          </a:effectRef>
+          <a:fontRef idx="minor">
+            <a:schemeClr val="tx1"/>
+          </a:fontRef>
+        </p:style>
+      </p:cxnSp>
+      <p:cxnSp>
+        <p:nvCxnSpPr>
+          <p:cNvPr id="29" name="直線コネクタ 28">
+            <a:extLst>
+              <a:ext uri="{FF2B5EF4-FFF2-40B4-BE49-F238E27FC236}">
+                <a16:creationId xmlns:a16="http://schemas.microsoft.com/office/drawing/2014/main" id="{7D42F501-5EEB-533A-DF29-8DFB2F03DB58}"/>
+              </a:ext>
+            </a:extLst>
+          </p:cNvPr>
+          <p:cNvCxnSpPr>
+            <a:cxnSpLocks/>
+          </p:cNvCxnSpPr>
+          <p:nvPr/>
+        </p:nvCxnSpPr>
+        <p:spPr>
+          <a:xfrm>
+            <a:off x="1677170" y="2328707"/>
+            <a:ext cx="8715556" cy="0"/>
+          </a:xfrm>
+          <a:prstGeom prst="line">
+            <a:avLst/>
+          </a:prstGeom>
+          <a:ln>
+            <a:solidFill>
+              <a:schemeClr val="tx1"/>
+            </a:solidFill>
+          </a:ln>
+        </p:spPr>
+        <p:style>
+          <a:lnRef idx="2">
+            <a:schemeClr val="accent1"/>
+          </a:lnRef>
+          <a:fillRef idx="0">
+            <a:schemeClr val="accent1"/>
+          </a:fillRef>
+          <a:effectRef idx="1">
+            <a:schemeClr val="accent1"/>
+          </a:effectRef>
+          <a:fontRef idx="minor">
+            <a:schemeClr val="tx1"/>
+          </a:fontRef>
+        </p:style>
+      </p:cxnSp>
+      <p:cxnSp>
+        <p:nvCxnSpPr>
+          <p:cNvPr id="31" name="直線コネクタ 30">
+            <a:extLst>
+              <a:ext uri="{FF2B5EF4-FFF2-40B4-BE49-F238E27FC236}">
+                <a16:creationId xmlns:a16="http://schemas.microsoft.com/office/drawing/2014/main" id="{43E526C5-2FB4-D8D4-1951-39BEF5926F6A}"/>
+              </a:ext>
+            </a:extLst>
+          </p:cNvPr>
+          <p:cNvCxnSpPr>
+            <a:cxnSpLocks/>
+          </p:cNvCxnSpPr>
+          <p:nvPr/>
+        </p:nvCxnSpPr>
+        <p:spPr>
+          <a:xfrm>
+            <a:off x="1680051" y="3277353"/>
+            <a:ext cx="4848313" cy="0"/>
+          </a:xfrm>
+          <a:prstGeom prst="line">
+            <a:avLst/>
+          </a:prstGeom>
+          <a:ln>
+            <a:solidFill>
+              <a:schemeClr val="tx1"/>
+            </a:solidFill>
+          </a:ln>
+        </p:spPr>
+        <p:style>
+          <a:lnRef idx="2">
+            <a:schemeClr val="accent1"/>
+          </a:lnRef>
+          <a:fillRef idx="0">
+            <a:schemeClr val="accent1"/>
+          </a:fillRef>
+          <a:effectRef idx="1">
+            <a:schemeClr val="accent1"/>
+          </a:effectRef>
+          <a:fontRef idx="minor">
+            <a:schemeClr val="tx1"/>
+          </a:fontRef>
+        </p:style>
+      </p:cxnSp>
+      <p:sp>
+        <p:nvSpPr>
+          <p:cNvPr id="34" name="テキスト ボックス 33">
+            <a:extLst>
+              <a:ext uri="{FF2B5EF4-FFF2-40B4-BE49-F238E27FC236}">
+                <a16:creationId xmlns:a16="http://schemas.microsoft.com/office/drawing/2014/main" id="{693B50E0-4D73-EA2D-5BFA-10D91714ABC3}"/>
+              </a:ext>
+            </a:extLst>
+          </p:cNvPr>
+          <p:cNvSpPr txBox="1"/>
+          <p:nvPr/>
+        </p:nvSpPr>
+        <p:spPr>
+          <a:xfrm rot="16200000">
+            <a:off x="10221038" y="2092119"/>
+            <a:ext cx="461918" cy="584775"/>
+          </a:xfrm>
+          <a:prstGeom prst="rect">
+            <a:avLst/>
+          </a:prstGeom>
+          <a:noFill/>
+        </p:spPr>
+        <p:txBody>
+          <a:bodyPr wrap="square" rtlCol="0">
+            <a:spAutoFit/>
+          </a:bodyPr>
+          <a:lstStyle/>
+          <a:p>
+            <a:r>
+              <a:rPr kumimoji="1" lang="en-US" altLang="ja-JP" sz="3200" dirty="0"/>
+              <a:t>〜</a:t>
+            </a:r>
+            <a:endParaRPr kumimoji="1" lang="ja-JP" altLang="en-US" sz="3200"/>
+          </a:p>
+        </p:txBody>
+      </p:sp>
+      <p:sp>
+        <p:nvSpPr>
+          <p:cNvPr id="35" name="テキスト ボックス 34">
+            <a:extLst>
+              <a:ext uri="{FF2B5EF4-FFF2-40B4-BE49-F238E27FC236}">
+                <a16:creationId xmlns:a16="http://schemas.microsoft.com/office/drawing/2014/main" id="{7423B9E2-B039-D31D-6D9D-983051631B58}"/>
+              </a:ext>
+            </a:extLst>
+          </p:cNvPr>
+          <p:cNvSpPr txBox="1"/>
+          <p:nvPr/>
+        </p:nvSpPr>
+        <p:spPr>
+          <a:xfrm rot="16200000">
+            <a:off x="6324181" y="3043217"/>
+            <a:ext cx="461918" cy="584775"/>
+          </a:xfrm>
+          <a:prstGeom prst="rect">
+            <a:avLst/>
+          </a:prstGeom>
+          <a:noFill/>
+        </p:spPr>
+        <p:txBody>
+          <a:bodyPr wrap="square" rtlCol="0">
+            <a:spAutoFit/>
+          </a:bodyPr>
+          <a:lstStyle/>
+          <a:p>
+            <a:r>
+              <a:rPr kumimoji="1" lang="en-US" altLang="ja-JP" sz="3200" dirty="0"/>
+              <a:t>〜</a:t>
+            </a:r>
+            <a:endParaRPr kumimoji="1" lang="ja-JP" altLang="en-US" sz="3200"/>
+          </a:p>
+        </p:txBody>
+      </p:sp>
+      <p:cxnSp>
+        <p:nvCxnSpPr>
+          <p:cNvPr id="39" name="直線コネクタ 38">
+            <a:extLst>
+              <a:ext uri="{FF2B5EF4-FFF2-40B4-BE49-F238E27FC236}">
+                <a16:creationId xmlns:a16="http://schemas.microsoft.com/office/drawing/2014/main" id="{22B8CC19-59DF-04EC-6124-DA187C0E44EF}"/>
+              </a:ext>
+            </a:extLst>
+          </p:cNvPr>
+          <p:cNvCxnSpPr>
+            <a:cxnSpLocks/>
+          </p:cNvCxnSpPr>
+          <p:nvPr/>
+        </p:nvCxnSpPr>
+        <p:spPr>
+          <a:xfrm flipH="1">
+            <a:off x="1677734" y="2343686"/>
+            <a:ext cx="2317" cy="226800"/>
+          </a:xfrm>
+          <a:prstGeom prst="line">
+            <a:avLst/>
+          </a:prstGeom>
+          <a:ln>
+            <a:solidFill>
+              <a:schemeClr val="tx1"/>
+            </a:solidFill>
+          </a:ln>
+        </p:spPr>
+        <p:style>
+          <a:lnRef idx="2">
+            <a:schemeClr val="accent1"/>
+          </a:lnRef>
+          <a:fillRef idx="0">
+            <a:schemeClr val="accent1"/>
+          </a:fillRef>
+          <a:effectRef idx="1">
+            <a:schemeClr val="accent1"/>
+          </a:effectRef>
+          <a:fontRef idx="minor">
+            <a:schemeClr val="tx1"/>
+          </a:fontRef>
+        </p:style>
+      </p:cxnSp>
+      <p:cxnSp>
+        <p:nvCxnSpPr>
+          <p:cNvPr id="44" name="直線コネクタ 43">
+            <a:extLst>
+              <a:ext uri="{FF2B5EF4-FFF2-40B4-BE49-F238E27FC236}">
+                <a16:creationId xmlns:a16="http://schemas.microsoft.com/office/drawing/2014/main" id="{33EE814C-EA39-C520-0A55-7CBAED752E13}"/>
+              </a:ext>
+            </a:extLst>
+          </p:cNvPr>
+          <p:cNvCxnSpPr>
+            <a:cxnSpLocks/>
+          </p:cNvCxnSpPr>
+          <p:nvPr/>
+        </p:nvCxnSpPr>
+        <p:spPr>
+          <a:xfrm>
+            <a:off x="8890801" y="2328707"/>
+            <a:ext cx="0" cy="226800"/>
+          </a:xfrm>
+          <a:prstGeom prst="line">
+            <a:avLst/>
+          </a:prstGeom>
+          <a:ln>
+            <a:solidFill>
+              <a:schemeClr val="tx1"/>
+            </a:solidFill>
+          </a:ln>
+        </p:spPr>
+        <p:style>
+          <a:lnRef idx="2">
+            <a:schemeClr val="accent1"/>
+          </a:lnRef>
+          <a:fillRef idx="0">
+            <a:schemeClr val="accent1"/>
+          </a:fillRef>
+          <a:effectRef idx="1">
+            <a:schemeClr val="accent1"/>
+          </a:effectRef>
+          <a:fontRef idx="minor">
+            <a:schemeClr val="tx1"/>
+          </a:fontRef>
+        </p:style>
+      </p:cxnSp>
+      <p:sp>
+        <p:nvSpPr>
+          <p:cNvPr id="51" name="正方形/長方形 50">
+            <a:extLst>
+              <a:ext uri="{FF2B5EF4-FFF2-40B4-BE49-F238E27FC236}">
+                <a16:creationId xmlns:a16="http://schemas.microsoft.com/office/drawing/2014/main" id="{CEB0A27D-34A1-927B-743F-F897E1BEA1F7}"/>
+              </a:ext>
+            </a:extLst>
+          </p:cNvPr>
+          <p:cNvSpPr/>
+          <p:nvPr/>
+        </p:nvSpPr>
+        <p:spPr>
+          <a:xfrm>
+            <a:off x="7599600" y="2577030"/>
+            <a:ext cx="2576186" cy="588723"/>
+          </a:xfrm>
+          <a:prstGeom prst="rect">
+            <a:avLst/>
+          </a:prstGeom>
+          <a:solidFill>
+            <a:schemeClr val="tx2">
+              <a:lumMod val="75000"/>
+              <a:lumOff val="25000"/>
+            </a:schemeClr>
+          </a:solidFill>
+        </p:spPr>
+        <p:style>
+          <a:lnRef idx="2">
+            <a:schemeClr val="accent1">
+              <a:shade val="15000"/>
+            </a:schemeClr>
+          </a:lnRef>
+          <a:fillRef idx="1">
+            <a:schemeClr val="accent1"/>
+          </a:fillRef>
+          <a:effectRef idx="0">
+            <a:schemeClr val="accent1"/>
+          </a:effectRef>
+          <a:fontRef idx="minor">
+            <a:schemeClr val="lt1"/>
+          </a:fontRef>
+        </p:style>
+        <p:txBody>
+          <a:bodyPr rtlCol="0" anchor="ctr"/>
+          <a:lstStyle/>
+          <a:p>
+            <a:pPr algn="ctr"/>
+            <a:r>
+              <a:rPr kumimoji="1" lang="en-US" altLang="ja-JP" dirty="0"/>
+              <a:t>Miscellaneous Wall Clipping</a:t>
+            </a:r>
+            <a:endParaRPr kumimoji="1" lang="ja-JP" altLang="en-US"/>
+          </a:p>
+        </p:txBody>
+      </p:sp>
+      <p:sp>
+        <p:nvSpPr>
+          <p:cNvPr id="59" name="正方形/長方形 58">
+            <a:extLst>
+              <a:ext uri="{FF2B5EF4-FFF2-40B4-BE49-F238E27FC236}">
+                <a16:creationId xmlns:a16="http://schemas.microsoft.com/office/drawing/2014/main" id="{3CD5000E-6E54-FB75-37F3-DEC38C23262C}"/>
+              </a:ext>
+            </a:extLst>
+          </p:cNvPr>
+          <p:cNvSpPr/>
+          <p:nvPr/>
+        </p:nvSpPr>
+        <p:spPr>
+          <a:xfrm>
+            <a:off x="7599600" y="3392385"/>
+            <a:ext cx="2576186" cy="588723"/>
+          </a:xfrm>
+          <a:prstGeom prst="rect">
+            <a:avLst/>
+          </a:prstGeom>
+          <a:solidFill>
+            <a:schemeClr val="tx2">
+              <a:lumMod val="75000"/>
+              <a:lumOff val="25000"/>
+            </a:schemeClr>
+          </a:solidFill>
+        </p:spPr>
+        <p:style>
+          <a:lnRef idx="2">
+            <a:schemeClr val="accent1">
+              <a:shade val="15000"/>
+            </a:schemeClr>
+          </a:lnRef>
+          <a:fillRef idx="1">
+            <a:schemeClr val="accent1"/>
+          </a:fillRef>
+          <a:effectRef idx="0">
+            <a:schemeClr val="accent1"/>
+          </a:effectRef>
+          <a:fontRef idx="minor">
+            <a:schemeClr val="lt1"/>
+          </a:fontRef>
+        </p:style>
+        <p:txBody>
+          <a:bodyPr rtlCol="0" anchor="ctr"/>
+          <a:lstStyle/>
+          <a:p>
+            <a:pPr algn="ctr"/>
+            <a:r>
+              <a:rPr lang="en-US" altLang="ja-JP" sz="2400" dirty="0"/>
+              <a:t>Ledge Clipping</a:t>
+            </a:r>
+            <a:endParaRPr kumimoji="1" lang="ja-JP" altLang="en-US" sz="2400"/>
+          </a:p>
+        </p:txBody>
+      </p:sp>
+      <p:cxnSp>
+        <p:nvCxnSpPr>
+          <p:cNvPr id="60" name="直線コネクタ 59">
+            <a:extLst>
+              <a:ext uri="{FF2B5EF4-FFF2-40B4-BE49-F238E27FC236}">
+                <a16:creationId xmlns:a16="http://schemas.microsoft.com/office/drawing/2014/main" id="{83105DF5-1609-B818-7D06-2DF6D9EA0E15}"/>
+              </a:ext>
+            </a:extLst>
+          </p:cNvPr>
+          <p:cNvCxnSpPr>
+            <a:cxnSpLocks/>
+            <a:endCxn id="59" idx="0"/>
+          </p:cNvCxnSpPr>
+          <p:nvPr/>
+        </p:nvCxnSpPr>
+        <p:spPr>
+          <a:xfrm>
+            <a:off x="8883404" y="3163908"/>
+            <a:ext cx="3600" cy="228477"/>
+          </a:xfrm>
+          <a:prstGeom prst="line">
+            <a:avLst/>
+          </a:prstGeom>
+          <a:ln>
+            <a:solidFill>
+              <a:schemeClr val="tx1"/>
+            </a:solidFill>
+          </a:ln>
+        </p:spPr>
+        <p:style>
+          <a:lnRef idx="2">
+            <a:schemeClr val="accent1"/>
+          </a:lnRef>
+          <a:fillRef idx="0">
+            <a:schemeClr val="accent1"/>
+          </a:fillRef>
+          <a:effectRef idx="1">
+            <a:schemeClr val="accent1"/>
+          </a:effectRef>
+          <a:fontRef idx="minor">
+            <a:schemeClr val="tx1"/>
+          </a:fontRef>
+        </p:style>
+      </p:cxnSp>
+    </p:spTree>
+    <p:extLst>
+      <p:ext uri="{BB962C8B-B14F-4D97-AF65-F5344CB8AC3E}">
+        <p14:creationId xmlns:p14="http://schemas.microsoft.com/office/powerpoint/2010/main" val="1901908118"/>
+      </p:ext>
+    </p:extLst>
+  </p:cSld>
+  <p:clrMapOvr>
+    <a:masterClrMapping/>
+  </p:clrMapOvr>
+</p:sld>
+</file>
+
+<file path=ppt/slides/slide8.xml><?xml version="1.0" encoding="utf-8"?>
+<p:sld xmlns:a="http://schemas.openxmlformats.org/drawingml/2006/main" xmlns:r="http://schemas.openxmlformats.org/officeDocument/2006/relationships" xmlns:p="http://schemas.openxmlformats.org/presentationml/2006/main">
+  <p:cSld>
+    <p:spTree>
+      <p:nvGrpSpPr>
+        <p:cNvPr id="1" name="">
+          <a:extLst>
+            <a:ext uri="{FF2B5EF4-FFF2-40B4-BE49-F238E27FC236}">
+              <a16:creationId xmlns:a16="http://schemas.microsoft.com/office/drawing/2014/main" id="{B11B2CDD-D5E0-D5E6-C64A-680BA9118F0A}"/>
+            </a:ext>
+          </a:extLst>
+        </p:cNvPr>
+        <p:cNvGrpSpPr/>
+        <p:nvPr/>
+      </p:nvGrpSpPr>
+      <p:grpSpPr>
+        <a:xfrm>
+          <a:off x="0" y="0"/>
+          <a:ext cx="0" cy="0"/>
+          <a:chOff x="0" y="0"/>
+          <a:chExt cx="0" cy="0"/>
+        </a:xfrm>
+      </p:grpSpPr>
+      <p:sp>
+        <p:nvSpPr>
+          <p:cNvPr id="2" name="タイトル 1">
+            <a:extLst>
+              <a:ext uri="{FF2B5EF4-FFF2-40B4-BE49-F238E27FC236}">
+                <a16:creationId xmlns:a16="http://schemas.microsoft.com/office/drawing/2014/main" id="{882C15CE-C9D7-7BBA-2ED5-14B8370F4B9F}"/>
+              </a:ext>
+            </a:extLst>
+          </p:cNvPr>
+          <p:cNvSpPr>
+            <a:spLocks noGrp="1"/>
+          </p:cNvSpPr>
+          <p:nvPr>
+            <p:ph type="title"/>
+          </p:nvPr>
+        </p:nvSpPr>
+        <p:spPr/>
+        <p:txBody>
+          <a:bodyPr/>
+          <a:lstStyle/>
+          <a:p>
+            <a:r>
+              <a:rPr lang="en" altLang="ja-JP" dirty="0"/>
+              <a:t>Alternative Approaches</a:t>
+            </a:r>
+            <a:endParaRPr kumimoji="1" lang="ja-JP" altLang="en-US"/>
+          </a:p>
+        </p:txBody>
+      </p:sp>
+      <p:sp>
+        <p:nvSpPr>
+          <p:cNvPr id="3" name="コンテンツ プレースホルダー 2">
+            <a:extLst>
+              <a:ext uri="{FF2B5EF4-FFF2-40B4-BE49-F238E27FC236}">
+                <a16:creationId xmlns:a16="http://schemas.microsoft.com/office/drawing/2014/main" id="{5C7E4A3A-3533-5346-BC65-561DF8E1185D}"/>
+              </a:ext>
+            </a:extLst>
+          </p:cNvPr>
+          <p:cNvSpPr>
+            <a:spLocks noGrp="1"/>
+          </p:cNvSpPr>
+          <p:nvPr>
+            <p:ph idx="1"/>
+          </p:nvPr>
+        </p:nvSpPr>
+        <p:spPr>
+          <a:xfrm>
+            <a:off x="334357" y="2224913"/>
+            <a:ext cx="11523285" cy="3845688"/>
+          </a:xfrm>
+        </p:spPr>
+        <p:txBody>
+          <a:bodyPr/>
+          <a:lstStyle/>
+          <a:p>
+            <a:r>
+              <a:rPr kumimoji="1" lang="en" altLang="ja-JP" sz="3200" b="1" dirty="0"/>
+              <a:t>Simplification</a:t>
+            </a:r>
+            <a:r>
+              <a:rPr kumimoji="1" lang="en" altLang="ja-JP" sz="3200" dirty="0"/>
+              <a:t>: Removing redundant labels to ensure a streamlined and minimal list</a:t>
+            </a:r>
+            <a:r>
+              <a:rPr kumimoji="1" lang="ja-JP" altLang="en" sz="3200"/>
+              <a:t>．</a:t>
+            </a:r>
+            <a:endParaRPr kumimoji="1" lang="en-US" altLang="ja-JP" sz="3200" dirty="0"/>
+          </a:p>
+          <a:p>
+            <a:r>
+              <a:rPr kumimoji="1" lang="en" altLang="ja-JP" sz="3200" b="1" dirty="0"/>
+              <a:t>Generalized Classification</a:t>
+            </a:r>
+            <a:r>
+              <a:rPr kumimoji="1" lang="en" altLang="ja-JP" sz="3200" dirty="0"/>
+              <a:t>: Adopting high-level categories like </a:t>
+            </a:r>
+            <a:r>
+              <a:rPr kumimoji="1" lang="en" altLang="ja-JP" sz="3200" dirty="0" err="1"/>
+              <a:t>OoB</a:t>
+            </a:r>
+            <a:r>
+              <a:rPr kumimoji="1" lang="en" altLang="ja-JP" sz="3200" dirty="0"/>
+              <a:t> (Out of Bounds) and SG (Speed Glitch), consistent with our previous research</a:t>
+            </a:r>
+            <a:r>
+              <a:rPr kumimoji="1" lang="ja-JP" altLang="en" sz="3200"/>
+              <a:t>．</a:t>
+            </a:r>
+            <a:endParaRPr kumimoji="1" lang="en-US" altLang="ja-JP" sz="3200" dirty="0"/>
+          </a:p>
+          <a:p>
+            <a:r>
+              <a:rPr lang="en" altLang="ja-JP" sz="3200" b="1" dirty="0"/>
+              <a:t>Taxonomy Alignment</a:t>
+            </a:r>
+            <a:r>
+              <a:rPr lang="en" altLang="ja-JP" sz="3200" dirty="0"/>
+              <a:t>: Following the taxonomy of prior work to maintain consistency with established research</a:t>
+            </a:r>
+            <a:r>
+              <a:rPr lang="ja-JP" altLang="en" sz="3200"/>
+              <a:t>．</a:t>
+            </a:r>
+            <a:endParaRPr kumimoji="1" lang="en" altLang="ja-JP" sz="3200" dirty="0"/>
+          </a:p>
+        </p:txBody>
+      </p:sp>
+    </p:spTree>
+    <p:extLst>
+      <p:ext uri="{BB962C8B-B14F-4D97-AF65-F5344CB8AC3E}">
+        <p14:creationId xmlns:p14="http://schemas.microsoft.com/office/powerpoint/2010/main" val="4069986680"/>
+      </p:ext>
+    </p:extLst>
+  </p:cSld>
+  <p:clrMapOvr>
+    <a:masterClrMapping/>
+  </p:clrMapOvr>
+</p:sld>
+</file>
+
+<file path=ppt/slides/slide9.xml><?xml version="1.0" encoding="utf-8"?>
+<p:sld xmlns:a="http://schemas.openxmlformats.org/drawingml/2006/main" xmlns:r="http://schemas.openxmlformats.org/officeDocument/2006/relationships" xmlns:p="http://schemas.openxmlformats.org/presentationml/2006/main">
+  <p:cSld>
+    <p:spTree>
+      <p:nvGrpSpPr>
+        <p:cNvPr id="1" name="">
+          <a:extLst>
+            <a:ext uri="{FF2B5EF4-FFF2-40B4-BE49-F238E27FC236}">
+              <a16:creationId xmlns:a16="http://schemas.microsoft.com/office/drawing/2014/main" id="{7AA41F36-2DCB-0460-CD85-46A87BBF60C8}"/>
+            </a:ext>
+          </a:extLst>
+        </p:cNvPr>
+        <p:cNvGrpSpPr/>
+        <p:nvPr/>
+      </p:nvGrpSpPr>
+      <p:grpSpPr>
+        <a:xfrm>
+          <a:off x="0" y="0"/>
+          <a:ext cx="0" cy="0"/>
+          <a:chOff x="0" y="0"/>
+          <a:chExt cx="0" cy="0"/>
+        </a:xfrm>
+      </p:grpSpPr>
+      <p:sp>
+        <p:nvSpPr>
+          <p:cNvPr id="2" name="タイトル 1">
+            <a:extLst>
+              <a:ext uri="{FF2B5EF4-FFF2-40B4-BE49-F238E27FC236}">
+                <a16:creationId xmlns:a16="http://schemas.microsoft.com/office/drawing/2014/main" id="{3A2786F7-0695-7581-3FDC-7BA1178CD361}"/>
+              </a:ext>
+            </a:extLst>
+          </p:cNvPr>
+          <p:cNvSpPr>
+            <a:spLocks noGrp="1"/>
+          </p:cNvSpPr>
+          <p:nvPr>
+            <p:ph type="title"/>
+          </p:nvPr>
+        </p:nvSpPr>
+        <p:spPr/>
+        <p:txBody>
+          <a:bodyPr/>
+          <a:lstStyle/>
+          <a:p>
+            <a:r>
+              <a:rPr lang="en" altLang="ja-JP" dirty="0"/>
+              <a:t>Key Question</a:t>
+            </a:r>
+            <a:endParaRPr kumimoji="1" lang="ja-JP" altLang="en-US"/>
+          </a:p>
+        </p:txBody>
+      </p:sp>
+      <p:sp>
+        <p:nvSpPr>
+          <p:cNvPr id="3" name="コンテンツ プレースホルダー 2">
+            <a:extLst>
+              <a:ext uri="{FF2B5EF4-FFF2-40B4-BE49-F238E27FC236}">
+                <a16:creationId xmlns:a16="http://schemas.microsoft.com/office/drawing/2014/main" id="{9F881D7B-5786-4E1E-47E8-E69C55700AA4}"/>
+              </a:ext>
+            </a:extLst>
+          </p:cNvPr>
+          <p:cNvSpPr>
+            <a:spLocks noGrp="1"/>
+          </p:cNvSpPr>
+          <p:nvPr>
+            <p:ph idx="1"/>
+          </p:nvPr>
+        </p:nvSpPr>
+        <p:spPr>
+          <a:xfrm>
+            <a:off x="334357" y="3672713"/>
+            <a:ext cx="11523285" cy="937387"/>
+          </a:xfrm>
+        </p:spPr>
+        <p:txBody>
+          <a:bodyPr/>
+          <a:lstStyle/>
+          <a:p>
+            <a:r>
+              <a:rPr kumimoji="1" lang="en" altLang="ja-JP" sz="3200" dirty="0"/>
+              <a:t>Given our goal of supporting the speedrun community</a:t>
+            </a:r>
+            <a:r>
+              <a:rPr kumimoji="1" lang="ja-JP" altLang="en" sz="3200"/>
+              <a:t>，</a:t>
+            </a:r>
+            <a:r>
+              <a:rPr kumimoji="1" lang="en" altLang="ja-JP" sz="3200" dirty="0"/>
+              <a:t>which of these approaches is the most appropriate?</a:t>
+            </a:r>
+          </a:p>
+        </p:txBody>
+      </p:sp>
+    </p:spTree>
+    <p:extLst>
+      <p:ext uri="{BB962C8B-B14F-4D97-AF65-F5344CB8AC3E}">
+        <p14:creationId xmlns:p14="http://schemas.microsoft.com/office/powerpoint/2010/main" val="3654698473"/>
       </p:ext>
     </p:extLst>
   </p:cSld>
